--- a/figures/Fig1_main_results_v2.pptx
+++ b/figures/Fig1_main_results_v2.pptx
@@ -2574,7 +2574,7 @@
           </p:nvSpPr>
           <p:spPr>
             <a:xfrm>
-              <a:off x="2707139" y="680766"/>
+              <a:off x="2710246" y="680766"/>
               <a:ext cx="0" cy="1955742"/>
             </a:xfrm>
             <a:custGeom>
@@ -2617,18 +2617,18 @@
           </p:nvSpPr>
           <p:spPr>
             <a:xfrm>
-              <a:off x="3539099" y="1053289"/>
-              <a:ext cx="909047" cy="0"/>
+              <a:off x="3575660" y="1053289"/>
+              <a:ext cx="872156" cy="0"/>
             </a:xfrm>
             <a:custGeom>
               <a:avLst/>
               <a:pathLst>
-                <a:path w="909047" h="0">
+                <a:path w="872156" h="0">
                   <a:moveTo>
                     <a:pt x="0" y="0"/>
                   </a:moveTo>
                   <a:lnTo>
-                    <a:pt x="909047" y="0"/>
+                    <a:pt x="872156" y="0"/>
                   </a:lnTo>
                 </a:path>
               </a:pathLst>
@@ -2657,18 +2657,18 @@
           </p:nvSpPr>
           <p:spPr>
             <a:xfrm>
-              <a:off x="3540720" y="960158"/>
-              <a:ext cx="912370" cy="0"/>
+              <a:off x="3577866" y="960158"/>
+              <a:ext cx="875480" cy="0"/>
             </a:xfrm>
             <a:custGeom>
               <a:avLst/>
               <a:pathLst>
-                <a:path w="912370" h="0">
+                <a:path w="875480" h="0">
                   <a:moveTo>
                     <a:pt x="0" y="0"/>
                   </a:moveTo>
                   <a:lnTo>
-                    <a:pt x="912370" y="0"/>
+                    <a:pt x="875480" y="0"/>
                   </a:lnTo>
                 </a:path>
               </a:pathLst>
@@ -2697,18 +2697,18 @@
           </p:nvSpPr>
           <p:spPr>
             <a:xfrm>
-              <a:off x="3553523" y="867027"/>
-              <a:ext cx="916782" cy="0"/>
+              <a:off x="3590701" y="867027"/>
+              <a:ext cx="879604" cy="0"/>
             </a:xfrm>
             <a:custGeom>
               <a:avLst/>
               <a:pathLst>
-                <a:path w="916782" h="0">
+                <a:path w="879604" h="0">
                   <a:moveTo>
                     <a:pt x="0" y="0"/>
                   </a:moveTo>
                   <a:lnTo>
-                    <a:pt x="916782" y="0"/>
+                    <a:pt x="879604" y="0"/>
                   </a:lnTo>
                 </a:path>
               </a:pathLst>
@@ -2737,18 +2737,18 @@
           </p:nvSpPr>
           <p:spPr>
             <a:xfrm>
-              <a:off x="3449785" y="1518942"/>
-              <a:ext cx="856319" cy="0"/>
+              <a:off x="3431082" y="1518942"/>
+              <a:ext cx="824459" cy="0"/>
             </a:xfrm>
             <a:custGeom>
               <a:avLst/>
               <a:pathLst>
-                <a:path w="856319" h="0">
+                <a:path w="824459" h="0">
                   <a:moveTo>
                     <a:pt x="0" y="0"/>
                   </a:moveTo>
                   <a:lnTo>
-                    <a:pt x="856319" y="0"/>
+                    <a:pt x="824459" y="0"/>
                   </a:lnTo>
                 </a:path>
               </a:pathLst>
@@ -2777,18 +2777,18 @@
           </p:nvSpPr>
           <p:spPr>
             <a:xfrm>
-              <a:off x="3480516" y="1425811"/>
-              <a:ext cx="873873" cy="0"/>
+              <a:off x="3460161" y="1425811"/>
+              <a:ext cx="841655" cy="0"/>
             </a:xfrm>
             <a:custGeom>
               <a:avLst/>
               <a:pathLst>
-                <a:path w="873873" h="0">
+                <a:path w="841655" h="0">
                   <a:moveTo>
                     <a:pt x="0" y="0"/>
                   </a:moveTo>
                   <a:lnTo>
-                    <a:pt x="873873" y="0"/>
+                    <a:pt x="841655" y="0"/>
                   </a:lnTo>
                 </a:path>
               </a:pathLst>
@@ -2817,18 +2817,18 @@
           </p:nvSpPr>
           <p:spPr>
             <a:xfrm>
-              <a:off x="3458860" y="1332680"/>
-              <a:ext cx="894088" cy="0"/>
+              <a:off x="3438966" y="1332680"/>
+              <a:ext cx="861224" cy="0"/>
             </a:xfrm>
             <a:custGeom>
               <a:avLst/>
               <a:pathLst>
-                <a:path w="894088" h="0">
+                <a:path w="861224" h="0">
                   <a:moveTo>
                     <a:pt x="0" y="0"/>
                   </a:moveTo>
                   <a:lnTo>
-                    <a:pt x="894088" y="0"/>
+                    <a:pt x="861224" y="0"/>
                   </a:lnTo>
                 </a:path>
               </a:pathLst>
@@ -2857,18 +2857,18 @@
           </p:nvSpPr>
           <p:spPr>
             <a:xfrm>
-              <a:off x="2343417" y="1984595"/>
-              <a:ext cx="690152" cy="0"/>
+              <a:off x="2358487" y="1984595"/>
+              <a:ext cx="663549" cy="0"/>
             </a:xfrm>
             <a:custGeom>
               <a:avLst/>
               <a:pathLst>
-                <a:path w="690152" h="0">
+                <a:path w="663549" h="0">
                   <a:moveTo>
                     <a:pt x="0" y="0"/>
                   </a:moveTo>
                   <a:lnTo>
-                    <a:pt x="690152" y="0"/>
+                    <a:pt x="663549" y="0"/>
                   </a:lnTo>
                 </a:path>
               </a:pathLst>
@@ -2897,18 +2897,18 @@
           </p:nvSpPr>
           <p:spPr>
             <a:xfrm>
-              <a:off x="2343003" y="1891464"/>
-              <a:ext cx="693282" cy="0"/>
+              <a:off x="2357970" y="1891464"/>
+              <a:ext cx="666561" cy="0"/>
             </a:xfrm>
             <a:custGeom>
               <a:avLst/>
               <a:pathLst>
-                <a:path w="693282" h="0">
+                <a:path w="666561" h="0">
                   <a:moveTo>
                     <a:pt x="0" y="0"/>
                   </a:moveTo>
                   <a:lnTo>
-                    <a:pt x="693282" y="0"/>
+                    <a:pt x="666561" y="0"/>
                   </a:lnTo>
                 </a:path>
               </a:pathLst>
@@ -2937,18 +2937,18 @@
           </p:nvSpPr>
           <p:spPr>
             <a:xfrm>
-              <a:off x="2342632" y="1798333"/>
-              <a:ext cx="695958" cy="0"/>
+              <a:off x="2357477" y="1798333"/>
+              <a:ext cx="669150" cy="0"/>
             </a:xfrm>
             <a:custGeom>
               <a:avLst/>
               <a:pathLst>
-                <a:path w="695958" h="0">
+                <a:path w="669150" h="0">
                   <a:moveTo>
                     <a:pt x="0" y="0"/>
                   </a:moveTo>
                   <a:lnTo>
-                    <a:pt x="695958" y="0"/>
+                    <a:pt x="669150" y="0"/>
                   </a:lnTo>
                 </a:path>
               </a:pathLst>
@@ -2977,18 +2977,18 @@
           </p:nvSpPr>
           <p:spPr>
             <a:xfrm>
-              <a:off x="1669519" y="2450248"/>
-              <a:ext cx="835738" cy="0"/>
+              <a:off x="1669812" y="2450248"/>
+              <a:ext cx="800996" cy="0"/>
             </a:xfrm>
             <a:custGeom>
               <a:avLst/>
               <a:pathLst>
-                <a:path w="835738" h="0">
+                <a:path w="800996" h="0">
                   <a:moveTo>
                     <a:pt x="0" y="0"/>
                   </a:moveTo>
                   <a:lnTo>
-                    <a:pt x="835738" y="0"/>
+                    <a:pt x="800996" y="0"/>
                   </a:lnTo>
                 </a:path>
               </a:pathLst>
@@ -3017,18 +3017,18 @@
           </p:nvSpPr>
           <p:spPr>
             <a:xfrm>
-              <a:off x="1674740" y="2357117"/>
-              <a:ext cx="838468" cy="0"/>
+              <a:off x="1673981" y="2357117"/>
+              <a:ext cx="803624" cy="0"/>
             </a:xfrm>
             <a:custGeom>
               <a:avLst/>
               <a:pathLst>
-                <a:path w="838468" h="0">
+                <a:path w="803624" h="0">
                   <a:moveTo>
                     <a:pt x="0" y="0"/>
                   </a:moveTo>
                   <a:lnTo>
-                    <a:pt x="838468" y="0"/>
+                    <a:pt x="803624" y="0"/>
                   </a:lnTo>
                 </a:path>
               </a:pathLst>
@@ -3058,17 +3058,17 @@
           <p:spPr>
             <a:xfrm>
               <a:off x="1669089" y="2263986"/>
-              <a:ext cx="840467" cy="0"/>
+              <a:ext cx="805418" cy="0"/>
             </a:xfrm>
             <a:custGeom>
               <a:avLst/>
               <a:pathLst>
-                <a:path w="840467" h="0">
+                <a:path w="805418" h="0">
                   <a:moveTo>
                     <a:pt x="0" y="0"/>
                   </a:moveTo>
                   <a:lnTo>
-                    <a:pt x="840467" y="0"/>
+                    <a:pt x="805418" y="0"/>
                   </a:lnTo>
                 </a:path>
               </a:pathLst>
@@ -3097,7 +3097,7 @@
           </p:nvSpPr>
           <p:spPr>
             <a:xfrm>
-              <a:off x="3963785" y="1023451"/>
+              <a:off x="3981902" y="1023451"/>
               <a:ext cx="59674" cy="59674"/>
             </a:xfrm>
             <a:prstGeom prst="ellipse">
@@ -3132,7 +3132,7 @@
           </p:nvSpPr>
           <p:spPr>
             <a:xfrm>
-              <a:off x="3967069" y="930321"/>
+              <a:off x="3985769" y="930321"/>
               <a:ext cx="59674" cy="59674"/>
             </a:xfrm>
             <a:prstGeom prst="ellipse">
@@ -3167,7 +3167,7 @@
           </p:nvSpPr>
           <p:spPr>
             <a:xfrm>
-              <a:off x="3982077" y="837190"/>
+              <a:off x="4000666" y="837190"/>
               <a:ext cx="59674" cy="59674"/>
             </a:xfrm>
             <a:prstGeom prst="ellipse">
@@ -3202,7 +3202,7 @@
           </p:nvSpPr>
           <p:spPr>
             <a:xfrm>
-              <a:off x="3848108" y="1489105"/>
+              <a:off x="3813474" y="1489105"/>
               <a:ext cx="59674" cy="59674"/>
             </a:xfrm>
             <a:prstGeom prst="ellipse">
@@ -3237,7 +3237,7 @@
           </p:nvSpPr>
           <p:spPr>
             <a:xfrm>
-              <a:off x="3887616" y="1395974"/>
+              <a:off x="3851152" y="1395974"/>
               <a:ext cx="59674" cy="59674"/>
             </a:xfrm>
             <a:prstGeom prst="ellipse">
@@ -3272,7 +3272,7 @@
           </p:nvSpPr>
           <p:spPr>
             <a:xfrm>
-              <a:off x="3876067" y="1302843"/>
+              <a:off x="3839741" y="1302843"/>
               <a:ext cx="59674" cy="59674"/>
             </a:xfrm>
             <a:prstGeom prst="ellipse">
@@ -3307,7 +3307,7 @@
           </p:nvSpPr>
           <p:spPr>
             <a:xfrm>
-              <a:off x="2658656" y="1954758"/>
+              <a:off x="2660425" y="1954758"/>
               <a:ext cx="59674" cy="59674"/>
             </a:xfrm>
             <a:prstGeom prst="ellipse">
@@ -3342,7 +3342,7 @@
           </p:nvSpPr>
           <p:spPr>
             <a:xfrm>
-              <a:off x="2659807" y="1861627"/>
+              <a:off x="2661414" y="1861627"/>
               <a:ext cx="59674" cy="59674"/>
             </a:xfrm>
             <a:prstGeom prst="ellipse">
@@ -3377,7 +3377,7 @@
           </p:nvSpPr>
           <p:spPr>
             <a:xfrm>
-              <a:off x="2660774" y="1768496"/>
+              <a:off x="2662215" y="1768496"/>
               <a:ext cx="59674" cy="59674"/>
             </a:xfrm>
             <a:prstGeom prst="ellipse">
@@ -3412,7 +3412,7 @@
           </p:nvSpPr>
           <p:spPr>
             <a:xfrm>
-              <a:off x="2057551" y="2420411"/>
+              <a:off x="2040473" y="2420411"/>
               <a:ext cx="59674" cy="59674"/>
             </a:xfrm>
             <a:prstGeom prst="ellipse">
@@ -3447,7 +3447,7 @@
           </p:nvSpPr>
           <p:spPr>
             <a:xfrm>
-              <a:off x="2064138" y="2327280"/>
+              <a:off x="2045956" y="2327280"/>
               <a:ext cx="59674" cy="59674"/>
             </a:xfrm>
             <a:prstGeom prst="ellipse">
@@ -3482,7 +3482,7 @@
           </p:nvSpPr>
           <p:spPr>
             <a:xfrm>
-              <a:off x="2059485" y="2234149"/>
+              <a:off x="2041961" y="2234149"/>
               <a:ext cx="59674" cy="59674"/>
             </a:xfrm>
             <a:prstGeom prst="ellipse">
@@ -3929,7 +3929,7 @@
           </p:nvSpPr>
           <p:spPr>
             <a:xfrm>
-              <a:off x="1860811" y="2636509"/>
+              <a:off x="1897230" y="2636509"/>
               <a:ext cx="0" cy="31631"/>
             </a:xfrm>
             <a:custGeom>
@@ -3969,7 +3969,7 @@
           </p:nvSpPr>
           <p:spPr>
             <a:xfrm>
-              <a:off x="2307533" y="2636509"/>
+              <a:off x="2326369" y="2636509"/>
               <a:ext cx="0" cy="31631"/>
             </a:xfrm>
             <a:custGeom>
@@ -4009,7 +4009,7 @@
           </p:nvSpPr>
           <p:spPr>
             <a:xfrm>
-              <a:off x="2707139" y="2636509"/>
+              <a:off x="2710246" y="2636509"/>
               <a:ext cx="0" cy="31631"/>
             </a:xfrm>
             <a:custGeom>
@@ -4049,7 +4049,7 @@
           </p:nvSpPr>
           <p:spPr>
             <a:xfrm>
-              <a:off x="3398640" y="2636509"/>
+              <a:off x="3374528" y="2636509"/>
               <a:ext cx="0" cy="31631"/>
             </a:xfrm>
             <a:custGeom>
@@ -4089,7 +4089,7 @@
           </p:nvSpPr>
           <p:spPr>
             <a:xfrm>
-              <a:off x="3983296" y="2636509"/>
+              <a:off x="3936170" y="2636509"/>
               <a:ext cx="0" cy="31631"/>
             </a:xfrm>
             <a:custGeom>
@@ -4129,7 +4129,7 @@
           </p:nvSpPr>
           <p:spPr>
             <a:xfrm>
-              <a:off x="4489747" y="2636509"/>
+              <a:off x="4422687" y="2636509"/>
               <a:ext cx="0" cy="31631"/>
             </a:xfrm>
             <a:custGeom>
@@ -4169,7 +4169,7 @@
           </p:nvSpPr>
           <p:spPr>
             <a:xfrm>
-              <a:off x="1790173" y="2693445"/>
+              <a:off x="1826593" y="2693445"/>
               <a:ext cx="141274" cy="72786"/>
             </a:xfrm>
             <a:prstGeom prst="rect">
@@ -4212,7 +4212,7 @@
           </p:nvSpPr>
           <p:spPr>
             <a:xfrm>
-              <a:off x="2236895" y="2693445"/>
+              <a:off x="2255731" y="2693445"/>
               <a:ext cx="141274" cy="72786"/>
             </a:xfrm>
             <a:prstGeom prst="rect">
@@ -4255,7 +4255,7 @@
           </p:nvSpPr>
           <p:spPr>
             <a:xfrm>
-              <a:off x="2636502" y="2693445"/>
+              <a:off x="2639608" y="2693445"/>
               <a:ext cx="141274" cy="72786"/>
             </a:xfrm>
             <a:prstGeom prst="rect">
@@ -4298,7 +4298,7 @@
           </p:nvSpPr>
           <p:spPr>
             <a:xfrm>
-              <a:off x="3328003" y="2693445"/>
+              <a:off x="3303890" y="2693445"/>
               <a:ext cx="141274" cy="72786"/>
             </a:xfrm>
             <a:prstGeom prst="rect">
@@ -4341,7 +4341,7 @@
           </p:nvSpPr>
           <p:spPr>
             <a:xfrm>
-              <a:off x="3912658" y="2693445"/>
+              <a:off x="3865533" y="2693445"/>
               <a:ext cx="141274" cy="72786"/>
             </a:xfrm>
             <a:prstGeom prst="rect">
@@ -4384,7 +4384,7 @@
           </p:nvSpPr>
           <p:spPr>
             <a:xfrm>
-              <a:off x="4419110" y="2693445"/>
+              <a:off x="4352049" y="2693445"/>
               <a:ext cx="141274" cy="72786"/>
             </a:xfrm>
             <a:prstGeom prst="rect">
@@ -5169,7 +5169,7 @@
           </p:nvSpPr>
           <p:spPr>
             <a:xfrm>
-              <a:off x="5160332" y="2632046"/>
+              <a:off x="5160332" y="2626874"/>
               <a:ext cx="3081337" cy="0"/>
             </a:xfrm>
             <a:custGeom>
@@ -5212,7 +5212,7 @@
           </p:nvSpPr>
           <p:spPr>
             <a:xfrm>
-              <a:off x="5160332" y="2083244"/>
+              <a:off x="5160332" y="2081187"/>
               <a:ext cx="3081337" cy="0"/>
             </a:xfrm>
             <a:custGeom>
@@ -5255,7 +5255,7 @@
           </p:nvSpPr>
           <p:spPr>
             <a:xfrm>
-              <a:off x="5160332" y="1534442"/>
+              <a:off x="5160332" y="1535501"/>
               <a:ext cx="3081337" cy="0"/>
             </a:xfrm>
             <a:custGeom>
@@ -5298,7 +5298,7 @@
           </p:nvSpPr>
           <p:spPr>
             <a:xfrm>
-              <a:off x="5160332" y="985640"/>
+              <a:off x="5160332" y="989814"/>
               <a:ext cx="3081337" cy="0"/>
             </a:xfrm>
             <a:custGeom>
@@ -5341,372 +5341,372 @@
           </p:nvSpPr>
           <p:spPr>
             <a:xfrm>
-              <a:off x="5300393" y="808469"/>
-              <a:ext cx="2801215" cy="1739142"/>
+              <a:off x="5300393" y="790153"/>
+              <a:ext cx="2801215" cy="1757457"/>
             </a:xfrm>
             <a:custGeom>
               <a:avLst/>
               <a:pathLst>
-                <a:path w="2801215" h="1739142">
+                <a:path w="2801215" h="1757457">
                   <a:moveTo>
-                    <a:pt x="0" y="1580613"/>
+                    <a:pt x="0" y="1608336"/>
                   </a:moveTo>
                   <a:lnTo>
-                    <a:pt x="47478" y="1574720"/>
-                  </a:lnTo>
-                  <a:lnTo>
-                    <a:pt x="94956" y="1568662"/>
-                  </a:lnTo>
-                  <a:lnTo>
-                    <a:pt x="142434" y="1562433"/>
-                  </a:lnTo>
-                  <a:lnTo>
-                    <a:pt x="189912" y="1556026"/>
-                  </a:lnTo>
-                  <a:lnTo>
-                    <a:pt x="237391" y="1549434"/>
-                  </a:lnTo>
-                  <a:lnTo>
-                    <a:pt x="284869" y="1542648"/>
-                  </a:lnTo>
-                  <a:lnTo>
-                    <a:pt x="332347" y="1535659"/>
-                  </a:lnTo>
-                  <a:lnTo>
-                    <a:pt x="379825" y="1528458"/>
-                  </a:lnTo>
-                  <a:lnTo>
-                    <a:pt x="427304" y="1521034"/>
-                  </a:lnTo>
-                  <a:lnTo>
-                    <a:pt x="474782" y="1513377"/>
-                  </a:lnTo>
-                  <a:lnTo>
-                    <a:pt x="522260" y="1505474"/>
-                  </a:lnTo>
-                  <a:lnTo>
-                    <a:pt x="569738" y="1497311"/>
-                  </a:lnTo>
-                  <a:lnTo>
-                    <a:pt x="617217" y="1488874"/>
-                  </a:lnTo>
-                  <a:lnTo>
-                    <a:pt x="664695" y="1480147"/>
-                  </a:lnTo>
-                  <a:lnTo>
-                    <a:pt x="712173" y="1471113"/>
-                  </a:lnTo>
-                  <a:lnTo>
-                    <a:pt x="759651" y="1461752"/>
-                  </a:lnTo>
-                  <a:lnTo>
-                    <a:pt x="807130" y="1452043"/>
-                  </a:lnTo>
-                  <a:lnTo>
-                    <a:pt x="854608" y="1441963"/>
-                  </a:lnTo>
-                  <a:lnTo>
-                    <a:pt x="902086" y="1431485"/>
-                  </a:lnTo>
-                  <a:lnTo>
-                    <a:pt x="949564" y="1420581"/>
-                  </a:lnTo>
-                  <a:lnTo>
-                    <a:pt x="997042" y="1409221"/>
-                  </a:lnTo>
-                  <a:lnTo>
-                    <a:pt x="1044521" y="1397369"/>
-                  </a:lnTo>
-                  <a:lnTo>
-                    <a:pt x="1091999" y="1384988"/>
-                  </a:lnTo>
-                  <a:lnTo>
-                    <a:pt x="1139477" y="1372035"/>
-                  </a:lnTo>
-                  <a:lnTo>
-                    <a:pt x="1186955" y="1358467"/>
-                  </a:lnTo>
-                  <a:lnTo>
-                    <a:pt x="1234434" y="1344233"/>
-                  </a:lnTo>
-                  <a:lnTo>
-                    <a:pt x="1281912" y="1329280"/>
-                  </a:lnTo>
-                  <a:lnTo>
-                    <a:pt x="1329390" y="1313550"/>
-                  </a:lnTo>
-                  <a:lnTo>
-                    <a:pt x="1376868" y="1296983"/>
-                  </a:lnTo>
-                  <a:lnTo>
-                    <a:pt x="1424347" y="1279512"/>
-                  </a:lnTo>
-                  <a:lnTo>
-                    <a:pt x="1471825" y="1261069"/>
-                  </a:lnTo>
-                  <a:lnTo>
-                    <a:pt x="1519303" y="1241582"/>
-                  </a:lnTo>
-                  <a:lnTo>
-                    <a:pt x="1566781" y="1220977"/>
-                  </a:lnTo>
-                  <a:lnTo>
-                    <a:pt x="1614260" y="1199175"/>
-                  </a:lnTo>
-                  <a:lnTo>
-                    <a:pt x="1661738" y="1176098"/>
-                  </a:lnTo>
-                  <a:lnTo>
-                    <a:pt x="1709216" y="1151667"/>
-                  </a:lnTo>
-                  <a:lnTo>
-                    <a:pt x="1756694" y="1125798"/>
-                  </a:lnTo>
-                  <a:lnTo>
-                    <a:pt x="1804173" y="1098410"/>
-                  </a:lnTo>
-                  <a:lnTo>
-                    <a:pt x="1851651" y="1069419"/>
-                  </a:lnTo>
-                  <a:lnTo>
-                    <a:pt x="1899129" y="1038739"/>
-                  </a:lnTo>
-                  <a:lnTo>
-                    <a:pt x="1946607" y="1006284"/>
-                  </a:lnTo>
-                  <a:lnTo>
-                    <a:pt x="1994085" y="971967"/>
-                  </a:lnTo>
-                  <a:lnTo>
-                    <a:pt x="2041564" y="935697"/>
-                  </a:lnTo>
-                  <a:lnTo>
-                    <a:pt x="2089042" y="897381"/>
-                  </a:lnTo>
-                  <a:lnTo>
-                    <a:pt x="2136520" y="856922"/>
-                  </a:lnTo>
-                  <a:lnTo>
-                    <a:pt x="2183998" y="814221"/>
-                  </a:lnTo>
-                  <a:lnTo>
-                    <a:pt x="2231477" y="769174"/>
-                  </a:lnTo>
-                  <a:lnTo>
-                    <a:pt x="2278955" y="721672"/>
-                  </a:lnTo>
-                  <a:lnTo>
-                    <a:pt x="2326433" y="671601"/>
-                  </a:lnTo>
-                  <a:lnTo>
-                    <a:pt x="2373911" y="618842"/>
-                  </a:lnTo>
-                  <a:lnTo>
-                    <a:pt x="2421390" y="563269"/>
-                  </a:lnTo>
-                  <a:lnTo>
-                    <a:pt x="2468868" y="504750"/>
-                  </a:lnTo>
-                  <a:lnTo>
-                    <a:pt x="2516346" y="443146"/>
-                  </a:lnTo>
-                  <a:lnTo>
-                    <a:pt x="2563824" y="378311"/>
-                  </a:lnTo>
-                  <a:lnTo>
-                    <a:pt x="2611303" y="310092"/>
-                  </a:lnTo>
-                  <a:lnTo>
-                    <a:pt x="2658781" y="238325"/>
-                  </a:lnTo>
-                  <a:lnTo>
-                    <a:pt x="2706259" y="162842"/>
-                  </a:lnTo>
-                  <a:lnTo>
-                    <a:pt x="2753737" y="83463"/>
+                    <a:pt x="47478" y="1602511"/>
+                  </a:lnTo>
+                  <a:lnTo>
+                    <a:pt x="94956" y="1596518"/>
+                  </a:lnTo>
+                  <a:lnTo>
+                    <a:pt x="142434" y="1590350"/>
+                  </a:lnTo>
+                  <a:lnTo>
+                    <a:pt x="189912" y="1583999"/>
+                  </a:lnTo>
+                  <a:lnTo>
+                    <a:pt x="237391" y="1577457"/>
+                  </a:lnTo>
+                  <a:lnTo>
+                    <a:pt x="284869" y="1570716"/>
+                  </a:lnTo>
+                  <a:lnTo>
+                    <a:pt x="332347" y="1563767"/>
+                  </a:lnTo>
+                  <a:lnTo>
+                    <a:pt x="379825" y="1556601"/>
+                  </a:lnTo>
+                  <a:lnTo>
+                    <a:pt x="427304" y="1549205"/>
+                  </a:lnTo>
+                  <a:lnTo>
+                    <a:pt x="474782" y="1541570"/>
+                  </a:lnTo>
+                  <a:lnTo>
+                    <a:pt x="522260" y="1533682"/>
+                  </a:lnTo>
+                  <a:lnTo>
+                    <a:pt x="569738" y="1525529"/>
+                  </a:lnTo>
+                  <a:lnTo>
+                    <a:pt x="617217" y="1517094"/>
+                  </a:lnTo>
+                  <a:lnTo>
+                    <a:pt x="664695" y="1508363"/>
+                  </a:lnTo>
+                  <a:lnTo>
+                    <a:pt x="712173" y="1499316"/>
+                  </a:lnTo>
+                  <a:lnTo>
+                    <a:pt x="759651" y="1489936"/>
+                  </a:lnTo>
+                  <a:lnTo>
+                    <a:pt x="807130" y="1480199"/>
+                  </a:lnTo>
+                  <a:lnTo>
+                    <a:pt x="854608" y="1470083"/>
+                  </a:lnTo>
+                  <a:lnTo>
+                    <a:pt x="902086" y="1459561"/>
+                  </a:lnTo>
+                  <a:lnTo>
+                    <a:pt x="949564" y="1448605"/>
+                  </a:lnTo>
+                  <a:lnTo>
+                    <a:pt x="997042" y="1437184"/>
+                  </a:lnTo>
+                  <a:lnTo>
+                    <a:pt x="1044521" y="1425262"/>
+                  </a:lnTo>
+                  <a:lnTo>
+                    <a:pt x="1091999" y="1412801"/>
+                  </a:lnTo>
+                  <a:lnTo>
+                    <a:pt x="1139477" y="1399760"/>
+                  </a:lnTo>
+                  <a:lnTo>
+                    <a:pt x="1186955" y="1386093"/>
+                  </a:lnTo>
+                  <a:lnTo>
+                    <a:pt x="1234434" y="1371750"/>
+                  </a:lnTo>
+                  <a:lnTo>
+                    <a:pt x="1281912" y="1356678"/>
+                  </a:lnTo>
+                  <a:lnTo>
+                    <a:pt x="1329390" y="1340818"/>
+                  </a:lnTo>
+                  <a:lnTo>
+                    <a:pt x="1376868" y="1324108"/>
+                  </a:lnTo>
+                  <a:lnTo>
+                    <a:pt x="1424347" y="1306482"/>
+                  </a:lnTo>
+                  <a:lnTo>
+                    <a:pt x="1471825" y="1287870"/>
+                  </a:lnTo>
+                  <a:lnTo>
+                    <a:pt x="1519303" y="1268198"/>
+                  </a:lnTo>
+                  <a:lnTo>
+                    <a:pt x="1566781" y="1247391"/>
+                  </a:lnTo>
+                  <a:lnTo>
+                    <a:pt x="1614260" y="1225368"/>
+                  </a:lnTo>
+                  <a:lnTo>
+                    <a:pt x="1661738" y="1202049"/>
+                  </a:lnTo>
+                  <a:lnTo>
+                    <a:pt x="1709216" y="1177351"/>
+                  </a:lnTo>
+                  <a:lnTo>
+                    <a:pt x="1756694" y="1151188"/>
+                  </a:lnTo>
+                  <a:lnTo>
+                    <a:pt x="1804173" y="1123474"/>
+                  </a:lnTo>
+                  <a:lnTo>
+                    <a:pt x="1851651" y="1094122"/>
+                  </a:lnTo>
+                  <a:lnTo>
+                    <a:pt x="1899129" y="1063041"/>
+                  </a:lnTo>
+                  <a:lnTo>
+                    <a:pt x="1946607" y="1030141"/>
+                  </a:lnTo>
+                  <a:lnTo>
+                    <a:pt x="1994085" y="995328"/>
+                  </a:lnTo>
+                  <a:lnTo>
+                    <a:pt x="2041564" y="958507"/>
+                  </a:lnTo>
+                  <a:lnTo>
+                    <a:pt x="2089042" y="919577"/>
+                  </a:lnTo>
+                  <a:lnTo>
+                    <a:pt x="2136520" y="878436"/>
+                  </a:lnTo>
+                  <a:lnTo>
+                    <a:pt x="2183998" y="834978"/>
+                  </a:lnTo>
+                  <a:lnTo>
+                    <a:pt x="2231477" y="789091"/>
+                  </a:lnTo>
+                  <a:lnTo>
+                    <a:pt x="2278955" y="740658"/>
+                  </a:lnTo>
+                  <a:lnTo>
+                    <a:pt x="2326433" y="689558"/>
+                  </a:lnTo>
+                  <a:lnTo>
+                    <a:pt x="2373911" y="635662"/>
+                  </a:lnTo>
+                  <a:lnTo>
+                    <a:pt x="2421390" y="578834"/>
+                  </a:lnTo>
+                  <a:lnTo>
+                    <a:pt x="2468868" y="518935"/>
+                  </a:lnTo>
+                  <a:lnTo>
+                    <a:pt x="2516346" y="455813"/>
+                  </a:lnTo>
+                  <a:lnTo>
+                    <a:pt x="2563824" y="389311"/>
+                  </a:lnTo>
+                  <a:lnTo>
+                    <a:pt x="2611303" y="319265"/>
+                  </a:lnTo>
+                  <a:lnTo>
+                    <a:pt x="2658781" y="245499"/>
+                  </a:lnTo>
+                  <a:lnTo>
+                    <a:pt x="2706259" y="167830"/>
+                  </a:lnTo>
+                  <a:lnTo>
+                    <a:pt x="2753737" y="86065"/>
                   </a:lnTo>
                   <a:lnTo>
                     <a:pt x="2801215" y="0"/>
                   </a:lnTo>
                   <a:lnTo>
-                    <a:pt x="2801215" y="1038009"/>
-                  </a:lnTo>
-                  <a:lnTo>
-                    <a:pt x="2753737" y="1057405"/>
-                  </a:lnTo>
-                  <a:lnTo>
-                    <a:pt x="2706259" y="1076447"/>
-                  </a:lnTo>
-                  <a:lnTo>
-                    <a:pt x="2658781" y="1095148"/>
-                  </a:lnTo>
-                  <a:lnTo>
-                    <a:pt x="2611303" y="1113520"/>
-                  </a:lnTo>
-                  <a:lnTo>
-                    <a:pt x="2563824" y="1131576"/>
-                  </a:lnTo>
-                  <a:lnTo>
-                    <a:pt x="2516346" y="1149329"/>
-                  </a:lnTo>
-                  <a:lnTo>
-                    <a:pt x="2468868" y="1166791"/>
-                  </a:lnTo>
-                  <a:lnTo>
-                    <a:pt x="2421390" y="1183976"/>
-                  </a:lnTo>
-                  <a:lnTo>
-                    <a:pt x="2373911" y="1200895"/>
-                  </a:lnTo>
-                  <a:lnTo>
-                    <a:pt x="2326433" y="1217561"/>
-                  </a:lnTo>
-                  <a:lnTo>
-                    <a:pt x="2278955" y="1233987"/>
-                  </a:lnTo>
-                  <a:lnTo>
-                    <a:pt x="2231477" y="1250184"/>
-                  </a:lnTo>
-                  <a:lnTo>
-                    <a:pt x="2183998" y="1266163"/>
-                  </a:lnTo>
-                  <a:lnTo>
-                    <a:pt x="2136520" y="1281936"/>
-                  </a:lnTo>
-                  <a:lnTo>
-                    <a:pt x="2089042" y="1297513"/>
-                  </a:lnTo>
-                  <a:lnTo>
-                    <a:pt x="2041564" y="1312902"/>
-                  </a:lnTo>
-                  <a:lnTo>
-                    <a:pt x="1994085" y="1328112"/>
-                  </a:lnTo>
-                  <a:lnTo>
-                    <a:pt x="1946607" y="1343148"/>
-                  </a:lnTo>
-                  <a:lnTo>
-                    <a:pt x="1899129" y="1358014"/>
-                  </a:lnTo>
-                  <a:lnTo>
-                    <a:pt x="1851651" y="1372712"/>
-                  </a:lnTo>
-                  <a:lnTo>
-                    <a:pt x="1804173" y="1387242"/>
-                  </a:lnTo>
-                  <a:lnTo>
-                    <a:pt x="1756694" y="1401601"/>
-                  </a:lnTo>
-                  <a:lnTo>
-                    <a:pt x="1709216" y="1415783"/>
-                  </a:lnTo>
-                  <a:lnTo>
-                    <a:pt x="1661738" y="1429781"/>
-                  </a:lnTo>
-                  <a:lnTo>
-                    <a:pt x="1614260" y="1443584"/>
-                  </a:lnTo>
-                  <a:lnTo>
-                    <a:pt x="1566781" y="1457179"/>
-                  </a:lnTo>
-                  <a:lnTo>
-                    <a:pt x="1519303" y="1470553"/>
-                  </a:lnTo>
-                  <a:lnTo>
-                    <a:pt x="1471825" y="1483689"/>
-                  </a:lnTo>
-                  <a:lnTo>
-                    <a:pt x="1424347" y="1496573"/>
-                  </a:lnTo>
-                  <a:lnTo>
-                    <a:pt x="1376868" y="1509189"/>
-                  </a:lnTo>
-                  <a:lnTo>
-                    <a:pt x="1329390" y="1521522"/>
-                  </a:lnTo>
-                  <a:lnTo>
-                    <a:pt x="1281912" y="1533558"/>
-                  </a:lnTo>
-                  <a:lnTo>
-                    <a:pt x="1234434" y="1545283"/>
-                  </a:lnTo>
-                  <a:lnTo>
-                    <a:pt x="1186955" y="1556689"/>
-                  </a:lnTo>
-                  <a:lnTo>
-                    <a:pt x="1139477" y="1567765"/>
-                  </a:lnTo>
-                  <a:lnTo>
-                    <a:pt x="1091999" y="1578505"/>
-                  </a:lnTo>
-                  <a:lnTo>
-                    <a:pt x="1044521" y="1588904"/>
-                  </a:lnTo>
-                  <a:lnTo>
-                    <a:pt x="997042" y="1598960"/>
-                  </a:lnTo>
-                  <a:lnTo>
-                    <a:pt x="949564" y="1608672"/>
-                  </a:lnTo>
-                  <a:lnTo>
-                    <a:pt x="902086" y="1618040"/>
-                  </a:lnTo>
-                  <a:lnTo>
-                    <a:pt x="854608" y="1627068"/>
-                  </a:lnTo>
-                  <a:lnTo>
-                    <a:pt x="807130" y="1635758"/>
-                  </a:lnTo>
-                  <a:lnTo>
-                    <a:pt x="759651" y="1644117"/>
-                  </a:lnTo>
-                  <a:lnTo>
-                    <a:pt x="712173" y="1652150"/>
-                  </a:lnTo>
-                  <a:lnTo>
-                    <a:pt x="664695" y="1659864"/>
-                  </a:lnTo>
-                  <a:lnTo>
-                    <a:pt x="617217" y="1667266"/>
-                  </a:lnTo>
-                  <a:lnTo>
-                    <a:pt x="569738" y="1674365"/>
-                  </a:lnTo>
-                  <a:lnTo>
-                    <a:pt x="522260" y="1681169"/>
-                  </a:lnTo>
-                  <a:lnTo>
-                    <a:pt x="474782" y="1687688"/>
-                  </a:lnTo>
-                  <a:lnTo>
-                    <a:pt x="427304" y="1693929"/>
-                  </a:lnTo>
-                  <a:lnTo>
-                    <a:pt x="379825" y="1699902"/>
-                  </a:lnTo>
-                  <a:lnTo>
-                    <a:pt x="332347" y="1705617"/>
-                  </a:lnTo>
-                  <a:lnTo>
-                    <a:pt x="284869" y="1711083"/>
-                  </a:lnTo>
-                  <a:lnTo>
-                    <a:pt x="237391" y="1716308"/>
-                  </a:lnTo>
-                  <a:lnTo>
-                    <a:pt x="189912" y="1721302"/>
-                  </a:lnTo>
-                  <a:lnTo>
-                    <a:pt x="142434" y="1726074"/>
-                  </a:lnTo>
-                  <a:lnTo>
-                    <a:pt x="94956" y="1730632"/>
-                  </a:lnTo>
-                  <a:lnTo>
-                    <a:pt x="47478" y="1734985"/>
-                  </a:lnTo>
-                  <a:lnTo>
-                    <a:pt x="0" y="1739142"/>
+                    <a:pt x="2801215" y="1044726"/>
+                  </a:lnTo>
+                  <a:lnTo>
+                    <a:pt x="2753737" y="1065231"/>
+                  </a:lnTo>
+                  <a:lnTo>
+                    <a:pt x="2706259" y="1085333"/>
+                  </a:lnTo>
+                  <a:lnTo>
+                    <a:pt x="2658781" y="1105044"/>
+                  </a:lnTo>
+                  <a:lnTo>
+                    <a:pt x="2611303" y="1124379"/>
+                  </a:lnTo>
+                  <a:lnTo>
+                    <a:pt x="2563824" y="1143352"/>
+                  </a:lnTo>
+                  <a:lnTo>
+                    <a:pt x="2516346" y="1161977"/>
+                  </a:lnTo>
+                  <a:lnTo>
+                    <a:pt x="2468868" y="1180268"/>
+                  </a:lnTo>
+                  <a:lnTo>
+                    <a:pt x="2421390" y="1198238"/>
+                  </a:lnTo>
+                  <a:lnTo>
+                    <a:pt x="2373911" y="1215901"/>
+                  </a:lnTo>
+                  <a:lnTo>
+                    <a:pt x="2326433" y="1233270"/>
+                  </a:lnTo>
+                  <a:lnTo>
+                    <a:pt x="2278955" y="1250359"/>
+                  </a:lnTo>
+                  <a:lnTo>
+                    <a:pt x="2231477" y="1267179"/>
+                  </a:lnTo>
+                  <a:lnTo>
+                    <a:pt x="2183998" y="1283744"/>
+                  </a:lnTo>
+                  <a:lnTo>
+                    <a:pt x="2136520" y="1300065"/>
+                  </a:lnTo>
+                  <a:lnTo>
+                    <a:pt x="2089042" y="1316151"/>
+                  </a:lnTo>
+                  <a:lnTo>
+                    <a:pt x="2041564" y="1332014"/>
+                  </a:lnTo>
+                  <a:lnTo>
+                    <a:pt x="1994085" y="1347660"/>
+                  </a:lnTo>
+                  <a:lnTo>
+                    <a:pt x="1946607" y="1363096"/>
+                  </a:lnTo>
+                  <a:lnTo>
+                    <a:pt x="1899129" y="1378326"/>
+                  </a:lnTo>
+                  <a:lnTo>
+                    <a:pt x="1851651" y="1393354"/>
+                  </a:lnTo>
+                  <a:lnTo>
+                    <a:pt x="1804173" y="1408180"/>
+                  </a:lnTo>
+                  <a:lnTo>
+                    <a:pt x="1756694" y="1422799"/>
+                  </a:lnTo>
+                  <a:lnTo>
+                    <a:pt x="1709216" y="1437209"/>
+                  </a:lnTo>
+                  <a:lnTo>
+                    <a:pt x="1661738" y="1451402"/>
+                  </a:lnTo>
+                  <a:lnTo>
+                    <a:pt x="1614260" y="1465368"/>
+                  </a:lnTo>
+                  <a:lnTo>
+                    <a:pt x="1566781" y="1479095"/>
+                  </a:lnTo>
+                  <a:lnTo>
+                    <a:pt x="1519303" y="1492571"/>
+                  </a:lnTo>
+                  <a:lnTo>
+                    <a:pt x="1471825" y="1505783"/>
+                  </a:lnTo>
+                  <a:lnTo>
+                    <a:pt x="1424347" y="1518715"/>
+                  </a:lnTo>
+                  <a:lnTo>
+                    <a:pt x="1376868" y="1531355"/>
+                  </a:lnTo>
+                  <a:lnTo>
+                    <a:pt x="1329390" y="1543688"/>
+                  </a:lnTo>
+                  <a:lnTo>
+                    <a:pt x="1281912" y="1555702"/>
+                  </a:lnTo>
+                  <a:lnTo>
+                    <a:pt x="1234434" y="1567386"/>
+                  </a:lnTo>
+                  <a:lnTo>
+                    <a:pt x="1186955" y="1578733"/>
+                  </a:lnTo>
+                  <a:lnTo>
+                    <a:pt x="1139477" y="1589733"/>
+                  </a:lnTo>
+                  <a:lnTo>
+                    <a:pt x="1091999" y="1600383"/>
+                  </a:lnTo>
+                  <a:lnTo>
+                    <a:pt x="1044521" y="1610680"/>
+                  </a:lnTo>
+                  <a:lnTo>
+                    <a:pt x="997042" y="1620621"/>
+                  </a:lnTo>
+                  <a:lnTo>
+                    <a:pt x="949564" y="1630208"/>
+                  </a:lnTo>
+                  <a:lnTo>
+                    <a:pt x="902086" y="1639442"/>
+                  </a:lnTo>
+                  <a:lnTo>
+                    <a:pt x="854608" y="1648329"/>
+                  </a:lnTo>
+                  <a:lnTo>
+                    <a:pt x="807130" y="1656871"/>
+                  </a:lnTo>
+                  <a:lnTo>
+                    <a:pt x="759651" y="1665077"/>
+                  </a:lnTo>
+                  <a:lnTo>
+                    <a:pt x="712173" y="1672951"/>
+                  </a:lnTo>
+                  <a:lnTo>
+                    <a:pt x="664695" y="1680503"/>
+                  </a:lnTo>
+                  <a:lnTo>
+                    <a:pt x="617217" y="1687741"/>
+                  </a:lnTo>
+                  <a:lnTo>
+                    <a:pt x="569738" y="1694673"/>
+                  </a:lnTo>
+                  <a:lnTo>
+                    <a:pt x="522260" y="1701309"/>
+                  </a:lnTo>
+                  <a:lnTo>
+                    <a:pt x="474782" y="1707658"/>
+                  </a:lnTo>
+                  <a:lnTo>
+                    <a:pt x="427304" y="1713729"/>
+                  </a:lnTo>
+                  <a:lnTo>
+                    <a:pt x="379825" y="1719533"/>
+                  </a:lnTo>
+                  <a:lnTo>
+                    <a:pt x="332347" y="1725078"/>
+                  </a:lnTo>
+                  <a:lnTo>
+                    <a:pt x="284869" y="1730375"/>
+                  </a:lnTo>
+                  <a:lnTo>
+                    <a:pt x="237391" y="1735433"/>
+                  </a:lnTo>
+                  <a:lnTo>
+                    <a:pt x="189912" y="1740262"/>
+                  </a:lnTo>
+                  <a:lnTo>
+                    <a:pt x="142434" y="1744869"/>
+                  </a:lnTo>
+                  <a:lnTo>
+                    <a:pt x="94956" y="1749265"/>
+                  </a:lnTo>
+                  <a:lnTo>
+                    <a:pt x="47478" y="1753459"/>
+                  </a:lnTo>
+                  <a:lnTo>
+                    <a:pt x="0" y="1757457"/>
                   </a:lnTo>
                   <a:close/>
                 </a:path>
@@ -5732,189 +5732,189 @@
           </p:nvSpPr>
           <p:spPr>
             <a:xfrm>
-              <a:off x="5300393" y="808469"/>
-              <a:ext cx="2801215" cy="1580613"/>
+              <a:off x="5300393" y="790153"/>
+              <a:ext cx="2801215" cy="1608336"/>
             </a:xfrm>
             <a:custGeom>
               <a:avLst/>
               <a:pathLst>
-                <a:path w="2801215" h="1580613">
+                <a:path w="2801215" h="1608336">
                   <a:moveTo>
-                    <a:pt x="0" y="1580613"/>
+                    <a:pt x="0" y="1608336"/>
                   </a:moveTo>
                   <a:lnTo>
-                    <a:pt x="47478" y="1574720"/>
-                  </a:lnTo>
-                  <a:lnTo>
-                    <a:pt x="94956" y="1568662"/>
-                  </a:lnTo>
-                  <a:lnTo>
-                    <a:pt x="142434" y="1562433"/>
-                  </a:lnTo>
-                  <a:lnTo>
-                    <a:pt x="189912" y="1556026"/>
-                  </a:lnTo>
-                  <a:lnTo>
-                    <a:pt x="237391" y="1549434"/>
-                  </a:lnTo>
-                  <a:lnTo>
-                    <a:pt x="284869" y="1542648"/>
-                  </a:lnTo>
-                  <a:lnTo>
-                    <a:pt x="332347" y="1535659"/>
-                  </a:lnTo>
-                  <a:lnTo>
-                    <a:pt x="379825" y="1528458"/>
-                  </a:lnTo>
-                  <a:lnTo>
-                    <a:pt x="427304" y="1521034"/>
-                  </a:lnTo>
-                  <a:lnTo>
-                    <a:pt x="474782" y="1513377"/>
-                  </a:lnTo>
-                  <a:lnTo>
-                    <a:pt x="522260" y="1505474"/>
-                  </a:lnTo>
-                  <a:lnTo>
-                    <a:pt x="569738" y="1497311"/>
-                  </a:lnTo>
-                  <a:lnTo>
-                    <a:pt x="617217" y="1488874"/>
-                  </a:lnTo>
-                  <a:lnTo>
-                    <a:pt x="664695" y="1480147"/>
-                  </a:lnTo>
-                  <a:lnTo>
-                    <a:pt x="712173" y="1471113"/>
-                  </a:lnTo>
-                  <a:lnTo>
-                    <a:pt x="759651" y="1461752"/>
-                  </a:lnTo>
-                  <a:lnTo>
-                    <a:pt x="807130" y="1452043"/>
-                  </a:lnTo>
-                  <a:lnTo>
-                    <a:pt x="854608" y="1441963"/>
-                  </a:lnTo>
-                  <a:lnTo>
-                    <a:pt x="902086" y="1431485"/>
-                  </a:lnTo>
-                  <a:lnTo>
-                    <a:pt x="949564" y="1420581"/>
-                  </a:lnTo>
-                  <a:lnTo>
-                    <a:pt x="997042" y="1409221"/>
-                  </a:lnTo>
-                  <a:lnTo>
-                    <a:pt x="1044521" y="1397369"/>
-                  </a:lnTo>
-                  <a:lnTo>
-                    <a:pt x="1091999" y="1384988"/>
-                  </a:lnTo>
-                  <a:lnTo>
-                    <a:pt x="1139477" y="1372035"/>
-                  </a:lnTo>
-                  <a:lnTo>
-                    <a:pt x="1186955" y="1358467"/>
-                  </a:lnTo>
-                  <a:lnTo>
-                    <a:pt x="1234434" y="1344233"/>
-                  </a:lnTo>
-                  <a:lnTo>
-                    <a:pt x="1281912" y="1329280"/>
-                  </a:lnTo>
-                  <a:lnTo>
-                    <a:pt x="1329390" y="1313550"/>
-                  </a:lnTo>
-                  <a:lnTo>
-                    <a:pt x="1376868" y="1296983"/>
-                  </a:lnTo>
-                  <a:lnTo>
-                    <a:pt x="1424347" y="1279512"/>
-                  </a:lnTo>
-                  <a:lnTo>
-                    <a:pt x="1471825" y="1261069"/>
-                  </a:lnTo>
-                  <a:lnTo>
-                    <a:pt x="1519303" y="1241582"/>
-                  </a:lnTo>
-                  <a:lnTo>
-                    <a:pt x="1566781" y="1220977"/>
-                  </a:lnTo>
-                  <a:lnTo>
-                    <a:pt x="1614260" y="1199175"/>
-                  </a:lnTo>
-                  <a:lnTo>
-                    <a:pt x="1661738" y="1176098"/>
-                  </a:lnTo>
-                  <a:lnTo>
-                    <a:pt x="1709216" y="1151667"/>
-                  </a:lnTo>
-                  <a:lnTo>
-                    <a:pt x="1756694" y="1125798"/>
-                  </a:lnTo>
-                  <a:lnTo>
-                    <a:pt x="1804173" y="1098410"/>
-                  </a:lnTo>
-                  <a:lnTo>
-                    <a:pt x="1851651" y="1069419"/>
-                  </a:lnTo>
-                  <a:lnTo>
-                    <a:pt x="1899129" y="1038739"/>
-                  </a:lnTo>
-                  <a:lnTo>
-                    <a:pt x="1946607" y="1006284"/>
-                  </a:lnTo>
-                  <a:lnTo>
-                    <a:pt x="1994085" y="971967"/>
-                  </a:lnTo>
-                  <a:lnTo>
-                    <a:pt x="2041564" y="935697"/>
-                  </a:lnTo>
-                  <a:lnTo>
-                    <a:pt x="2089042" y="897381"/>
-                  </a:lnTo>
-                  <a:lnTo>
-                    <a:pt x="2136520" y="856922"/>
-                  </a:lnTo>
-                  <a:lnTo>
-                    <a:pt x="2183998" y="814221"/>
-                  </a:lnTo>
-                  <a:lnTo>
-                    <a:pt x="2231477" y="769174"/>
-                  </a:lnTo>
-                  <a:lnTo>
-                    <a:pt x="2278955" y="721672"/>
-                  </a:lnTo>
-                  <a:lnTo>
-                    <a:pt x="2326433" y="671601"/>
-                  </a:lnTo>
-                  <a:lnTo>
-                    <a:pt x="2373911" y="618842"/>
-                  </a:lnTo>
-                  <a:lnTo>
-                    <a:pt x="2421390" y="563269"/>
-                  </a:lnTo>
-                  <a:lnTo>
-                    <a:pt x="2468868" y="504750"/>
-                  </a:lnTo>
-                  <a:lnTo>
-                    <a:pt x="2516346" y="443146"/>
-                  </a:lnTo>
-                  <a:lnTo>
-                    <a:pt x="2563824" y="378311"/>
-                  </a:lnTo>
-                  <a:lnTo>
-                    <a:pt x="2611303" y="310092"/>
-                  </a:lnTo>
-                  <a:lnTo>
-                    <a:pt x="2658781" y="238325"/>
-                  </a:lnTo>
-                  <a:lnTo>
-                    <a:pt x="2706259" y="162842"/>
-                  </a:lnTo>
-                  <a:lnTo>
-                    <a:pt x="2753737" y="83463"/>
+                    <a:pt x="47478" y="1602511"/>
+                  </a:lnTo>
+                  <a:lnTo>
+                    <a:pt x="94956" y="1596518"/>
+                  </a:lnTo>
+                  <a:lnTo>
+                    <a:pt x="142434" y="1590350"/>
+                  </a:lnTo>
+                  <a:lnTo>
+                    <a:pt x="189912" y="1583999"/>
+                  </a:lnTo>
+                  <a:lnTo>
+                    <a:pt x="237391" y="1577457"/>
+                  </a:lnTo>
+                  <a:lnTo>
+                    <a:pt x="284869" y="1570716"/>
+                  </a:lnTo>
+                  <a:lnTo>
+                    <a:pt x="332347" y="1563767"/>
+                  </a:lnTo>
+                  <a:lnTo>
+                    <a:pt x="379825" y="1556601"/>
+                  </a:lnTo>
+                  <a:lnTo>
+                    <a:pt x="427304" y="1549205"/>
+                  </a:lnTo>
+                  <a:lnTo>
+                    <a:pt x="474782" y="1541570"/>
+                  </a:lnTo>
+                  <a:lnTo>
+                    <a:pt x="522260" y="1533682"/>
+                  </a:lnTo>
+                  <a:lnTo>
+                    <a:pt x="569738" y="1525529"/>
+                  </a:lnTo>
+                  <a:lnTo>
+                    <a:pt x="617217" y="1517094"/>
+                  </a:lnTo>
+                  <a:lnTo>
+                    <a:pt x="664695" y="1508363"/>
+                  </a:lnTo>
+                  <a:lnTo>
+                    <a:pt x="712173" y="1499316"/>
+                  </a:lnTo>
+                  <a:lnTo>
+                    <a:pt x="759651" y="1489936"/>
+                  </a:lnTo>
+                  <a:lnTo>
+                    <a:pt x="807130" y="1480199"/>
+                  </a:lnTo>
+                  <a:lnTo>
+                    <a:pt x="854608" y="1470083"/>
+                  </a:lnTo>
+                  <a:lnTo>
+                    <a:pt x="902086" y="1459561"/>
+                  </a:lnTo>
+                  <a:lnTo>
+                    <a:pt x="949564" y="1448605"/>
+                  </a:lnTo>
+                  <a:lnTo>
+                    <a:pt x="997042" y="1437184"/>
+                  </a:lnTo>
+                  <a:lnTo>
+                    <a:pt x="1044521" y="1425262"/>
+                  </a:lnTo>
+                  <a:lnTo>
+                    <a:pt x="1091999" y="1412801"/>
+                  </a:lnTo>
+                  <a:lnTo>
+                    <a:pt x="1139477" y="1399760"/>
+                  </a:lnTo>
+                  <a:lnTo>
+                    <a:pt x="1186955" y="1386093"/>
+                  </a:lnTo>
+                  <a:lnTo>
+                    <a:pt x="1234434" y="1371750"/>
+                  </a:lnTo>
+                  <a:lnTo>
+                    <a:pt x="1281912" y="1356678"/>
+                  </a:lnTo>
+                  <a:lnTo>
+                    <a:pt x="1329390" y="1340818"/>
+                  </a:lnTo>
+                  <a:lnTo>
+                    <a:pt x="1376868" y="1324108"/>
+                  </a:lnTo>
+                  <a:lnTo>
+                    <a:pt x="1424347" y="1306482"/>
+                  </a:lnTo>
+                  <a:lnTo>
+                    <a:pt x="1471825" y="1287870"/>
+                  </a:lnTo>
+                  <a:lnTo>
+                    <a:pt x="1519303" y="1268198"/>
+                  </a:lnTo>
+                  <a:lnTo>
+                    <a:pt x="1566781" y="1247391"/>
+                  </a:lnTo>
+                  <a:lnTo>
+                    <a:pt x="1614260" y="1225368"/>
+                  </a:lnTo>
+                  <a:lnTo>
+                    <a:pt x="1661738" y="1202049"/>
+                  </a:lnTo>
+                  <a:lnTo>
+                    <a:pt x="1709216" y="1177351"/>
+                  </a:lnTo>
+                  <a:lnTo>
+                    <a:pt x="1756694" y="1151188"/>
+                  </a:lnTo>
+                  <a:lnTo>
+                    <a:pt x="1804173" y="1123474"/>
+                  </a:lnTo>
+                  <a:lnTo>
+                    <a:pt x="1851651" y="1094122"/>
+                  </a:lnTo>
+                  <a:lnTo>
+                    <a:pt x="1899129" y="1063041"/>
+                  </a:lnTo>
+                  <a:lnTo>
+                    <a:pt x="1946607" y="1030141"/>
+                  </a:lnTo>
+                  <a:lnTo>
+                    <a:pt x="1994085" y="995328"/>
+                  </a:lnTo>
+                  <a:lnTo>
+                    <a:pt x="2041564" y="958507"/>
+                  </a:lnTo>
+                  <a:lnTo>
+                    <a:pt x="2089042" y="919577"/>
+                  </a:lnTo>
+                  <a:lnTo>
+                    <a:pt x="2136520" y="878436"/>
+                  </a:lnTo>
+                  <a:lnTo>
+                    <a:pt x="2183998" y="834978"/>
+                  </a:lnTo>
+                  <a:lnTo>
+                    <a:pt x="2231477" y="789091"/>
+                  </a:lnTo>
+                  <a:lnTo>
+                    <a:pt x="2278955" y="740658"/>
+                  </a:lnTo>
+                  <a:lnTo>
+                    <a:pt x="2326433" y="689558"/>
+                  </a:lnTo>
+                  <a:lnTo>
+                    <a:pt x="2373911" y="635662"/>
+                  </a:lnTo>
+                  <a:lnTo>
+                    <a:pt x="2421390" y="578834"/>
+                  </a:lnTo>
+                  <a:lnTo>
+                    <a:pt x="2468868" y="518935"/>
+                  </a:lnTo>
+                  <a:lnTo>
+                    <a:pt x="2516346" y="455813"/>
+                  </a:lnTo>
+                  <a:lnTo>
+                    <a:pt x="2563824" y="389311"/>
+                  </a:lnTo>
+                  <a:lnTo>
+                    <a:pt x="2611303" y="319265"/>
+                  </a:lnTo>
+                  <a:lnTo>
+                    <a:pt x="2658781" y="245499"/>
+                  </a:lnTo>
+                  <a:lnTo>
+                    <a:pt x="2706259" y="167830"/>
+                  </a:lnTo>
+                  <a:lnTo>
+                    <a:pt x="2753737" y="86065"/>
                   </a:lnTo>
                   <a:lnTo>
                     <a:pt x="2801215" y="0"/>
@@ -5937,192 +5937,192 @@
           </p:nvSpPr>
           <p:spPr>
             <a:xfrm>
-              <a:off x="5300393" y="1846479"/>
-              <a:ext cx="2801215" cy="701132"/>
+              <a:off x="5300393" y="1834880"/>
+              <a:ext cx="2801215" cy="712731"/>
             </a:xfrm>
             <a:custGeom>
               <a:avLst/>
               <a:pathLst>
-                <a:path w="2801215" h="701132">
+                <a:path w="2801215" h="712731">
                   <a:moveTo>
                     <a:pt x="2801215" y="0"/>
                   </a:moveTo>
                   <a:lnTo>
-                    <a:pt x="2753737" y="19395"/>
-                  </a:lnTo>
-                  <a:lnTo>
-                    <a:pt x="2706259" y="38437"/>
-                  </a:lnTo>
-                  <a:lnTo>
-                    <a:pt x="2658781" y="57138"/>
-                  </a:lnTo>
-                  <a:lnTo>
-                    <a:pt x="2611303" y="75510"/>
-                  </a:lnTo>
-                  <a:lnTo>
-                    <a:pt x="2563824" y="93566"/>
-                  </a:lnTo>
-                  <a:lnTo>
-                    <a:pt x="2516346" y="111319"/>
-                  </a:lnTo>
-                  <a:lnTo>
-                    <a:pt x="2468868" y="128781"/>
-                  </a:lnTo>
-                  <a:lnTo>
-                    <a:pt x="2421390" y="145966"/>
-                  </a:lnTo>
-                  <a:lnTo>
-                    <a:pt x="2373911" y="162885"/>
-                  </a:lnTo>
-                  <a:lnTo>
-                    <a:pt x="2326433" y="179551"/>
-                  </a:lnTo>
-                  <a:lnTo>
-                    <a:pt x="2278955" y="195977"/>
-                  </a:lnTo>
-                  <a:lnTo>
-                    <a:pt x="2231477" y="212174"/>
-                  </a:lnTo>
-                  <a:lnTo>
-                    <a:pt x="2183998" y="228153"/>
-                  </a:lnTo>
-                  <a:lnTo>
-                    <a:pt x="2136520" y="243926"/>
-                  </a:lnTo>
-                  <a:lnTo>
-                    <a:pt x="2089042" y="259503"/>
-                  </a:lnTo>
-                  <a:lnTo>
-                    <a:pt x="2041564" y="274892"/>
-                  </a:lnTo>
-                  <a:lnTo>
-                    <a:pt x="1994085" y="290102"/>
-                  </a:lnTo>
-                  <a:lnTo>
-                    <a:pt x="1946607" y="305138"/>
-                  </a:lnTo>
-                  <a:lnTo>
-                    <a:pt x="1899129" y="320004"/>
-                  </a:lnTo>
-                  <a:lnTo>
-                    <a:pt x="1851651" y="334702"/>
-                  </a:lnTo>
-                  <a:lnTo>
-                    <a:pt x="1804173" y="349232"/>
-                  </a:lnTo>
-                  <a:lnTo>
-                    <a:pt x="1756694" y="363591"/>
-                  </a:lnTo>
-                  <a:lnTo>
-                    <a:pt x="1709216" y="377773"/>
-                  </a:lnTo>
-                  <a:lnTo>
-                    <a:pt x="1661738" y="391771"/>
-                  </a:lnTo>
-                  <a:lnTo>
-                    <a:pt x="1614260" y="405574"/>
-                  </a:lnTo>
-                  <a:lnTo>
-                    <a:pt x="1566781" y="419169"/>
-                  </a:lnTo>
-                  <a:lnTo>
-                    <a:pt x="1519303" y="432543"/>
-                  </a:lnTo>
-                  <a:lnTo>
-                    <a:pt x="1471825" y="445679"/>
-                  </a:lnTo>
-                  <a:lnTo>
-                    <a:pt x="1424347" y="458563"/>
-                  </a:lnTo>
-                  <a:lnTo>
-                    <a:pt x="1376868" y="471179"/>
-                  </a:lnTo>
-                  <a:lnTo>
-                    <a:pt x="1329390" y="483512"/>
-                  </a:lnTo>
-                  <a:lnTo>
-                    <a:pt x="1281912" y="495548"/>
-                  </a:lnTo>
-                  <a:lnTo>
-                    <a:pt x="1234434" y="507273"/>
-                  </a:lnTo>
-                  <a:lnTo>
-                    <a:pt x="1186955" y="518679"/>
-                  </a:lnTo>
-                  <a:lnTo>
-                    <a:pt x="1139477" y="529755"/>
-                  </a:lnTo>
-                  <a:lnTo>
-                    <a:pt x="1091999" y="540495"/>
-                  </a:lnTo>
-                  <a:lnTo>
-                    <a:pt x="1044521" y="550894"/>
-                  </a:lnTo>
-                  <a:lnTo>
-                    <a:pt x="997042" y="560950"/>
-                  </a:lnTo>
-                  <a:lnTo>
-                    <a:pt x="949564" y="570662"/>
-                  </a:lnTo>
-                  <a:lnTo>
-                    <a:pt x="902086" y="580030"/>
-                  </a:lnTo>
-                  <a:lnTo>
-                    <a:pt x="854608" y="589058"/>
-                  </a:lnTo>
-                  <a:lnTo>
-                    <a:pt x="807130" y="597748"/>
-                  </a:lnTo>
-                  <a:lnTo>
-                    <a:pt x="759651" y="606107"/>
-                  </a:lnTo>
-                  <a:lnTo>
-                    <a:pt x="712173" y="614140"/>
-                  </a:lnTo>
-                  <a:lnTo>
-                    <a:pt x="664695" y="621854"/>
-                  </a:lnTo>
-                  <a:lnTo>
-                    <a:pt x="617217" y="629256"/>
-                  </a:lnTo>
-                  <a:lnTo>
-                    <a:pt x="569738" y="636355"/>
-                  </a:lnTo>
-                  <a:lnTo>
-                    <a:pt x="522260" y="643159"/>
-                  </a:lnTo>
-                  <a:lnTo>
-                    <a:pt x="474782" y="649678"/>
-                  </a:lnTo>
-                  <a:lnTo>
-                    <a:pt x="427304" y="655919"/>
-                  </a:lnTo>
-                  <a:lnTo>
-                    <a:pt x="379825" y="661892"/>
-                  </a:lnTo>
-                  <a:lnTo>
-                    <a:pt x="332347" y="667607"/>
-                  </a:lnTo>
-                  <a:lnTo>
-                    <a:pt x="284869" y="673073"/>
-                  </a:lnTo>
-                  <a:lnTo>
-                    <a:pt x="237391" y="678298"/>
-                  </a:lnTo>
-                  <a:lnTo>
-                    <a:pt x="189912" y="683292"/>
-                  </a:lnTo>
-                  <a:lnTo>
-                    <a:pt x="142434" y="688064"/>
-                  </a:lnTo>
-                  <a:lnTo>
-                    <a:pt x="94956" y="692622"/>
-                  </a:lnTo>
-                  <a:lnTo>
-                    <a:pt x="47478" y="696975"/>
-                  </a:lnTo>
-                  <a:lnTo>
-                    <a:pt x="0" y="701132"/>
+                    <a:pt x="2753737" y="20505"/>
+                  </a:lnTo>
+                  <a:lnTo>
+                    <a:pt x="2706259" y="40606"/>
+                  </a:lnTo>
+                  <a:lnTo>
+                    <a:pt x="2658781" y="60317"/>
+                  </a:lnTo>
+                  <a:lnTo>
+                    <a:pt x="2611303" y="79653"/>
+                  </a:lnTo>
+                  <a:lnTo>
+                    <a:pt x="2563824" y="98626"/>
+                  </a:lnTo>
+                  <a:lnTo>
+                    <a:pt x="2516346" y="117251"/>
+                  </a:lnTo>
+                  <a:lnTo>
+                    <a:pt x="2468868" y="135542"/>
+                  </a:lnTo>
+                  <a:lnTo>
+                    <a:pt x="2421390" y="153512"/>
+                  </a:lnTo>
+                  <a:lnTo>
+                    <a:pt x="2373911" y="171175"/>
+                  </a:lnTo>
+                  <a:lnTo>
+                    <a:pt x="2326433" y="188544"/>
+                  </a:lnTo>
+                  <a:lnTo>
+                    <a:pt x="2278955" y="205632"/>
+                  </a:lnTo>
+                  <a:lnTo>
+                    <a:pt x="2231477" y="222453"/>
+                  </a:lnTo>
+                  <a:lnTo>
+                    <a:pt x="2183998" y="239018"/>
+                  </a:lnTo>
+                  <a:lnTo>
+                    <a:pt x="2136520" y="255338"/>
+                  </a:lnTo>
+                  <a:lnTo>
+                    <a:pt x="2089042" y="271425"/>
+                  </a:lnTo>
+                  <a:lnTo>
+                    <a:pt x="2041564" y="287287"/>
+                  </a:lnTo>
+                  <a:lnTo>
+                    <a:pt x="1994085" y="302933"/>
+                  </a:lnTo>
+                  <a:lnTo>
+                    <a:pt x="1946607" y="318369"/>
+                  </a:lnTo>
+                  <a:lnTo>
+                    <a:pt x="1899129" y="333600"/>
+                  </a:lnTo>
+                  <a:lnTo>
+                    <a:pt x="1851651" y="348628"/>
+                  </a:lnTo>
+                  <a:lnTo>
+                    <a:pt x="1804173" y="363453"/>
+                  </a:lnTo>
+                  <a:lnTo>
+                    <a:pt x="1756694" y="378073"/>
+                  </a:lnTo>
+                  <a:lnTo>
+                    <a:pt x="1709216" y="392483"/>
+                  </a:lnTo>
+                  <a:lnTo>
+                    <a:pt x="1661738" y="406675"/>
+                  </a:lnTo>
+                  <a:lnTo>
+                    <a:pt x="1614260" y="420641"/>
+                  </a:lnTo>
+                  <a:lnTo>
+                    <a:pt x="1566781" y="434369"/>
+                  </a:lnTo>
+                  <a:lnTo>
+                    <a:pt x="1519303" y="447845"/>
+                  </a:lnTo>
+                  <a:lnTo>
+                    <a:pt x="1471825" y="461056"/>
+                  </a:lnTo>
+                  <a:lnTo>
+                    <a:pt x="1424347" y="473989"/>
+                  </a:lnTo>
+                  <a:lnTo>
+                    <a:pt x="1376868" y="486628"/>
+                  </a:lnTo>
+                  <a:lnTo>
+                    <a:pt x="1329390" y="498961"/>
+                  </a:lnTo>
+                  <a:lnTo>
+                    <a:pt x="1281912" y="510975"/>
+                  </a:lnTo>
+                  <a:lnTo>
+                    <a:pt x="1234434" y="522660"/>
+                  </a:lnTo>
+                  <a:lnTo>
+                    <a:pt x="1186955" y="534006"/>
+                  </a:lnTo>
+                  <a:lnTo>
+                    <a:pt x="1139477" y="545007"/>
+                  </a:lnTo>
+                  <a:lnTo>
+                    <a:pt x="1091999" y="555657"/>
+                  </a:lnTo>
+                  <a:lnTo>
+                    <a:pt x="1044521" y="565953"/>
+                  </a:lnTo>
+                  <a:lnTo>
+                    <a:pt x="997042" y="575894"/>
+                  </a:lnTo>
+                  <a:lnTo>
+                    <a:pt x="949564" y="585481"/>
+                  </a:lnTo>
+                  <a:lnTo>
+                    <a:pt x="902086" y="594716"/>
+                  </a:lnTo>
+                  <a:lnTo>
+                    <a:pt x="854608" y="603602"/>
+                  </a:lnTo>
+                  <a:lnTo>
+                    <a:pt x="807130" y="612145"/>
+                  </a:lnTo>
+                  <a:lnTo>
+                    <a:pt x="759651" y="620350"/>
+                  </a:lnTo>
+                  <a:lnTo>
+                    <a:pt x="712173" y="628225"/>
+                  </a:lnTo>
+                  <a:lnTo>
+                    <a:pt x="664695" y="635777"/>
+                  </a:lnTo>
+                  <a:lnTo>
+                    <a:pt x="617217" y="643015"/>
+                  </a:lnTo>
+                  <a:lnTo>
+                    <a:pt x="569738" y="649947"/>
+                  </a:lnTo>
+                  <a:lnTo>
+                    <a:pt x="522260" y="656583"/>
+                  </a:lnTo>
+                  <a:lnTo>
+                    <a:pt x="474782" y="662931"/>
+                  </a:lnTo>
+                  <a:lnTo>
+                    <a:pt x="427304" y="669003"/>
+                  </a:lnTo>
+                  <a:lnTo>
+                    <a:pt x="379825" y="674806"/>
+                  </a:lnTo>
+                  <a:lnTo>
+                    <a:pt x="332347" y="680352"/>
+                  </a:lnTo>
+                  <a:lnTo>
+                    <a:pt x="284869" y="685649"/>
+                  </a:lnTo>
+                  <a:lnTo>
+                    <a:pt x="237391" y="690707"/>
+                  </a:lnTo>
+                  <a:lnTo>
+                    <a:pt x="189912" y="695535"/>
+                  </a:lnTo>
+                  <a:lnTo>
+                    <a:pt x="142434" y="700143"/>
+                  </a:lnTo>
+                  <a:lnTo>
+                    <a:pt x="94956" y="704539"/>
+                  </a:lnTo>
+                  <a:lnTo>
+                    <a:pt x="47478" y="708732"/>
+                  </a:lnTo>
+                  <a:lnTo>
+                    <a:pt x="0" y="712731"/>
                   </a:lnTo>
                 </a:path>
               </a:pathLst>
@@ -6142,372 +6142,372 @@
           </p:nvSpPr>
           <p:spPr>
             <a:xfrm>
-              <a:off x="5300393" y="1015745"/>
-              <a:ext cx="2801215" cy="1367823"/>
+              <a:off x="5300393" y="1008765"/>
+              <a:ext cx="2801215" cy="1373783"/>
             </a:xfrm>
             <a:custGeom>
               <a:avLst/>
               <a:pathLst>
-                <a:path w="2801215" h="1367823">
+                <a:path w="2801215" h="1373783">
                   <a:moveTo>
-                    <a:pt x="0" y="1145723"/>
+                    <a:pt x="0" y="1153801"/>
                   </a:moveTo>
                   <a:lnTo>
-                    <a:pt x="47478" y="1138456"/>
-                  </a:lnTo>
-                  <a:lnTo>
-                    <a:pt x="94956" y="1131043"/>
-                  </a:lnTo>
-                  <a:lnTo>
-                    <a:pt x="142434" y="1123478"/>
-                  </a:lnTo>
-                  <a:lnTo>
-                    <a:pt x="189912" y="1115755"/>
-                  </a:lnTo>
-                  <a:lnTo>
-                    <a:pt x="237391" y="1107869"/>
-                  </a:lnTo>
-                  <a:lnTo>
-                    <a:pt x="284869" y="1099812"/>
-                  </a:lnTo>
-                  <a:lnTo>
-                    <a:pt x="332347" y="1091577"/>
-                  </a:lnTo>
-                  <a:lnTo>
-                    <a:pt x="379825" y="1083157"/>
-                  </a:lnTo>
-                  <a:lnTo>
-                    <a:pt x="427304" y="1074543"/>
-                  </a:lnTo>
-                  <a:lnTo>
-                    <a:pt x="474782" y="1065726"/>
-                  </a:lnTo>
-                  <a:lnTo>
-                    <a:pt x="522260" y="1056698"/>
-                  </a:lnTo>
-                  <a:lnTo>
-                    <a:pt x="569738" y="1047447"/>
-                  </a:lnTo>
-                  <a:lnTo>
-                    <a:pt x="617217" y="1037962"/>
-                  </a:lnTo>
-                  <a:lnTo>
-                    <a:pt x="664695" y="1028232"/>
-                  </a:lnTo>
-                  <a:lnTo>
-                    <a:pt x="712173" y="1018245"/>
-                  </a:lnTo>
-                  <a:lnTo>
-                    <a:pt x="759651" y="1007986"/>
-                  </a:lnTo>
-                  <a:lnTo>
-                    <a:pt x="807130" y="997441"/>
-                  </a:lnTo>
-                  <a:lnTo>
-                    <a:pt x="854608" y="986595"/>
-                  </a:lnTo>
-                  <a:lnTo>
-                    <a:pt x="902086" y="975431"/>
-                  </a:lnTo>
-                  <a:lnTo>
-                    <a:pt x="949564" y="963931"/>
-                  </a:lnTo>
-                  <a:lnTo>
-                    <a:pt x="997042" y="952077"/>
-                  </a:lnTo>
-                  <a:lnTo>
-                    <a:pt x="1044521" y="939849"/>
-                  </a:lnTo>
-                  <a:lnTo>
-                    <a:pt x="1091999" y="927227"/>
-                  </a:lnTo>
-                  <a:lnTo>
-                    <a:pt x="1139477" y="914188"/>
-                  </a:lnTo>
-                  <a:lnTo>
-                    <a:pt x="1186955" y="900709"/>
-                  </a:lnTo>
-                  <a:lnTo>
-                    <a:pt x="1234434" y="886768"/>
-                  </a:lnTo>
-                  <a:lnTo>
-                    <a:pt x="1281912" y="872339"/>
-                  </a:lnTo>
-                  <a:lnTo>
-                    <a:pt x="1329390" y="857397"/>
-                  </a:lnTo>
-                  <a:lnTo>
-                    <a:pt x="1376868" y="841917"/>
-                  </a:lnTo>
-                  <a:lnTo>
-                    <a:pt x="1424347" y="825872"/>
-                  </a:lnTo>
-                  <a:lnTo>
-                    <a:pt x="1471825" y="809237"/>
-                  </a:lnTo>
-                  <a:lnTo>
-                    <a:pt x="1519303" y="791983"/>
-                  </a:lnTo>
-                  <a:lnTo>
-                    <a:pt x="1566781" y="774085"/>
-                  </a:lnTo>
-                  <a:lnTo>
-                    <a:pt x="1614260" y="755517"/>
-                  </a:lnTo>
-                  <a:lnTo>
-                    <a:pt x="1661738" y="736251"/>
-                  </a:lnTo>
-                  <a:lnTo>
-                    <a:pt x="1709216" y="716263"/>
-                  </a:lnTo>
-                  <a:lnTo>
-                    <a:pt x="1756694" y="695526"/>
-                  </a:lnTo>
-                  <a:lnTo>
-                    <a:pt x="1804173" y="674015"/>
-                  </a:lnTo>
-                  <a:lnTo>
-                    <a:pt x="1851651" y="651706"/>
-                  </a:lnTo>
-                  <a:lnTo>
-                    <a:pt x="1899129" y="628574"/>
-                  </a:lnTo>
-                  <a:lnTo>
-                    <a:pt x="1946607" y="604596"/>
-                  </a:lnTo>
-                  <a:lnTo>
-                    <a:pt x="1994085" y="579746"/>
-                  </a:lnTo>
-                  <a:lnTo>
-                    <a:pt x="2041564" y="554002"/>
-                  </a:lnTo>
-                  <a:lnTo>
-                    <a:pt x="2089042" y="527339"/>
-                  </a:lnTo>
-                  <a:lnTo>
-                    <a:pt x="2136520" y="499735"/>
-                  </a:lnTo>
-                  <a:lnTo>
-                    <a:pt x="2183998" y="471164"/>
-                  </a:lnTo>
-                  <a:lnTo>
-                    <a:pt x="2231477" y="441603"/>
-                  </a:lnTo>
-                  <a:lnTo>
-                    <a:pt x="2278955" y="411028"/>
-                  </a:lnTo>
-                  <a:lnTo>
-                    <a:pt x="2326433" y="379412"/>
-                  </a:lnTo>
-                  <a:lnTo>
-                    <a:pt x="2373911" y="346730"/>
-                  </a:lnTo>
-                  <a:lnTo>
-                    <a:pt x="2421390" y="312957"/>
-                  </a:lnTo>
-                  <a:lnTo>
-                    <a:pt x="2468868" y="278064"/>
-                  </a:lnTo>
-                  <a:lnTo>
-                    <a:pt x="2516346" y="242023"/>
-                  </a:lnTo>
-                  <a:lnTo>
-                    <a:pt x="2563824" y="204807"/>
-                  </a:lnTo>
-                  <a:lnTo>
-                    <a:pt x="2611303" y="166384"/>
-                  </a:lnTo>
-                  <a:lnTo>
-                    <a:pt x="2658781" y="126724"/>
-                  </a:lnTo>
-                  <a:lnTo>
-                    <a:pt x="2706259" y="85796"/>
-                  </a:lnTo>
-                  <a:lnTo>
-                    <a:pt x="2753737" y="43566"/>
+                    <a:pt x="47478" y="1146519"/>
+                  </a:lnTo>
+                  <a:lnTo>
+                    <a:pt x="94956" y="1139088"/>
+                  </a:lnTo>
+                  <a:lnTo>
+                    <a:pt x="142434" y="1131504"/>
+                  </a:lnTo>
+                  <a:lnTo>
+                    <a:pt x="189912" y="1123761"/>
+                  </a:lnTo>
+                  <a:lnTo>
+                    <a:pt x="237391" y="1115853"/>
+                  </a:lnTo>
+                  <a:lnTo>
+                    <a:pt x="284869" y="1107771"/>
+                  </a:lnTo>
+                  <a:lnTo>
+                    <a:pt x="332347" y="1099511"/>
+                  </a:lnTo>
+                  <a:lnTo>
+                    <a:pt x="379825" y="1091063"/>
+                  </a:lnTo>
+                  <a:lnTo>
+                    <a:pt x="427304" y="1082419"/>
+                  </a:lnTo>
+                  <a:lnTo>
+                    <a:pt x="474782" y="1073571"/>
+                  </a:lnTo>
+                  <a:lnTo>
+                    <a:pt x="522260" y="1064508"/>
+                  </a:lnTo>
+                  <a:lnTo>
+                    <a:pt x="569738" y="1055221"/>
+                  </a:lnTo>
+                  <a:lnTo>
+                    <a:pt x="617217" y="1045699"/>
+                  </a:lnTo>
+                  <a:lnTo>
+                    <a:pt x="664695" y="1035929"/>
+                  </a:lnTo>
+                  <a:lnTo>
+                    <a:pt x="712173" y="1025899"/>
+                  </a:lnTo>
+                  <a:lnTo>
+                    <a:pt x="759651" y="1015596"/>
+                  </a:lnTo>
+                  <a:lnTo>
+                    <a:pt x="807130" y="1005004"/>
+                  </a:lnTo>
+                  <a:lnTo>
+                    <a:pt x="854608" y="994109"/>
+                  </a:lnTo>
+                  <a:lnTo>
+                    <a:pt x="902086" y="982893"/>
+                  </a:lnTo>
+                  <a:lnTo>
+                    <a:pt x="949564" y="971340"/>
+                  </a:lnTo>
+                  <a:lnTo>
+                    <a:pt x="997042" y="959429"/>
+                  </a:lnTo>
+                  <a:lnTo>
+                    <a:pt x="1044521" y="947142"/>
+                  </a:lnTo>
+                  <a:lnTo>
+                    <a:pt x="1091999" y="934458"/>
+                  </a:lnTo>
+                  <a:lnTo>
+                    <a:pt x="1139477" y="921354"/>
+                  </a:lnTo>
+                  <a:lnTo>
+                    <a:pt x="1186955" y="907807"/>
+                  </a:lnTo>
+                  <a:lnTo>
+                    <a:pt x="1234434" y="893795"/>
+                  </a:lnTo>
+                  <a:lnTo>
+                    <a:pt x="1281912" y="879292"/>
+                  </a:lnTo>
+                  <a:lnTo>
+                    <a:pt x="1329390" y="864272"/>
+                  </a:lnTo>
+                  <a:lnTo>
+                    <a:pt x="1376868" y="848710"/>
+                  </a:lnTo>
+                  <a:lnTo>
+                    <a:pt x="1424347" y="832580"/>
+                  </a:lnTo>
+                  <a:lnTo>
+                    <a:pt x="1471825" y="815854"/>
+                  </a:lnTo>
+                  <a:lnTo>
+                    <a:pt x="1519303" y="798506"/>
+                  </a:lnTo>
+                  <a:lnTo>
+                    <a:pt x="1566781" y="780508"/>
+                  </a:lnTo>
+                  <a:lnTo>
+                    <a:pt x="1614260" y="761835"/>
+                  </a:lnTo>
+                  <a:lnTo>
+                    <a:pt x="1661738" y="742458"/>
+                  </a:lnTo>
+                  <a:lnTo>
+                    <a:pt x="1709216" y="722351"/>
+                  </a:lnTo>
+                  <a:lnTo>
+                    <a:pt x="1756694" y="701490"/>
+                  </a:lnTo>
+                  <a:lnTo>
+                    <a:pt x="1804173" y="679847"/>
+                  </a:lnTo>
+                  <a:lnTo>
+                    <a:pt x="1851651" y="657397"/>
+                  </a:lnTo>
+                  <a:lnTo>
+                    <a:pt x="1899129" y="634115"/>
+                  </a:lnTo>
+                  <a:lnTo>
+                    <a:pt x="1946607" y="609978"/>
+                  </a:lnTo>
+                  <a:lnTo>
+                    <a:pt x="1994085" y="584959"/>
+                  </a:lnTo>
+                  <a:lnTo>
+                    <a:pt x="2041564" y="559034"/>
+                  </a:lnTo>
+                  <a:lnTo>
+                    <a:pt x="2089042" y="532180"/>
+                  </a:lnTo>
+                  <a:lnTo>
+                    <a:pt x="2136520" y="504371"/>
+                  </a:lnTo>
+                  <a:lnTo>
+                    <a:pt x="2183998" y="475583"/>
+                  </a:lnTo>
+                  <a:lnTo>
+                    <a:pt x="2231477" y="445791"/>
+                  </a:lnTo>
+                  <a:lnTo>
+                    <a:pt x="2278955" y="414969"/>
+                  </a:lnTo>
+                  <a:lnTo>
+                    <a:pt x="2326433" y="383092"/>
+                  </a:lnTo>
+                  <a:lnTo>
+                    <a:pt x="2373911" y="350132"/>
+                  </a:lnTo>
+                  <a:lnTo>
+                    <a:pt x="2421390" y="316063"/>
+                  </a:lnTo>
+                  <a:lnTo>
+                    <a:pt x="2468868" y="280856"/>
+                  </a:lnTo>
+                  <a:lnTo>
+                    <a:pt x="2516346" y="244482"/>
+                  </a:lnTo>
+                  <a:lnTo>
+                    <a:pt x="2563824" y="206912"/>
+                  </a:lnTo>
+                  <a:lnTo>
+                    <a:pt x="2611303" y="168115"/>
+                  </a:lnTo>
+                  <a:lnTo>
+                    <a:pt x="2658781" y="128059"/>
+                  </a:lnTo>
+                  <a:lnTo>
+                    <a:pt x="2706259" y="86710"/>
+                  </a:lnTo>
+                  <a:lnTo>
+                    <a:pt x="2753737" y="44036"/>
                   </a:lnTo>
                   <a:lnTo>
                     <a:pt x="2801215" y="0"/>
                   </a:lnTo>
                   <a:lnTo>
-                    <a:pt x="2801215" y="686790"/>
-                  </a:lnTo>
-                  <a:lnTo>
-                    <a:pt x="2753737" y="701453"/>
-                  </a:lnTo>
-                  <a:lnTo>
-                    <a:pt x="2706259" y="715983"/>
-                  </a:lnTo>
-                  <a:lnTo>
-                    <a:pt x="2658781" y="730384"/>
-                  </a:lnTo>
-                  <a:lnTo>
-                    <a:pt x="2611303" y="744662"/>
-                  </a:lnTo>
-                  <a:lnTo>
-                    <a:pt x="2563824" y="758821"/>
-                  </a:lnTo>
-                  <a:lnTo>
-                    <a:pt x="2516346" y="772868"/>
-                  </a:lnTo>
-                  <a:lnTo>
-                    <a:pt x="2468868" y="786808"/>
-                  </a:lnTo>
-                  <a:lnTo>
-                    <a:pt x="2421390" y="800646"/>
-                  </a:lnTo>
-                  <a:lnTo>
-                    <a:pt x="2373911" y="814387"/>
-                  </a:lnTo>
-                  <a:lnTo>
-                    <a:pt x="2326433" y="828037"/>
-                  </a:lnTo>
-                  <a:lnTo>
-                    <a:pt x="2278955" y="841600"/>
-                  </a:lnTo>
-                  <a:lnTo>
-                    <a:pt x="2231477" y="855081"/>
-                  </a:lnTo>
-                  <a:lnTo>
-                    <a:pt x="2183998" y="868486"/>
-                  </a:lnTo>
-                  <a:lnTo>
-                    <a:pt x="2136520" y="881819"/>
-                  </a:lnTo>
-                  <a:lnTo>
-                    <a:pt x="2089042" y="895082"/>
-                  </a:lnTo>
-                  <a:lnTo>
-                    <a:pt x="2041564" y="908281"/>
-                  </a:lnTo>
-                  <a:lnTo>
-                    <a:pt x="1994085" y="921417"/>
-                  </a:lnTo>
-                  <a:lnTo>
-                    <a:pt x="1946607" y="934493"/>
-                  </a:lnTo>
-                  <a:lnTo>
-                    <a:pt x="1899129" y="947511"/>
-                  </a:lnTo>
-                  <a:lnTo>
-                    <a:pt x="1851651" y="960471"/>
-                  </a:lnTo>
-                  <a:lnTo>
-                    <a:pt x="1804173" y="973372"/>
-                  </a:lnTo>
-                  <a:lnTo>
-                    <a:pt x="1756694" y="986214"/>
-                  </a:lnTo>
-                  <a:lnTo>
-                    <a:pt x="1709216" y="998994"/>
-                  </a:lnTo>
-                  <a:lnTo>
-                    <a:pt x="1661738" y="1011710"/>
-                  </a:lnTo>
-                  <a:lnTo>
-                    <a:pt x="1614260" y="1024356"/>
-                  </a:lnTo>
-                  <a:lnTo>
-                    <a:pt x="1566781" y="1036928"/>
-                  </a:lnTo>
-                  <a:lnTo>
-                    <a:pt x="1519303" y="1049420"/>
-                  </a:lnTo>
-                  <a:lnTo>
-                    <a:pt x="1471825" y="1061824"/>
-                  </a:lnTo>
-                  <a:lnTo>
-                    <a:pt x="1424347" y="1074134"/>
-                  </a:lnTo>
-                  <a:lnTo>
-                    <a:pt x="1376868" y="1086341"/>
-                  </a:lnTo>
-                  <a:lnTo>
-                    <a:pt x="1329390" y="1098437"/>
-                  </a:lnTo>
-                  <a:lnTo>
-                    <a:pt x="1281912" y="1110413"/>
-                  </a:lnTo>
-                  <a:lnTo>
-                    <a:pt x="1234434" y="1122261"/>
-                  </a:lnTo>
-                  <a:lnTo>
-                    <a:pt x="1186955" y="1133972"/>
-                  </a:lnTo>
-                  <a:lnTo>
-                    <a:pt x="1139477" y="1145538"/>
-                  </a:lnTo>
-                  <a:lnTo>
-                    <a:pt x="1091999" y="1156950"/>
-                  </a:lnTo>
-                  <a:lnTo>
-                    <a:pt x="1044521" y="1168202"/>
-                  </a:lnTo>
-                  <a:lnTo>
-                    <a:pt x="997042" y="1179287"/>
-                  </a:lnTo>
-                  <a:lnTo>
-                    <a:pt x="949564" y="1190197"/>
-                  </a:lnTo>
-                  <a:lnTo>
-                    <a:pt x="902086" y="1200928"/>
-                  </a:lnTo>
-                  <a:lnTo>
-                    <a:pt x="854608" y="1211474"/>
-                  </a:lnTo>
-                  <a:lnTo>
-                    <a:pt x="807130" y="1221832"/>
-                  </a:lnTo>
-                  <a:lnTo>
-                    <a:pt x="759651" y="1231998"/>
-                  </a:lnTo>
-                  <a:lnTo>
-                    <a:pt x="712173" y="1241968"/>
-                  </a:lnTo>
-                  <a:lnTo>
-                    <a:pt x="664695" y="1251741"/>
-                  </a:lnTo>
-                  <a:lnTo>
-                    <a:pt x="617217" y="1261315"/>
-                  </a:lnTo>
-                  <a:lnTo>
-                    <a:pt x="569738" y="1270689"/>
-                  </a:lnTo>
-                  <a:lnTo>
-                    <a:pt x="522260" y="1279863"/>
-                  </a:lnTo>
-                  <a:lnTo>
-                    <a:pt x="474782" y="1288836"/>
-                  </a:lnTo>
-                  <a:lnTo>
-                    <a:pt x="427304" y="1297609"/>
-                  </a:lnTo>
-                  <a:lnTo>
-                    <a:pt x="379825" y="1306183"/>
-                  </a:lnTo>
-                  <a:lnTo>
-                    <a:pt x="332347" y="1314560"/>
-                  </a:lnTo>
-                  <a:lnTo>
-                    <a:pt x="284869" y="1322740"/>
-                  </a:lnTo>
-                  <a:lnTo>
-                    <a:pt x="237391" y="1330726"/>
-                  </a:lnTo>
-                  <a:lnTo>
-                    <a:pt x="189912" y="1338519"/>
-                  </a:lnTo>
-                  <a:lnTo>
-                    <a:pt x="142434" y="1346123"/>
-                  </a:lnTo>
-                  <a:lnTo>
-                    <a:pt x="94956" y="1353540"/>
-                  </a:lnTo>
-                  <a:lnTo>
-                    <a:pt x="47478" y="1360772"/>
-                  </a:lnTo>
-                  <a:lnTo>
-                    <a:pt x="0" y="1367823"/>
+                    <a:pt x="2801215" y="689304"/>
+                  </a:lnTo>
+                  <a:lnTo>
+                    <a:pt x="2753737" y="704185"/>
+                  </a:lnTo>
+                  <a:lnTo>
+                    <a:pt x="2706259" y="718926"/>
+                  </a:lnTo>
+                  <a:lnTo>
+                    <a:pt x="2658781" y="733532"/>
+                  </a:lnTo>
+                  <a:lnTo>
+                    <a:pt x="2611303" y="748008"/>
+                  </a:lnTo>
+                  <a:lnTo>
+                    <a:pt x="2563824" y="762360"/>
+                  </a:lnTo>
+                  <a:lnTo>
+                    <a:pt x="2516346" y="776594"/>
+                  </a:lnTo>
+                  <a:lnTo>
+                    <a:pt x="2468868" y="790714"/>
+                  </a:lnTo>
+                  <a:lnTo>
+                    <a:pt x="2421390" y="804726"/>
+                  </a:lnTo>
+                  <a:lnTo>
+                    <a:pt x="2373911" y="818636"/>
+                  </a:lnTo>
+                  <a:lnTo>
+                    <a:pt x="2326433" y="832448"/>
+                  </a:lnTo>
+                  <a:lnTo>
+                    <a:pt x="2278955" y="846168"/>
+                  </a:lnTo>
+                  <a:lnTo>
+                    <a:pt x="2231477" y="859801"/>
+                  </a:lnTo>
+                  <a:lnTo>
+                    <a:pt x="2183998" y="873351"/>
+                  </a:lnTo>
+                  <a:lnTo>
+                    <a:pt x="2136520" y="886823"/>
+                  </a:lnTo>
+                  <a:lnTo>
+                    <a:pt x="2089042" y="900220"/>
+                  </a:lnTo>
+                  <a:lnTo>
+                    <a:pt x="2041564" y="913546"/>
+                  </a:lnTo>
+                  <a:lnTo>
+                    <a:pt x="1994085" y="926804"/>
+                  </a:lnTo>
+                  <a:lnTo>
+                    <a:pt x="1946607" y="939996"/>
+                  </a:lnTo>
+                  <a:lnTo>
+                    <a:pt x="1899129" y="953124"/>
+                  </a:lnTo>
+                  <a:lnTo>
+                    <a:pt x="1851651" y="966187"/>
+                  </a:lnTo>
+                  <a:lnTo>
+                    <a:pt x="1804173" y="979186"/>
+                  </a:lnTo>
+                  <a:lnTo>
+                    <a:pt x="1756694" y="992120"/>
+                  </a:lnTo>
+                  <a:lnTo>
+                    <a:pt x="1709216" y="1004986"/>
+                  </a:lnTo>
+                  <a:lnTo>
+                    <a:pt x="1661738" y="1017781"/>
+                  </a:lnTo>
+                  <a:lnTo>
+                    <a:pt x="1614260" y="1030501"/>
+                  </a:lnTo>
+                  <a:lnTo>
+                    <a:pt x="1566781" y="1043140"/>
+                  </a:lnTo>
+                  <a:lnTo>
+                    <a:pt x="1519303" y="1055693"/>
+                  </a:lnTo>
+                  <a:lnTo>
+                    <a:pt x="1471825" y="1068153"/>
+                  </a:lnTo>
+                  <a:lnTo>
+                    <a:pt x="1424347" y="1080512"/>
+                  </a:lnTo>
+                  <a:lnTo>
+                    <a:pt x="1376868" y="1092762"/>
+                  </a:lnTo>
+                  <a:lnTo>
+                    <a:pt x="1329390" y="1104896"/>
+                  </a:lnTo>
+                  <a:lnTo>
+                    <a:pt x="1281912" y="1116904"/>
+                  </a:lnTo>
+                  <a:lnTo>
+                    <a:pt x="1234434" y="1128779"/>
+                  </a:lnTo>
+                  <a:lnTo>
+                    <a:pt x="1186955" y="1140512"/>
+                  </a:lnTo>
+                  <a:lnTo>
+                    <a:pt x="1139477" y="1152094"/>
+                  </a:lnTo>
+                  <a:lnTo>
+                    <a:pt x="1091999" y="1163518"/>
+                  </a:lnTo>
+                  <a:lnTo>
+                    <a:pt x="1044521" y="1174777"/>
+                  </a:lnTo>
+                  <a:lnTo>
+                    <a:pt x="997042" y="1185864"/>
+                  </a:lnTo>
+                  <a:lnTo>
+                    <a:pt x="949564" y="1196773"/>
+                  </a:lnTo>
+                  <a:lnTo>
+                    <a:pt x="902086" y="1207499"/>
+                  </a:lnTo>
+                  <a:lnTo>
+                    <a:pt x="854608" y="1218036"/>
+                  </a:lnTo>
+                  <a:lnTo>
+                    <a:pt x="807130" y="1228381"/>
+                  </a:lnTo>
+                  <a:lnTo>
+                    <a:pt x="759651" y="1238530"/>
+                  </a:lnTo>
+                  <a:lnTo>
+                    <a:pt x="712173" y="1248481"/>
+                  </a:lnTo>
+                  <a:lnTo>
+                    <a:pt x="664695" y="1258232"/>
+                  </a:lnTo>
+                  <a:lnTo>
+                    <a:pt x="617217" y="1267781"/>
+                  </a:lnTo>
+                  <a:lnTo>
+                    <a:pt x="569738" y="1277127"/>
+                  </a:lnTo>
+                  <a:lnTo>
+                    <a:pt x="522260" y="1286271"/>
+                  </a:lnTo>
+                  <a:lnTo>
+                    <a:pt x="474782" y="1295212"/>
+                  </a:lnTo>
+                  <a:lnTo>
+                    <a:pt x="427304" y="1303950"/>
+                  </a:lnTo>
+                  <a:lnTo>
+                    <a:pt x="379825" y="1312488"/>
+                  </a:lnTo>
+                  <a:lnTo>
+                    <a:pt x="332347" y="1320826"/>
+                  </a:lnTo>
+                  <a:lnTo>
+                    <a:pt x="284869" y="1328967"/>
+                  </a:lnTo>
+                  <a:lnTo>
+                    <a:pt x="237391" y="1336911"/>
+                  </a:lnTo>
+                  <a:lnTo>
+                    <a:pt x="189912" y="1344662"/>
+                  </a:lnTo>
+                  <a:lnTo>
+                    <a:pt x="142434" y="1352222"/>
+                  </a:lnTo>
+                  <a:lnTo>
+                    <a:pt x="94956" y="1359594"/>
+                  </a:lnTo>
+                  <a:lnTo>
+                    <a:pt x="47478" y="1366780"/>
+                  </a:lnTo>
+                  <a:lnTo>
+                    <a:pt x="0" y="1373783"/>
                   </a:lnTo>
                   <a:close/>
                 </a:path>
@@ -6533,189 +6533,189 @@
           </p:nvSpPr>
           <p:spPr>
             <a:xfrm>
-              <a:off x="5300393" y="1015745"/>
-              <a:ext cx="2801215" cy="1145723"/>
+              <a:off x="5300393" y="1008765"/>
+              <a:ext cx="2801215" cy="1153801"/>
             </a:xfrm>
             <a:custGeom>
               <a:avLst/>
               <a:pathLst>
-                <a:path w="2801215" h="1145723">
+                <a:path w="2801215" h="1153801">
                   <a:moveTo>
-                    <a:pt x="0" y="1145723"/>
+                    <a:pt x="0" y="1153801"/>
                   </a:moveTo>
                   <a:lnTo>
-                    <a:pt x="47478" y="1138456"/>
-                  </a:lnTo>
-                  <a:lnTo>
-                    <a:pt x="94956" y="1131043"/>
-                  </a:lnTo>
-                  <a:lnTo>
-                    <a:pt x="142434" y="1123478"/>
-                  </a:lnTo>
-                  <a:lnTo>
-                    <a:pt x="189912" y="1115755"/>
-                  </a:lnTo>
-                  <a:lnTo>
-                    <a:pt x="237391" y="1107869"/>
-                  </a:lnTo>
-                  <a:lnTo>
-                    <a:pt x="284869" y="1099812"/>
-                  </a:lnTo>
-                  <a:lnTo>
-                    <a:pt x="332347" y="1091577"/>
-                  </a:lnTo>
-                  <a:lnTo>
-                    <a:pt x="379825" y="1083157"/>
-                  </a:lnTo>
-                  <a:lnTo>
-                    <a:pt x="427304" y="1074543"/>
-                  </a:lnTo>
-                  <a:lnTo>
-                    <a:pt x="474782" y="1065726"/>
-                  </a:lnTo>
-                  <a:lnTo>
-                    <a:pt x="522260" y="1056698"/>
-                  </a:lnTo>
-                  <a:lnTo>
-                    <a:pt x="569738" y="1047447"/>
-                  </a:lnTo>
-                  <a:lnTo>
-                    <a:pt x="617217" y="1037962"/>
-                  </a:lnTo>
-                  <a:lnTo>
-                    <a:pt x="664695" y="1028232"/>
-                  </a:lnTo>
-                  <a:lnTo>
-                    <a:pt x="712173" y="1018245"/>
-                  </a:lnTo>
-                  <a:lnTo>
-                    <a:pt x="759651" y="1007986"/>
-                  </a:lnTo>
-                  <a:lnTo>
-                    <a:pt x="807130" y="997441"/>
-                  </a:lnTo>
-                  <a:lnTo>
-                    <a:pt x="854608" y="986595"/>
-                  </a:lnTo>
-                  <a:lnTo>
-                    <a:pt x="902086" y="975431"/>
-                  </a:lnTo>
-                  <a:lnTo>
-                    <a:pt x="949564" y="963931"/>
-                  </a:lnTo>
-                  <a:lnTo>
-                    <a:pt x="997042" y="952077"/>
-                  </a:lnTo>
-                  <a:lnTo>
-                    <a:pt x="1044521" y="939849"/>
-                  </a:lnTo>
-                  <a:lnTo>
-                    <a:pt x="1091999" y="927227"/>
-                  </a:lnTo>
-                  <a:lnTo>
-                    <a:pt x="1139477" y="914188"/>
-                  </a:lnTo>
-                  <a:lnTo>
-                    <a:pt x="1186955" y="900709"/>
-                  </a:lnTo>
-                  <a:lnTo>
-                    <a:pt x="1234434" y="886768"/>
-                  </a:lnTo>
-                  <a:lnTo>
-                    <a:pt x="1281912" y="872339"/>
-                  </a:lnTo>
-                  <a:lnTo>
-                    <a:pt x="1329390" y="857397"/>
-                  </a:lnTo>
-                  <a:lnTo>
-                    <a:pt x="1376868" y="841917"/>
-                  </a:lnTo>
-                  <a:lnTo>
-                    <a:pt x="1424347" y="825872"/>
-                  </a:lnTo>
-                  <a:lnTo>
-                    <a:pt x="1471825" y="809237"/>
-                  </a:lnTo>
-                  <a:lnTo>
-                    <a:pt x="1519303" y="791983"/>
-                  </a:lnTo>
-                  <a:lnTo>
-                    <a:pt x="1566781" y="774085"/>
-                  </a:lnTo>
-                  <a:lnTo>
-                    <a:pt x="1614260" y="755517"/>
-                  </a:lnTo>
-                  <a:lnTo>
-                    <a:pt x="1661738" y="736251"/>
-                  </a:lnTo>
-                  <a:lnTo>
-                    <a:pt x="1709216" y="716263"/>
-                  </a:lnTo>
-                  <a:lnTo>
-                    <a:pt x="1756694" y="695526"/>
-                  </a:lnTo>
-                  <a:lnTo>
-                    <a:pt x="1804173" y="674015"/>
-                  </a:lnTo>
-                  <a:lnTo>
-                    <a:pt x="1851651" y="651706"/>
-                  </a:lnTo>
-                  <a:lnTo>
-                    <a:pt x="1899129" y="628574"/>
-                  </a:lnTo>
-                  <a:lnTo>
-                    <a:pt x="1946607" y="604596"/>
-                  </a:lnTo>
-                  <a:lnTo>
-                    <a:pt x="1994085" y="579746"/>
-                  </a:lnTo>
-                  <a:lnTo>
-                    <a:pt x="2041564" y="554002"/>
-                  </a:lnTo>
-                  <a:lnTo>
-                    <a:pt x="2089042" y="527339"/>
-                  </a:lnTo>
-                  <a:lnTo>
-                    <a:pt x="2136520" y="499735"/>
-                  </a:lnTo>
-                  <a:lnTo>
-                    <a:pt x="2183998" y="471164"/>
-                  </a:lnTo>
-                  <a:lnTo>
-                    <a:pt x="2231477" y="441603"/>
-                  </a:lnTo>
-                  <a:lnTo>
-                    <a:pt x="2278955" y="411028"/>
-                  </a:lnTo>
-                  <a:lnTo>
-                    <a:pt x="2326433" y="379412"/>
-                  </a:lnTo>
-                  <a:lnTo>
-                    <a:pt x="2373911" y="346730"/>
-                  </a:lnTo>
-                  <a:lnTo>
-                    <a:pt x="2421390" y="312957"/>
-                  </a:lnTo>
-                  <a:lnTo>
-                    <a:pt x="2468868" y="278064"/>
-                  </a:lnTo>
-                  <a:lnTo>
-                    <a:pt x="2516346" y="242023"/>
-                  </a:lnTo>
-                  <a:lnTo>
-                    <a:pt x="2563824" y="204807"/>
-                  </a:lnTo>
-                  <a:lnTo>
-                    <a:pt x="2611303" y="166384"/>
-                  </a:lnTo>
-                  <a:lnTo>
-                    <a:pt x="2658781" y="126724"/>
-                  </a:lnTo>
-                  <a:lnTo>
-                    <a:pt x="2706259" y="85796"/>
-                  </a:lnTo>
-                  <a:lnTo>
-                    <a:pt x="2753737" y="43566"/>
+                    <a:pt x="47478" y="1146519"/>
+                  </a:lnTo>
+                  <a:lnTo>
+                    <a:pt x="94956" y="1139088"/>
+                  </a:lnTo>
+                  <a:lnTo>
+                    <a:pt x="142434" y="1131504"/>
+                  </a:lnTo>
+                  <a:lnTo>
+                    <a:pt x="189912" y="1123761"/>
+                  </a:lnTo>
+                  <a:lnTo>
+                    <a:pt x="237391" y="1115853"/>
+                  </a:lnTo>
+                  <a:lnTo>
+                    <a:pt x="284869" y="1107771"/>
+                  </a:lnTo>
+                  <a:lnTo>
+                    <a:pt x="332347" y="1099511"/>
+                  </a:lnTo>
+                  <a:lnTo>
+                    <a:pt x="379825" y="1091063"/>
+                  </a:lnTo>
+                  <a:lnTo>
+                    <a:pt x="427304" y="1082419"/>
+                  </a:lnTo>
+                  <a:lnTo>
+                    <a:pt x="474782" y="1073571"/>
+                  </a:lnTo>
+                  <a:lnTo>
+                    <a:pt x="522260" y="1064508"/>
+                  </a:lnTo>
+                  <a:lnTo>
+                    <a:pt x="569738" y="1055221"/>
+                  </a:lnTo>
+                  <a:lnTo>
+                    <a:pt x="617217" y="1045699"/>
+                  </a:lnTo>
+                  <a:lnTo>
+                    <a:pt x="664695" y="1035929"/>
+                  </a:lnTo>
+                  <a:lnTo>
+                    <a:pt x="712173" y="1025899"/>
+                  </a:lnTo>
+                  <a:lnTo>
+                    <a:pt x="759651" y="1015596"/>
+                  </a:lnTo>
+                  <a:lnTo>
+                    <a:pt x="807130" y="1005004"/>
+                  </a:lnTo>
+                  <a:lnTo>
+                    <a:pt x="854608" y="994109"/>
+                  </a:lnTo>
+                  <a:lnTo>
+                    <a:pt x="902086" y="982893"/>
+                  </a:lnTo>
+                  <a:lnTo>
+                    <a:pt x="949564" y="971340"/>
+                  </a:lnTo>
+                  <a:lnTo>
+                    <a:pt x="997042" y="959429"/>
+                  </a:lnTo>
+                  <a:lnTo>
+                    <a:pt x="1044521" y="947142"/>
+                  </a:lnTo>
+                  <a:lnTo>
+                    <a:pt x="1091999" y="934458"/>
+                  </a:lnTo>
+                  <a:lnTo>
+                    <a:pt x="1139477" y="921354"/>
+                  </a:lnTo>
+                  <a:lnTo>
+                    <a:pt x="1186955" y="907807"/>
+                  </a:lnTo>
+                  <a:lnTo>
+                    <a:pt x="1234434" y="893795"/>
+                  </a:lnTo>
+                  <a:lnTo>
+                    <a:pt x="1281912" y="879292"/>
+                  </a:lnTo>
+                  <a:lnTo>
+                    <a:pt x="1329390" y="864272"/>
+                  </a:lnTo>
+                  <a:lnTo>
+                    <a:pt x="1376868" y="848710"/>
+                  </a:lnTo>
+                  <a:lnTo>
+                    <a:pt x="1424347" y="832580"/>
+                  </a:lnTo>
+                  <a:lnTo>
+                    <a:pt x="1471825" y="815854"/>
+                  </a:lnTo>
+                  <a:lnTo>
+                    <a:pt x="1519303" y="798506"/>
+                  </a:lnTo>
+                  <a:lnTo>
+                    <a:pt x="1566781" y="780508"/>
+                  </a:lnTo>
+                  <a:lnTo>
+                    <a:pt x="1614260" y="761835"/>
+                  </a:lnTo>
+                  <a:lnTo>
+                    <a:pt x="1661738" y="742458"/>
+                  </a:lnTo>
+                  <a:lnTo>
+                    <a:pt x="1709216" y="722351"/>
+                  </a:lnTo>
+                  <a:lnTo>
+                    <a:pt x="1756694" y="701490"/>
+                  </a:lnTo>
+                  <a:lnTo>
+                    <a:pt x="1804173" y="679847"/>
+                  </a:lnTo>
+                  <a:lnTo>
+                    <a:pt x="1851651" y="657397"/>
+                  </a:lnTo>
+                  <a:lnTo>
+                    <a:pt x="1899129" y="634115"/>
+                  </a:lnTo>
+                  <a:lnTo>
+                    <a:pt x="1946607" y="609978"/>
+                  </a:lnTo>
+                  <a:lnTo>
+                    <a:pt x="1994085" y="584959"/>
+                  </a:lnTo>
+                  <a:lnTo>
+                    <a:pt x="2041564" y="559034"/>
+                  </a:lnTo>
+                  <a:lnTo>
+                    <a:pt x="2089042" y="532180"/>
+                  </a:lnTo>
+                  <a:lnTo>
+                    <a:pt x="2136520" y="504371"/>
+                  </a:lnTo>
+                  <a:lnTo>
+                    <a:pt x="2183998" y="475583"/>
+                  </a:lnTo>
+                  <a:lnTo>
+                    <a:pt x="2231477" y="445791"/>
+                  </a:lnTo>
+                  <a:lnTo>
+                    <a:pt x="2278955" y="414969"/>
+                  </a:lnTo>
+                  <a:lnTo>
+                    <a:pt x="2326433" y="383092"/>
+                  </a:lnTo>
+                  <a:lnTo>
+                    <a:pt x="2373911" y="350132"/>
+                  </a:lnTo>
+                  <a:lnTo>
+                    <a:pt x="2421390" y="316063"/>
+                  </a:lnTo>
+                  <a:lnTo>
+                    <a:pt x="2468868" y="280856"/>
+                  </a:lnTo>
+                  <a:lnTo>
+                    <a:pt x="2516346" y="244482"/>
+                  </a:lnTo>
+                  <a:lnTo>
+                    <a:pt x="2563824" y="206912"/>
+                  </a:lnTo>
+                  <a:lnTo>
+                    <a:pt x="2611303" y="168115"/>
+                  </a:lnTo>
+                  <a:lnTo>
+                    <a:pt x="2658781" y="128059"/>
+                  </a:lnTo>
+                  <a:lnTo>
+                    <a:pt x="2706259" y="86710"/>
+                  </a:lnTo>
+                  <a:lnTo>
+                    <a:pt x="2753737" y="44036"/>
                   </a:lnTo>
                   <a:lnTo>
                     <a:pt x="2801215" y="0"/>
@@ -6738,192 +6738,192 @@
           </p:nvSpPr>
           <p:spPr>
             <a:xfrm>
-              <a:off x="5300393" y="1702536"/>
-              <a:ext cx="2801215" cy="681032"/>
+              <a:off x="5300393" y="1698069"/>
+              <a:ext cx="2801215" cy="684479"/>
             </a:xfrm>
             <a:custGeom>
               <a:avLst/>
               <a:pathLst>
-                <a:path w="2801215" h="681032">
+                <a:path w="2801215" h="684479">
                   <a:moveTo>
                     <a:pt x="2801215" y="0"/>
                   </a:moveTo>
                   <a:lnTo>
-                    <a:pt x="2753737" y="14663"/>
-                  </a:lnTo>
-                  <a:lnTo>
-                    <a:pt x="2706259" y="29192"/>
-                  </a:lnTo>
-                  <a:lnTo>
-                    <a:pt x="2658781" y="43593"/>
-                  </a:lnTo>
-                  <a:lnTo>
-                    <a:pt x="2611303" y="57871"/>
-                  </a:lnTo>
-                  <a:lnTo>
-                    <a:pt x="2563824" y="72031"/>
-                  </a:lnTo>
-                  <a:lnTo>
-                    <a:pt x="2516346" y="86078"/>
-                  </a:lnTo>
-                  <a:lnTo>
-                    <a:pt x="2468868" y="100017"/>
-                  </a:lnTo>
-                  <a:lnTo>
-                    <a:pt x="2421390" y="113855"/>
-                  </a:lnTo>
-                  <a:lnTo>
-                    <a:pt x="2373911" y="127596"/>
-                  </a:lnTo>
-                  <a:lnTo>
-                    <a:pt x="2326433" y="141246"/>
-                  </a:lnTo>
-                  <a:lnTo>
-                    <a:pt x="2278955" y="154809"/>
-                  </a:lnTo>
-                  <a:lnTo>
-                    <a:pt x="2231477" y="168291"/>
-                  </a:lnTo>
-                  <a:lnTo>
-                    <a:pt x="2183998" y="181696"/>
-                  </a:lnTo>
-                  <a:lnTo>
-                    <a:pt x="2136520" y="195028"/>
-                  </a:lnTo>
-                  <a:lnTo>
-                    <a:pt x="2089042" y="208292"/>
-                  </a:lnTo>
-                  <a:lnTo>
-                    <a:pt x="2041564" y="221490"/>
-                  </a:lnTo>
-                  <a:lnTo>
-                    <a:pt x="1994085" y="234627"/>
-                  </a:lnTo>
-                  <a:lnTo>
-                    <a:pt x="1946607" y="247703"/>
-                  </a:lnTo>
-                  <a:lnTo>
-                    <a:pt x="1899129" y="260721"/>
-                  </a:lnTo>
-                  <a:lnTo>
-                    <a:pt x="1851651" y="273680"/>
-                  </a:lnTo>
-                  <a:lnTo>
-                    <a:pt x="1804173" y="286582"/>
-                  </a:lnTo>
-                  <a:lnTo>
-                    <a:pt x="1756694" y="299424"/>
-                  </a:lnTo>
-                  <a:lnTo>
-                    <a:pt x="1709216" y="312204"/>
-                  </a:lnTo>
-                  <a:lnTo>
-                    <a:pt x="1661738" y="324919"/>
-                  </a:lnTo>
-                  <a:lnTo>
-                    <a:pt x="1614260" y="337566"/>
-                  </a:lnTo>
-                  <a:lnTo>
-                    <a:pt x="1566781" y="350138"/>
-                  </a:lnTo>
-                  <a:lnTo>
-                    <a:pt x="1519303" y="362629"/>
-                  </a:lnTo>
-                  <a:lnTo>
-                    <a:pt x="1471825" y="375034"/>
-                  </a:lnTo>
-                  <a:lnTo>
-                    <a:pt x="1424347" y="387344"/>
-                  </a:lnTo>
-                  <a:lnTo>
-                    <a:pt x="1376868" y="399551"/>
-                  </a:lnTo>
-                  <a:lnTo>
-                    <a:pt x="1329390" y="411647"/>
-                  </a:lnTo>
-                  <a:lnTo>
-                    <a:pt x="1281912" y="423623"/>
-                  </a:lnTo>
-                  <a:lnTo>
-                    <a:pt x="1234434" y="435471"/>
-                  </a:lnTo>
-                  <a:lnTo>
-                    <a:pt x="1186955" y="447182"/>
-                  </a:lnTo>
-                  <a:lnTo>
-                    <a:pt x="1139477" y="458747"/>
-                  </a:lnTo>
-                  <a:lnTo>
-                    <a:pt x="1091999" y="470160"/>
-                  </a:lnTo>
-                  <a:lnTo>
-                    <a:pt x="1044521" y="481412"/>
-                  </a:lnTo>
-                  <a:lnTo>
-                    <a:pt x="997042" y="492496"/>
-                  </a:lnTo>
-                  <a:lnTo>
-                    <a:pt x="949564" y="503406"/>
-                  </a:lnTo>
-                  <a:lnTo>
-                    <a:pt x="902086" y="514137"/>
-                  </a:lnTo>
-                  <a:lnTo>
-                    <a:pt x="854608" y="524684"/>
-                  </a:lnTo>
-                  <a:lnTo>
-                    <a:pt x="807130" y="535042"/>
-                  </a:lnTo>
-                  <a:lnTo>
-                    <a:pt x="759651" y="545207"/>
-                  </a:lnTo>
-                  <a:lnTo>
-                    <a:pt x="712173" y="555178"/>
-                  </a:lnTo>
-                  <a:lnTo>
-                    <a:pt x="664695" y="564951"/>
-                  </a:lnTo>
-                  <a:lnTo>
-                    <a:pt x="617217" y="574525"/>
-                  </a:lnTo>
-                  <a:lnTo>
-                    <a:pt x="569738" y="583899"/>
-                  </a:lnTo>
-                  <a:lnTo>
-                    <a:pt x="522260" y="593072"/>
-                  </a:lnTo>
-                  <a:lnTo>
-                    <a:pt x="474782" y="602046"/>
-                  </a:lnTo>
-                  <a:lnTo>
-                    <a:pt x="427304" y="610819"/>
-                  </a:lnTo>
-                  <a:lnTo>
-                    <a:pt x="379825" y="619393"/>
-                  </a:lnTo>
-                  <a:lnTo>
-                    <a:pt x="332347" y="627769"/>
-                  </a:lnTo>
-                  <a:lnTo>
-                    <a:pt x="284869" y="635949"/>
-                  </a:lnTo>
-                  <a:lnTo>
-                    <a:pt x="237391" y="643935"/>
-                  </a:lnTo>
-                  <a:lnTo>
-                    <a:pt x="189912" y="651729"/>
-                  </a:lnTo>
-                  <a:lnTo>
-                    <a:pt x="142434" y="659333"/>
-                  </a:lnTo>
-                  <a:lnTo>
-                    <a:pt x="94956" y="666749"/>
-                  </a:lnTo>
-                  <a:lnTo>
-                    <a:pt x="47478" y="673982"/>
-                  </a:lnTo>
-                  <a:lnTo>
-                    <a:pt x="0" y="681032"/>
+                    <a:pt x="2753737" y="14881"/>
+                  </a:lnTo>
+                  <a:lnTo>
+                    <a:pt x="2706259" y="29621"/>
+                  </a:lnTo>
+                  <a:lnTo>
+                    <a:pt x="2658781" y="44227"/>
+                  </a:lnTo>
+                  <a:lnTo>
+                    <a:pt x="2611303" y="58704"/>
+                  </a:lnTo>
+                  <a:lnTo>
+                    <a:pt x="2563824" y="73056"/>
+                  </a:lnTo>
+                  <a:lnTo>
+                    <a:pt x="2516346" y="87289"/>
+                  </a:lnTo>
+                  <a:lnTo>
+                    <a:pt x="2468868" y="101410"/>
+                  </a:lnTo>
+                  <a:lnTo>
+                    <a:pt x="2421390" y="115422"/>
+                  </a:lnTo>
+                  <a:lnTo>
+                    <a:pt x="2373911" y="129332"/>
+                  </a:lnTo>
+                  <a:lnTo>
+                    <a:pt x="2326433" y="143144"/>
+                  </a:lnTo>
+                  <a:lnTo>
+                    <a:pt x="2278955" y="156864"/>
+                  </a:lnTo>
+                  <a:lnTo>
+                    <a:pt x="2231477" y="170497"/>
+                  </a:lnTo>
+                  <a:lnTo>
+                    <a:pt x="2183998" y="184047"/>
+                  </a:lnTo>
+                  <a:lnTo>
+                    <a:pt x="2136520" y="197518"/>
+                  </a:lnTo>
+                  <a:lnTo>
+                    <a:pt x="2089042" y="210916"/>
+                  </a:lnTo>
+                  <a:lnTo>
+                    <a:pt x="2041564" y="224242"/>
+                  </a:lnTo>
+                  <a:lnTo>
+                    <a:pt x="1994085" y="237500"/>
+                  </a:lnTo>
+                  <a:lnTo>
+                    <a:pt x="1946607" y="250692"/>
+                  </a:lnTo>
+                  <a:lnTo>
+                    <a:pt x="1899129" y="263819"/>
+                  </a:lnTo>
+                  <a:lnTo>
+                    <a:pt x="1851651" y="276883"/>
+                  </a:lnTo>
+                  <a:lnTo>
+                    <a:pt x="1804173" y="289882"/>
+                  </a:lnTo>
+                  <a:lnTo>
+                    <a:pt x="1756694" y="302816"/>
+                  </a:lnTo>
+                  <a:lnTo>
+                    <a:pt x="1709216" y="315682"/>
+                  </a:lnTo>
+                  <a:lnTo>
+                    <a:pt x="1661738" y="328477"/>
+                  </a:lnTo>
+                  <a:lnTo>
+                    <a:pt x="1614260" y="341196"/>
+                  </a:lnTo>
+                  <a:lnTo>
+                    <a:pt x="1566781" y="353836"/>
+                  </a:lnTo>
+                  <a:lnTo>
+                    <a:pt x="1519303" y="366388"/>
+                  </a:lnTo>
+                  <a:lnTo>
+                    <a:pt x="1471825" y="378848"/>
+                  </a:lnTo>
+                  <a:lnTo>
+                    <a:pt x="1424347" y="391207"/>
+                  </a:lnTo>
+                  <a:lnTo>
+                    <a:pt x="1376868" y="403458"/>
+                  </a:lnTo>
+                  <a:lnTo>
+                    <a:pt x="1329390" y="415592"/>
+                  </a:lnTo>
+                  <a:lnTo>
+                    <a:pt x="1281912" y="427600"/>
+                  </a:lnTo>
+                  <a:lnTo>
+                    <a:pt x="1234434" y="439475"/>
+                  </a:lnTo>
+                  <a:lnTo>
+                    <a:pt x="1186955" y="451207"/>
+                  </a:lnTo>
+                  <a:lnTo>
+                    <a:pt x="1139477" y="462790"/>
+                  </a:lnTo>
+                  <a:lnTo>
+                    <a:pt x="1091999" y="474214"/>
+                  </a:lnTo>
+                  <a:lnTo>
+                    <a:pt x="1044521" y="485473"/>
+                  </a:lnTo>
+                  <a:lnTo>
+                    <a:pt x="997042" y="496560"/>
+                  </a:lnTo>
+                  <a:lnTo>
+                    <a:pt x="949564" y="507469"/>
+                  </a:lnTo>
+                  <a:lnTo>
+                    <a:pt x="902086" y="518194"/>
+                  </a:lnTo>
+                  <a:lnTo>
+                    <a:pt x="854608" y="528731"/>
+                  </a:lnTo>
+                  <a:lnTo>
+                    <a:pt x="807130" y="539076"/>
+                  </a:lnTo>
+                  <a:lnTo>
+                    <a:pt x="759651" y="549226"/>
+                  </a:lnTo>
+                  <a:lnTo>
+                    <a:pt x="712173" y="559177"/>
+                  </a:lnTo>
+                  <a:lnTo>
+                    <a:pt x="664695" y="568928"/>
+                  </a:lnTo>
+                  <a:lnTo>
+                    <a:pt x="617217" y="578477"/>
+                  </a:lnTo>
+                  <a:lnTo>
+                    <a:pt x="569738" y="587823"/>
+                  </a:lnTo>
+                  <a:lnTo>
+                    <a:pt x="522260" y="596966"/>
+                  </a:lnTo>
+                  <a:lnTo>
+                    <a:pt x="474782" y="605907"/>
+                  </a:lnTo>
+                  <a:lnTo>
+                    <a:pt x="427304" y="614646"/>
+                  </a:lnTo>
+                  <a:lnTo>
+                    <a:pt x="379825" y="623184"/>
+                  </a:lnTo>
+                  <a:lnTo>
+                    <a:pt x="332347" y="631522"/>
+                  </a:lnTo>
+                  <a:lnTo>
+                    <a:pt x="284869" y="639662"/>
+                  </a:lnTo>
+                  <a:lnTo>
+                    <a:pt x="237391" y="647607"/>
+                  </a:lnTo>
+                  <a:lnTo>
+                    <a:pt x="189912" y="655358"/>
+                  </a:lnTo>
+                  <a:lnTo>
+                    <a:pt x="142434" y="662918"/>
+                  </a:lnTo>
+                  <a:lnTo>
+                    <a:pt x="94956" y="670289"/>
+                  </a:lnTo>
+                  <a:lnTo>
+                    <a:pt x="47478" y="677475"/>
+                  </a:lnTo>
+                  <a:lnTo>
+                    <a:pt x="0" y="684479"/>
                   </a:lnTo>
                 </a:path>
               </a:pathLst>
@@ -6944,371 +6944,371 @@
           <p:spPr>
             <a:xfrm>
               <a:off x="5300393" y="769664"/>
-              <a:ext cx="2801215" cy="1295981"/>
+              <a:ext cx="2801215" cy="1251484"/>
             </a:xfrm>
             <a:custGeom>
               <a:avLst/>
               <a:pathLst>
-                <a:path w="2801215" h="1295981">
+                <a:path w="2801215" h="1251484">
                   <a:moveTo>
-                    <a:pt x="0" y="463299"/>
+                    <a:pt x="0" y="354093"/>
                   </a:moveTo>
                   <a:lnTo>
-                    <a:pt x="47478" y="469054"/>
-                  </a:lnTo>
-                  <a:lnTo>
-                    <a:pt x="94956" y="474658"/>
-                  </a:lnTo>
-                  <a:lnTo>
-                    <a:pt x="142434" y="480104"/>
-                  </a:lnTo>
-                  <a:lnTo>
-                    <a:pt x="189912" y="485385"/>
-                  </a:lnTo>
-                  <a:lnTo>
-                    <a:pt x="237391" y="490491"/>
-                  </a:lnTo>
-                  <a:lnTo>
-                    <a:pt x="284869" y="495413"/>
-                  </a:lnTo>
-                  <a:lnTo>
-                    <a:pt x="332347" y="500142"/>
-                  </a:lnTo>
-                  <a:lnTo>
-                    <a:pt x="379825" y="504665"/>
-                  </a:lnTo>
-                  <a:lnTo>
-                    <a:pt x="427304" y="508971"/>
-                  </a:lnTo>
-                  <a:lnTo>
-                    <a:pt x="474782" y="513046"/>
-                  </a:lnTo>
-                  <a:lnTo>
-                    <a:pt x="522260" y="516875"/>
-                  </a:lnTo>
-                  <a:lnTo>
-                    <a:pt x="569738" y="520443"/>
-                  </a:lnTo>
-                  <a:lnTo>
-                    <a:pt x="617217" y="523733"/>
-                  </a:lnTo>
-                  <a:lnTo>
-                    <a:pt x="664695" y="526725"/>
-                  </a:lnTo>
-                  <a:lnTo>
-                    <a:pt x="712173" y="529400"/>
-                  </a:lnTo>
-                  <a:lnTo>
-                    <a:pt x="759651" y="531736"/>
-                  </a:lnTo>
-                  <a:lnTo>
-                    <a:pt x="807130" y="533708"/>
-                  </a:lnTo>
-                  <a:lnTo>
-                    <a:pt x="854608" y="535293"/>
-                  </a:lnTo>
-                  <a:lnTo>
-                    <a:pt x="902086" y="536462"/>
-                  </a:lnTo>
-                  <a:lnTo>
-                    <a:pt x="949564" y="537187"/>
-                  </a:lnTo>
-                  <a:lnTo>
-                    <a:pt x="997042" y="537437"/>
-                  </a:lnTo>
-                  <a:lnTo>
-                    <a:pt x="1044521" y="537182"/>
-                  </a:lnTo>
-                  <a:lnTo>
-                    <a:pt x="1091999" y="536387"/>
-                  </a:lnTo>
-                  <a:lnTo>
-                    <a:pt x="1139477" y="535020"/>
-                  </a:lnTo>
-                  <a:lnTo>
-                    <a:pt x="1186955" y="533045"/>
-                  </a:lnTo>
-                  <a:lnTo>
-                    <a:pt x="1234434" y="530429"/>
-                  </a:lnTo>
-                  <a:lnTo>
-                    <a:pt x="1281912" y="527136"/>
-                  </a:lnTo>
-                  <a:lnTo>
-                    <a:pt x="1329390" y="523134"/>
-                  </a:lnTo>
-                  <a:lnTo>
-                    <a:pt x="1376868" y="518393"/>
-                  </a:lnTo>
-                  <a:lnTo>
-                    <a:pt x="1424347" y="512881"/>
-                  </a:lnTo>
-                  <a:lnTo>
-                    <a:pt x="1471825" y="506575"/>
-                  </a:lnTo>
-                  <a:lnTo>
-                    <a:pt x="1519303" y="499450"/>
-                  </a:lnTo>
-                  <a:lnTo>
-                    <a:pt x="1566781" y="491489"/>
-                  </a:lnTo>
-                  <a:lnTo>
-                    <a:pt x="1614260" y="482676"/>
-                  </a:lnTo>
-                  <a:lnTo>
-                    <a:pt x="1661738" y="473002"/>
-                  </a:lnTo>
-                  <a:lnTo>
-                    <a:pt x="1709216" y="462461"/>
-                  </a:lnTo>
-                  <a:lnTo>
-                    <a:pt x="1756694" y="451051"/>
-                  </a:lnTo>
-                  <a:lnTo>
-                    <a:pt x="1804173" y="438773"/>
-                  </a:lnTo>
-                  <a:lnTo>
-                    <a:pt x="1851651" y="425635"/>
-                  </a:lnTo>
-                  <a:lnTo>
-                    <a:pt x="1899129" y="411643"/>
-                  </a:lnTo>
-                  <a:lnTo>
-                    <a:pt x="1946607" y="396808"/>
-                  </a:lnTo>
-                  <a:lnTo>
-                    <a:pt x="1994085" y="381143"/>
-                  </a:lnTo>
-                  <a:lnTo>
-                    <a:pt x="2041564" y="364660"/>
-                  </a:lnTo>
-                  <a:lnTo>
-                    <a:pt x="2089042" y="347375"/>
-                  </a:lnTo>
-                  <a:lnTo>
-                    <a:pt x="2136520" y="329302"/>
-                  </a:lnTo>
-                  <a:lnTo>
-                    <a:pt x="2183998" y="310454"/>
-                  </a:lnTo>
-                  <a:lnTo>
-                    <a:pt x="2231477" y="290846"/>
-                  </a:lnTo>
-                  <a:lnTo>
-                    <a:pt x="2278955" y="270491"/>
-                  </a:lnTo>
-                  <a:lnTo>
-                    <a:pt x="2326433" y="249401"/>
-                  </a:lnTo>
-                  <a:lnTo>
-                    <a:pt x="2373911" y="227588"/>
-                  </a:lnTo>
-                  <a:lnTo>
-                    <a:pt x="2421390" y="205061"/>
-                  </a:lnTo>
-                  <a:lnTo>
-                    <a:pt x="2468868" y="181829"/>
-                  </a:lnTo>
-                  <a:lnTo>
-                    <a:pt x="2516346" y="157901"/>
-                  </a:lnTo>
-                  <a:lnTo>
-                    <a:pt x="2563824" y="133283"/>
-                  </a:lnTo>
-                  <a:lnTo>
-                    <a:pt x="2611303" y="107981"/>
-                  </a:lnTo>
-                  <a:lnTo>
-                    <a:pt x="2658781" y="81999"/>
-                  </a:lnTo>
-                  <a:lnTo>
-                    <a:pt x="2706259" y="55340"/>
-                  </a:lnTo>
-                  <a:lnTo>
-                    <a:pt x="2753737" y="28006"/>
+                    <a:pt x="47478" y="362343"/>
+                  </a:lnTo>
+                  <a:lnTo>
+                    <a:pt x="94956" y="370409"/>
+                  </a:lnTo>
+                  <a:lnTo>
+                    <a:pt x="142434" y="378285"/>
+                  </a:lnTo>
+                  <a:lnTo>
+                    <a:pt x="189912" y="385962"/>
+                  </a:lnTo>
+                  <a:lnTo>
+                    <a:pt x="237391" y="393433"/>
+                  </a:lnTo>
+                  <a:lnTo>
+                    <a:pt x="284869" y="400686"/>
+                  </a:lnTo>
+                  <a:lnTo>
+                    <a:pt x="332347" y="407713"/>
+                  </a:lnTo>
+                  <a:lnTo>
+                    <a:pt x="379825" y="414501"/>
+                  </a:lnTo>
+                  <a:lnTo>
+                    <a:pt x="427304" y="421039"/>
+                  </a:lnTo>
+                  <a:lnTo>
+                    <a:pt x="474782" y="427312"/>
+                  </a:lnTo>
+                  <a:lnTo>
+                    <a:pt x="522260" y="433307"/>
+                  </a:lnTo>
+                  <a:lnTo>
+                    <a:pt x="569738" y="439007"/>
+                  </a:lnTo>
+                  <a:lnTo>
+                    <a:pt x="617217" y="444395"/>
+                  </a:lnTo>
+                  <a:lnTo>
+                    <a:pt x="664695" y="449451"/>
+                  </a:lnTo>
+                  <a:lnTo>
+                    <a:pt x="712173" y="454157"/>
+                  </a:lnTo>
+                  <a:lnTo>
+                    <a:pt x="759651" y="458488"/>
+                  </a:lnTo>
+                  <a:lnTo>
+                    <a:pt x="807130" y="462422"/>
+                  </a:lnTo>
+                  <a:lnTo>
+                    <a:pt x="854608" y="465933"/>
+                  </a:lnTo>
+                  <a:lnTo>
+                    <a:pt x="902086" y="468994"/>
+                  </a:lnTo>
+                  <a:lnTo>
+                    <a:pt x="949564" y="471577"/>
+                  </a:lnTo>
+                  <a:lnTo>
+                    <a:pt x="997042" y="473650"/>
+                  </a:lnTo>
+                  <a:lnTo>
+                    <a:pt x="1044521" y="475182"/>
+                  </a:lnTo>
+                  <a:lnTo>
+                    <a:pt x="1091999" y="476141"/>
+                  </a:lnTo>
+                  <a:lnTo>
+                    <a:pt x="1139477" y="476493"/>
+                  </a:lnTo>
+                  <a:lnTo>
+                    <a:pt x="1186955" y="476204"/>
+                  </a:lnTo>
+                  <a:lnTo>
+                    <a:pt x="1234434" y="475241"/>
+                  </a:lnTo>
+                  <a:lnTo>
+                    <a:pt x="1281912" y="473570"/>
+                  </a:lnTo>
+                  <a:lnTo>
+                    <a:pt x="1329390" y="471161"/>
+                  </a:lnTo>
+                  <a:lnTo>
+                    <a:pt x="1376868" y="467983"/>
+                  </a:lnTo>
+                  <a:lnTo>
+                    <a:pt x="1424347" y="464011"/>
+                  </a:lnTo>
+                  <a:lnTo>
+                    <a:pt x="1471825" y="459219"/>
+                  </a:lnTo>
+                  <a:lnTo>
+                    <a:pt x="1519303" y="453589"/>
+                  </a:lnTo>
+                  <a:lnTo>
+                    <a:pt x="1566781" y="447106"/>
+                  </a:lnTo>
+                  <a:lnTo>
+                    <a:pt x="1614260" y="439757"/>
+                  </a:lnTo>
+                  <a:lnTo>
+                    <a:pt x="1661738" y="431538"/>
+                  </a:lnTo>
+                  <a:lnTo>
+                    <a:pt x="1709216" y="422445"/>
+                  </a:lnTo>
+                  <a:lnTo>
+                    <a:pt x="1756694" y="412481"/>
+                  </a:lnTo>
+                  <a:lnTo>
+                    <a:pt x="1804173" y="401652"/>
+                  </a:lnTo>
+                  <a:lnTo>
+                    <a:pt x="1851651" y="389967"/>
+                  </a:lnTo>
+                  <a:lnTo>
+                    <a:pt x="1899129" y="377439"/>
+                  </a:lnTo>
+                  <a:lnTo>
+                    <a:pt x="1946607" y="364083"/>
+                  </a:lnTo>
+                  <a:lnTo>
+                    <a:pt x="1994085" y="349914"/>
+                  </a:lnTo>
+                  <a:lnTo>
+                    <a:pt x="2041564" y="334950"/>
+                  </a:lnTo>
+                  <a:lnTo>
+                    <a:pt x="2089042" y="319208"/>
+                  </a:lnTo>
+                  <a:lnTo>
+                    <a:pt x="2136520" y="302706"/>
+                  </a:lnTo>
+                  <a:lnTo>
+                    <a:pt x="2183998" y="285461"/>
+                  </a:lnTo>
+                  <a:lnTo>
+                    <a:pt x="2231477" y="267491"/>
+                  </a:lnTo>
+                  <a:lnTo>
+                    <a:pt x="2278955" y="248812"/>
+                  </a:lnTo>
+                  <a:lnTo>
+                    <a:pt x="2326433" y="229439"/>
+                  </a:lnTo>
+                  <a:lnTo>
+                    <a:pt x="2373911" y="209385"/>
+                  </a:lnTo>
+                  <a:lnTo>
+                    <a:pt x="2421390" y="188664"/>
+                  </a:lnTo>
+                  <a:lnTo>
+                    <a:pt x="2468868" y="167287"/>
+                  </a:lnTo>
+                  <a:lnTo>
+                    <a:pt x="2516346" y="145264"/>
+                  </a:lnTo>
+                  <a:lnTo>
+                    <a:pt x="2563824" y="122605"/>
+                  </a:lnTo>
+                  <a:lnTo>
+                    <a:pt x="2611303" y="99318"/>
+                  </a:lnTo>
+                  <a:lnTo>
+                    <a:pt x="2658781" y="75408"/>
+                  </a:lnTo>
+                  <a:lnTo>
+                    <a:pt x="2706259" y="50883"/>
+                  </a:lnTo>
+                  <a:lnTo>
+                    <a:pt x="2753737" y="25745"/>
                   </a:lnTo>
                   <a:lnTo>
                     <a:pt x="2801215" y="0"/>
                   </a:lnTo>
                   <a:lnTo>
-                    <a:pt x="2801215" y="1012688"/>
-                  </a:lnTo>
-                  <a:lnTo>
-                    <a:pt x="2753737" y="1009750"/>
-                  </a:lnTo>
-                  <a:lnTo>
-                    <a:pt x="2706259" y="1006921"/>
-                  </a:lnTo>
-                  <a:lnTo>
-                    <a:pt x="2658781" y="1004212"/>
-                  </a:lnTo>
-                  <a:lnTo>
-                    <a:pt x="2611303" y="1001635"/>
-                  </a:lnTo>
-                  <a:lnTo>
-                    <a:pt x="2563824" y="999201"/>
-                  </a:lnTo>
-                  <a:lnTo>
-                    <a:pt x="2516346" y="996923"/>
-                  </a:lnTo>
-                  <a:lnTo>
-                    <a:pt x="2468868" y="994815"/>
-                  </a:lnTo>
-                  <a:lnTo>
-                    <a:pt x="2421390" y="992893"/>
-                  </a:lnTo>
-                  <a:lnTo>
-                    <a:pt x="2373911" y="991171"/>
-                  </a:lnTo>
-                  <a:lnTo>
-                    <a:pt x="2326433" y="989667"/>
-                  </a:lnTo>
-                  <a:lnTo>
-                    <a:pt x="2278955" y="988398"/>
-                  </a:lnTo>
-                  <a:lnTo>
-                    <a:pt x="2231477" y="987385"/>
-                  </a:lnTo>
-                  <a:lnTo>
-                    <a:pt x="2183998" y="986645"/>
-                  </a:lnTo>
-                  <a:lnTo>
-                    <a:pt x="2136520" y="986201"/>
-                  </a:lnTo>
-                  <a:lnTo>
-                    <a:pt x="2089042" y="986073"/>
-                  </a:lnTo>
-                  <a:lnTo>
-                    <a:pt x="2041564" y="986282"/>
-                  </a:lnTo>
-                  <a:lnTo>
-                    <a:pt x="1994085" y="986850"/>
-                  </a:lnTo>
-                  <a:lnTo>
-                    <a:pt x="1946607" y="987797"/>
-                  </a:lnTo>
-                  <a:lnTo>
-                    <a:pt x="1899129" y="989145"/>
-                  </a:lnTo>
-                  <a:lnTo>
-                    <a:pt x="1851651" y="990911"/>
-                  </a:lnTo>
-                  <a:lnTo>
-                    <a:pt x="1804173" y="993114"/>
-                  </a:lnTo>
-                  <a:lnTo>
-                    <a:pt x="1756694" y="995767"/>
-                  </a:lnTo>
-                  <a:lnTo>
-                    <a:pt x="1709216" y="998882"/>
-                  </a:lnTo>
-                  <a:lnTo>
-                    <a:pt x="1661738" y="1002468"/>
-                  </a:lnTo>
-                  <a:lnTo>
-                    <a:pt x="1614260" y="1006528"/>
-                  </a:lnTo>
-                  <a:lnTo>
-                    <a:pt x="1566781" y="1011064"/>
-                  </a:lnTo>
-                  <a:lnTo>
-                    <a:pt x="1519303" y="1016069"/>
-                  </a:lnTo>
-                  <a:lnTo>
-                    <a:pt x="1471825" y="1021537"/>
-                  </a:lnTo>
-                  <a:lnTo>
-                    <a:pt x="1424347" y="1027453"/>
-                  </a:lnTo>
-                  <a:lnTo>
-                    <a:pt x="1376868" y="1033800"/>
-                  </a:lnTo>
-                  <a:lnTo>
-                    <a:pt x="1329390" y="1040559"/>
-                  </a:lnTo>
-                  <a:lnTo>
-                    <a:pt x="1281912" y="1047704"/>
-                  </a:lnTo>
-                  <a:lnTo>
-                    <a:pt x="1234434" y="1055210"/>
-                  </a:lnTo>
-                  <a:lnTo>
-                    <a:pt x="1186955" y="1063050"/>
-                  </a:lnTo>
-                  <a:lnTo>
-                    <a:pt x="1139477" y="1071194"/>
-                  </a:lnTo>
-                  <a:lnTo>
-                    <a:pt x="1091999" y="1079612"/>
-                  </a:lnTo>
-                  <a:lnTo>
-                    <a:pt x="1044521" y="1088275"/>
-                  </a:lnTo>
-                  <a:lnTo>
-                    <a:pt x="997042" y="1097153"/>
-                  </a:lnTo>
-                  <a:lnTo>
-                    <a:pt x="949564" y="1106220"/>
-                  </a:lnTo>
-                  <a:lnTo>
-                    <a:pt x="902086" y="1115446"/>
-                  </a:lnTo>
-                  <a:lnTo>
-                    <a:pt x="854608" y="1124807"/>
-                  </a:lnTo>
-                  <a:lnTo>
-                    <a:pt x="807130" y="1134278"/>
-                  </a:lnTo>
-                  <a:lnTo>
-                    <a:pt x="759651" y="1143837"/>
-                  </a:lnTo>
-                  <a:lnTo>
-                    <a:pt x="712173" y="1153462"/>
-                  </a:lnTo>
-                  <a:lnTo>
-                    <a:pt x="664695" y="1163134"/>
-                  </a:lnTo>
-                  <a:lnTo>
-                    <a:pt x="617217" y="1172835"/>
-                  </a:lnTo>
-                  <a:lnTo>
-                    <a:pt x="569738" y="1182550"/>
-                  </a:lnTo>
-                  <a:lnTo>
-                    <a:pt x="522260" y="1192262"/>
-                  </a:lnTo>
-                  <a:lnTo>
-                    <a:pt x="474782" y="1201960"/>
-                  </a:lnTo>
-                  <a:lnTo>
-                    <a:pt x="427304" y="1211630"/>
-                  </a:lnTo>
-                  <a:lnTo>
-                    <a:pt x="379825" y="1221262"/>
-                  </a:lnTo>
-                  <a:lnTo>
-                    <a:pt x="332347" y="1230846"/>
-                  </a:lnTo>
-                  <a:lnTo>
-                    <a:pt x="284869" y="1240374"/>
-                  </a:lnTo>
-                  <a:lnTo>
-                    <a:pt x="237391" y="1249838"/>
-                  </a:lnTo>
-                  <a:lnTo>
-                    <a:pt x="189912" y="1259230"/>
-                  </a:lnTo>
-                  <a:lnTo>
-                    <a:pt x="142434" y="1268546"/>
-                  </a:lnTo>
-                  <a:lnTo>
-                    <a:pt x="94956" y="1277779"/>
-                  </a:lnTo>
-                  <a:lnTo>
-                    <a:pt x="47478" y="1286926"/>
-                  </a:lnTo>
-                  <a:lnTo>
-                    <a:pt x="0" y="1295981"/>
+                    <a:pt x="2801215" y="1017813"/>
+                  </a:lnTo>
+                  <a:lnTo>
+                    <a:pt x="2753737" y="1013719"/>
+                  </a:lnTo>
+                  <a:lnTo>
+                    <a:pt x="2706259" y="1009723"/>
+                  </a:lnTo>
+                  <a:lnTo>
+                    <a:pt x="2658781" y="1005837"/>
+                  </a:lnTo>
+                  <a:lnTo>
+                    <a:pt x="2611303" y="1002071"/>
+                  </a:lnTo>
+                  <a:lnTo>
+                    <a:pt x="2563824" y="998439"/>
+                  </a:lnTo>
+                  <a:lnTo>
+                    <a:pt x="2516346" y="994953"/>
+                  </a:lnTo>
+                  <a:lnTo>
+                    <a:pt x="2468868" y="991628"/>
+                  </a:lnTo>
+                  <a:lnTo>
+                    <a:pt x="2421390" y="988480"/>
+                  </a:lnTo>
+                  <a:lnTo>
+                    <a:pt x="2373911" y="985525"/>
+                  </a:lnTo>
+                  <a:lnTo>
+                    <a:pt x="2326433" y="982781"/>
+                  </a:lnTo>
+                  <a:lnTo>
+                    <a:pt x="2278955" y="980267"/>
+                  </a:lnTo>
+                  <a:lnTo>
+                    <a:pt x="2231477" y="978003"/>
+                  </a:lnTo>
+                  <a:lnTo>
+                    <a:pt x="2183998" y="976010"/>
+                  </a:lnTo>
+                  <a:lnTo>
+                    <a:pt x="2136520" y="974310"/>
+                  </a:lnTo>
+                  <a:lnTo>
+                    <a:pt x="2089042" y="972925"/>
+                  </a:lnTo>
+                  <a:lnTo>
+                    <a:pt x="2041564" y="971880"/>
+                  </a:lnTo>
+                  <a:lnTo>
+                    <a:pt x="1994085" y="971196"/>
+                  </a:lnTo>
+                  <a:lnTo>
+                    <a:pt x="1946607" y="970898"/>
+                  </a:lnTo>
+                  <a:lnTo>
+                    <a:pt x="1899129" y="971007"/>
+                  </a:lnTo>
+                  <a:lnTo>
+                    <a:pt x="1851651" y="971545"/>
+                  </a:lnTo>
+                  <a:lnTo>
+                    <a:pt x="1804173" y="972531"/>
+                  </a:lnTo>
+                  <a:lnTo>
+                    <a:pt x="1756694" y="973984"/>
+                  </a:lnTo>
+                  <a:lnTo>
+                    <a:pt x="1709216" y="975917"/>
+                  </a:lnTo>
+                  <a:lnTo>
+                    <a:pt x="1661738" y="978341"/>
+                  </a:lnTo>
+                  <a:lnTo>
+                    <a:pt x="1614260" y="981263"/>
+                  </a:lnTo>
+                  <a:lnTo>
+                    <a:pt x="1566781" y="984687"/>
+                  </a:lnTo>
+                  <a:lnTo>
+                    <a:pt x="1519303" y="988609"/>
+                  </a:lnTo>
+                  <a:lnTo>
+                    <a:pt x="1471825" y="993024"/>
+                  </a:lnTo>
+                  <a:lnTo>
+                    <a:pt x="1424347" y="997921"/>
+                  </a:lnTo>
+                  <a:lnTo>
+                    <a:pt x="1376868" y="1003284"/>
+                  </a:lnTo>
+                  <a:lnTo>
+                    <a:pt x="1329390" y="1009094"/>
+                  </a:lnTo>
+                  <a:lnTo>
+                    <a:pt x="1281912" y="1015328"/>
+                  </a:lnTo>
+                  <a:lnTo>
+                    <a:pt x="1234434" y="1021961"/>
+                  </a:lnTo>
+                  <a:lnTo>
+                    <a:pt x="1186955" y="1028966"/>
+                  </a:lnTo>
+                  <a:lnTo>
+                    <a:pt x="1139477" y="1036313"/>
+                  </a:lnTo>
+                  <a:lnTo>
+                    <a:pt x="1091999" y="1043972"/>
+                  </a:lnTo>
+                  <a:lnTo>
+                    <a:pt x="1044521" y="1051915"/>
+                  </a:lnTo>
+                  <a:lnTo>
+                    <a:pt x="997042" y="1060111"/>
+                  </a:lnTo>
+                  <a:lnTo>
+                    <a:pt x="949564" y="1068530"/>
+                  </a:lnTo>
+                  <a:lnTo>
+                    <a:pt x="902086" y="1077146"/>
+                  </a:lnTo>
+                  <a:lnTo>
+                    <a:pt x="854608" y="1085931"/>
+                  </a:lnTo>
+                  <a:lnTo>
+                    <a:pt x="807130" y="1094859"/>
+                  </a:lnTo>
+                  <a:lnTo>
+                    <a:pt x="759651" y="1103908"/>
+                  </a:lnTo>
+                  <a:lnTo>
+                    <a:pt x="712173" y="1113055"/>
+                  </a:lnTo>
+                  <a:lnTo>
+                    <a:pt x="664695" y="1122279"/>
+                  </a:lnTo>
+                  <a:lnTo>
+                    <a:pt x="617217" y="1131562"/>
+                  </a:lnTo>
+                  <a:lnTo>
+                    <a:pt x="569738" y="1140886"/>
+                  </a:lnTo>
+                  <a:lnTo>
+                    <a:pt x="522260" y="1150235"/>
+                  </a:lnTo>
+                  <a:lnTo>
+                    <a:pt x="474782" y="1159596"/>
+                  </a:lnTo>
+                  <a:lnTo>
+                    <a:pt x="427304" y="1168954"/>
+                  </a:lnTo>
+                  <a:lnTo>
+                    <a:pt x="379825" y="1178299"/>
+                  </a:lnTo>
+                  <a:lnTo>
+                    <a:pt x="332347" y="1187619"/>
+                  </a:lnTo>
+                  <a:lnTo>
+                    <a:pt x="284869" y="1196905"/>
+                  </a:lnTo>
+                  <a:lnTo>
+                    <a:pt x="237391" y="1206148"/>
+                  </a:lnTo>
+                  <a:lnTo>
+                    <a:pt x="189912" y="1215341"/>
+                  </a:lnTo>
+                  <a:lnTo>
+                    <a:pt x="142434" y="1224477"/>
+                  </a:lnTo>
+                  <a:lnTo>
+                    <a:pt x="94956" y="1233549"/>
+                  </a:lnTo>
+                  <a:lnTo>
+                    <a:pt x="47478" y="1242553"/>
+                  </a:lnTo>
+                  <a:lnTo>
+                    <a:pt x="0" y="1251484"/>
                   </a:lnTo>
                   <a:close/>
                 </a:path>
@@ -7335,188 +7335,188 @@
           <p:spPr>
             <a:xfrm>
               <a:off x="5300393" y="769664"/>
-              <a:ext cx="2801215" cy="537437"/>
+              <a:ext cx="2801215" cy="476493"/>
             </a:xfrm>
             <a:custGeom>
               <a:avLst/>
               <a:pathLst>
-                <a:path w="2801215" h="537437">
+                <a:path w="2801215" h="476493">
                   <a:moveTo>
-                    <a:pt x="0" y="463299"/>
+                    <a:pt x="0" y="354093"/>
                   </a:moveTo>
                   <a:lnTo>
-                    <a:pt x="47478" y="469054"/>
-                  </a:lnTo>
-                  <a:lnTo>
-                    <a:pt x="94956" y="474658"/>
-                  </a:lnTo>
-                  <a:lnTo>
-                    <a:pt x="142434" y="480104"/>
-                  </a:lnTo>
-                  <a:lnTo>
-                    <a:pt x="189912" y="485385"/>
-                  </a:lnTo>
-                  <a:lnTo>
-                    <a:pt x="237391" y="490491"/>
-                  </a:lnTo>
-                  <a:lnTo>
-                    <a:pt x="284869" y="495413"/>
-                  </a:lnTo>
-                  <a:lnTo>
-                    <a:pt x="332347" y="500142"/>
-                  </a:lnTo>
-                  <a:lnTo>
-                    <a:pt x="379825" y="504665"/>
-                  </a:lnTo>
-                  <a:lnTo>
-                    <a:pt x="427304" y="508971"/>
-                  </a:lnTo>
-                  <a:lnTo>
-                    <a:pt x="474782" y="513046"/>
-                  </a:lnTo>
-                  <a:lnTo>
-                    <a:pt x="522260" y="516875"/>
-                  </a:lnTo>
-                  <a:lnTo>
-                    <a:pt x="569738" y="520443"/>
-                  </a:lnTo>
-                  <a:lnTo>
-                    <a:pt x="617217" y="523733"/>
-                  </a:lnTo>
-                  <a:lnTo>
-                    <a:pt x="664695" y="526725"/>
-                  </a:lnTo>
-                  <a:lnTo>
-                    <a:pt x="712173" y="529400"/>
-                  </a:lnTo>
-                  <a:lnTo>
-                    <a:pt x="759651" y="531736"/>
-                  </a:lnTo>
-                  <a:lnTo>
-                    <a:pt x="807130" y="533708"/>
-                  </a:lnTo>
-                  <a:lnTo>
-                    <a:pt x="854608" y="535293"/>
-                  </a:lnTo>
-                  <a:lnTo>
-                    <a:pt x="902086" y="536462"/>
-                  </a:lnTo>
-                  <a:lnTo>
-                    <a:pt x="949564" y="537187"/>
-                  </a:lnTo>
-                  <a:lnTo>
-                    <a:pt x="997042" y="537437"/>
-                  </a:lnTo>
-                  <a:lnTo>
-                    <a:pt x="1044521" y="537182"/>
-                  </a:lnTo>
-                  <a:lnTo>
-                    <a:pt x="1091999" y="536387"/>
-                  </a:lnTo>
-                  <a:lnTo>
-                    <a:pt x="1139477" y="535020"/>
-                  </a:lnTo>
-                  <a:lnTo>
-                    <a:pt x="1186955" y="533045"/>
-                  </a:lnTo>
-                  <a:lnTo>
-                    <a:pt x="1234434" y="530429"/>
-                  </a:lnTo>
-                  <a:lnTo>
-                    <a:pt x="1281912" y="527136"/>
-                  </a:lnTo>
-                  <a:lnTo>
-                    <a:pt x="1329390" y="523134"/>
-                  </a:lnTo>
-                  <a:lnTo>
-                    <a:pt x="1376868" y="518393"/>
-                  </a:lnTo>
-                  <a:lnTo>
-                    <a:pt x="1424347" y="512881"/>
-                  </a:lnTo>
-                  <a:lnTo>
-                    <a:pt x="1471825" y="506575"/>
-                  </a:lnTo>
-                  <a:lnTo>
-                    <a:pt x="1519303" y="499450"/>
-                  </a:lnTo>
-                  <a:lnTo>
-                    <a:pt x="1566781" y="491489"/>
-                  </a:lnTo>
-                  <a:lnTo>
-                    <a:pt x="1614260" y="482676"/>
-                  </a:lnTo>
-                  <a:lnTo>
-                    <a:pt x="1661738" y="473002"/>
-                  </a:lnTo>
-                  <a:lnTo>
-                    <a:pt x="1709216" y="462461"/>
-                  </a:lnTo>
-                  <a:lnTo>
-                    <a:pt x="1756694" y="451051"/>
-                  </a:lnTo>
-                  <a:lnTo>
-                    <a:pt x="1804173" y="438773"/>
-                  </a:lnTo>
-                  <a:lnTo>
-                    <a:pt x="1851651" y="425635"/>
-                  </a:lnTo>
-                  <a:lnTo>
-                    <a:pt x="1899129" y="411643"/>
-                  </a:lnTo>
-                  <a:lnTo>
-                    <a:pt x="1946607" y="396808"/>
-                  </a:lnTo>
-                  <a:lnTo>
-                    <a:pt x="1994085" y="381143"/>
-                  </a:lnTo>
-                  <a:lnTo>
-                    <a:pt x="2041564" y="364660"/>
-                  </a:lnTo>
-                  <a:lnTo>
-                    <a:pt x="2089042" y="347375"/>
-                  </a:lnTo>
-                  <a:lnTo>
-                    <a:pt x="2136520" y="329302"/>
-                  </a:lnTo>
-                  <a:lnTo>
-                    <a:pt x="2183998" y="310454"/>
-                  </a:lnTo>
-                  <a:lnTo>
-                    <a:pt x="2231477" y="290846"/>
-                  </a:lnTo>
-                  <a:lnTo>
-                    <a:pt x="2278955" y="270491"/>
-                  </a:lnTo>
-                  <a:lnTo>
-                    <a:pt x="2326433" y="249401"/>
-                  </a:lnTo>
-                  <a:lnTo>
-                    <a:pt x="2373911" y="227588"/>
-                  </a:lnTo>
-                  <a:lnTo>
-                    <a:pt x="2421390" y="205061"/>
-                  </a:lnTo>
-                  <a:lnTo>
-                    <a:pt x="2468868" y="181829"/>
-                  </a:lnTo>
-                  <a:lnTo>
-                    <a:pt x="2516346" y="157901"/>
-                  </a:lnTo>
-                  <a:lnTo>
-                    <a:pt x="2563824" y="133283"/>
-                  </a:lnTo>
-                  <a:lnTo>
-                    <a:pt x="2611303" y="107981"/>
-                  </a:lnTo>
-                  <a:lnTo>
-                    <a:pt x="2658781" y="81999"/>
-                  </a:lnTo>
-                  <a:lnTo>
-                    <a:pt x="2706259" y="55340"/>
-                  </a:lnTo>
-                  <a:lnTo>
-                    <a:pt x="2753737" y="28006"/>
+                    <a:pt x="47478" y="362343"/>
+                  </a:lnTo>
+                  <a:lnTo>
+                    <a:pt x="94956" y="370409"/>
+                  </a:lnTo>
+                  <a:lnTo>
+                    <a:pt x="142434" y="378285"/>
+                  </a:lnTo>
+                  <a:lnTo>
+                    <a:pt x="189912" y="385962"/>
+                  </a:lnTo>
+                  <a:lnTo>
+                    <a:pt x="237391" y="393433"/>
+                  </a:lnTo>
+                  <a:lnTo>
+                    <a:pt x="284869" y="400686"/>
+                  </a:lnTo>
+                  <a:lnTo>
+                    <a:pt x="332347" y="407713"/>
+                  </a:lnTo>
+                  <a:lnTo>
+                    <a:pt x="379825" y="414501"/>
+                  </a:lnTo>
+                  <a:lnTo>
+                    <a:pt x="427304" y="421039"/>
+                  </a:lnTo>
+                  <a:lnTo>
+                    <a:pt x="474782" y="427312"/>
+                  </a:lnTo>
+                  <a:lnTo>
+                    <a:pt x="522260" y="433307"/>
+                  </a:lnTo>
+                  <a:lnTo>
+                    <a:pt x="569738" y="439007"/>
+                  </a:lnTo>
+                  <a:lnTo>
+                    <a:pt x="617217" y="444395"/>
+                  </a:lnTo>
+                  <a:lnTo>
+                    <a:pt x="664695" y="449451"/>
+                  </a:lnTo>
+                  <a:lnTo>
+                    <a:pt x="712173" y="454157"/>
+                  </a:lnTo>
+                  <a:lnTo>
+                    <a:pt x="759651" y="458488"/>
+                  </a:lnTo>
+                  <a:lnTo>
+                    <a:pt x="807130" y="462422"/>
+                  </a:lnTo>
+                  <a:lnTo>
+                    <a:pt x="854608" y="465933"/>
+                  </a:lnTo>
+                  <a:lnTo>
+                    <a:pt x="902086" y="468994"/>
+                  </a:lnTo>
+                  <a:lnTo>
+                    <a:pt x="949564" y="471577"/>
+                  </a:lnTo>
+                  <a:lnTo>
+                    <a:pt x="997042" y="473650"/>
+                  </a:lnTo>
+                  <a:lnTo>
+                    <a:pt x="1044521" y="475182"/>
+                  </a:lnTo>
+                  <a:lnTo>
+                    <a:pt x="1091999" y="476141"/>
+                  </a:lnTo>
+                  <a:lnTo>
+                    <a:pt x="1139477" y="476493"/>
+                  </a:lnTo>
+                  <a:lnTo>
+                    <a:pt x="1186955" y="476204"/>
+                  </a:lnTo>
+                  <a:lnTo>
+                    <a:pt x="1234434" y="475241"/>
+                  </a:lnTo>
+                  <a:lnTo>
+                    <a:pt x="1281912" y="473570"/>
+                  </a:lnTo>
+                  <a:lnTo>
+                    <a:pt x="1329390" y="471161"/>
+                  </a:lnTo>
+                  <a:lnTo>
+                    <a:pt x="1376868" y="467983"/>
+                  </a:lnTo>
+                  <a:lnTo>
+                    <a:pt x="1424347" y="464011"/>
+                  </a:lnTo>
+                  <a:lnTo>
+                    <a:pt x="1471825" y="459219"/>
+                  </a:lnTo>
+                  <a:lnTo>
+                    <a:pt x="1519303" y="453589"/>
+                  </a:lnTo>
+                  <a:lnTo>
+                    <a:pt x="1566781" y="447106"/>
+                  </a:lnTo>
+                  <a:lnTo>
+                    <a:pt x="1614260" y="439757"/>
+                  </a:lnTo>
+                  <a:lnTo>
+                    <a:pt x="1661738" y="431538"/>
+                  </a:lnTo>
+                  <a:lnTo>
+                    <a:pt x="1709216" y="422445"/>
+                  </a:lnTo>
+                  <a:lnTo>
+                    <a:pt x="1756694" y="412481"/>
+                  </a:lnTo>
+                  <a:lnTo>
+                    <a:pt x="1804173" y="401652"/>
+                  </a:lnTo>
+                  <a:lnTo>
+                    <a:pt x="1851651" y="389967"/>
+                  </a:lnTo>
+                  <a:lnTo>
+                    <a:pt x="1899129" y="377439"/>
+                  </a:lnTo>
+                  <a:lnTo>
+                    <a:pt x="1946607" y="364083"/>
+                  </a:lnTo>
+                  <a:lnTo>
+                    <a:pt x="1994085" y="349914"/>
+                  </a:lnTo>
+                  <a:lnTo>
+                    <a:pt x="2041564" y="334950"/>
+                  </a:lnTo>
+                  <a:lnTo>
+                    <a:pt x="2089042" y="319208"/>
+                  </a:lnTo>
+                  <a:lnTo>
+                    <a:pt x="2136520" y="302706"/>
+                  </a:lnTo>
+                  <a:lnTo>
+                    <a:pt x="2183998" y="285461"/>
+                  </a:lnTo>
+                  <a:lnTo>
+                    <a:pt x="2231477" y="267491"/>
+                  </a:lnTo>
+                  <a:lnTo>
+                    <a:pt x="2278955" y="248812"/>
+                  </a:lnTo>
+                  <a:lnTo>
+                    <a:pt x="2326433" y="229439"/>
+                  </a:lnTo>
+                  <a:lnTo>
+                    <a:pt x="2373911" y="209385"/>
+                  </a:lnTo>
+                  <a:lnTo>
+                    <a:pt x="2421390" y="188664"/>
+                  </a:lnTo>
+                  <a:lnTo>
+                    <a:pt x="2468868" y="167287"/>
+                  </a:lnTo>
+                  <a:lnTo>
+                    <a:pt x="2516346" y="145264"/>
+                  </a:lnTo>
+                  <a:lnTo>
+                    <a:pt x="2563824" y="122605"/>
+                  </a:lnTo>
+                  <a:lnTo>
+                    <a:pt x="2611303" y="99318"/>
+                  </a:lnTo>
+                  <a:lnTo>
+                    <a:pt x="2658781" y="75408"/>
+                  </a:lnTo>
+                  <a:lnTo>
+                    <a:pt x="2706259" y="50883"/>
+                  </a:lnTo>
+                  <a:lnTo>
+                    <a:pt x="2753737" y="25745"/>
                   </a:lnTo>
                   <a:lnTo>
                     <a:pt x="2801215" y="0"/>
@@ -7539,192 +7539,192 @@
           </p:nvSpPr>
           <p:spPr>
             <a:xfrm>
-              <a:off x="5300393" y="1755737"/>
-              <a:ext cx="2801215" cy="309908"/>
+              <a:off x="5300393" y="1740562"/>
+              <a:ext cx="2801215" cy="280586"/>
             </a:xfrm>
             <a:custGeom>
               <a:avLst/>
               <a:pathLst>
-                <a:path w="2801215" h="309908">
+                <a:path w="2801215" h="280586">
                   <a:moveTo>
-                    <a:pt x="2801215" y="26615"/>
+                    <a:pt x="2801215" y="46915"/>
                   </a:moveTo>
                   <a:lnTo>
-                    <a:pt x="2753737" y="23676"/>
-                  </a:lnTo>
-                  <a:lnTo>
-                    <a:pt x="2706259" y="20847"/>
-                  </a:lnTo>
-                  <a:lnTo>
-                    <a:pt x="2658781" y="18139"/>
-                  </a:lnTo>
-                  <a:lnTo>
-                    <a:pt x="2611303" y="15562"/>
-                  </a:lnTo>
-                  <a:lnTo>
-                    <a:pt x="2563824" y="13128"/>
-                  </a:lnTo>
-                  <a:lnTo>
-                    <a:pt x="2516346" y="10850"/>
-                  </a:lnTo>
-                  <a:lnTo>
-                    <a:pt x="2468868" y="8742"/>
-                  </a:lnTo>
-                  <a:lnTo>
-                    <a:pt x="2421390" y="6820"/>
-                  </a:lnTo>
-                  <a:lnTo>
-                    <a:pt x="2373911" y="5098"/>
-                  </a:lnTo>
-                  <a:lnTo>
-                    <a:pt x="2326433" y="3594"/>
-                  </a:lnTo>
-                  <a:lnTo>
-                    <a:pt x="2278955" y="2325"/>
-                  </a:lnTo>
-                  <a:lnTo>
-                    <a:pt x="2231477" y="1311"/>
-                  </a:lnTo>
-                  <a:lnTo>
-                    <a:pt x="2183998" y="572"/>
-                  </a:lnTo>
-                  <a:lnTo>
-                    <a:pt x="2136520" y="128"/>
-                  </a:lnTo>
-                  <a:lnTo>
-                    <a:pt x="2089042" y="0"/>
-                  </a:lnTo>
-                  <a:lnTo>
-                    <a:pt x="2041564" y="209"/>
-                  </a:lnTo>
-                  <a:lnTo>
-                    <a:pt x="1994085" y="776"/>
-                  </a:lnTo>
-                  <a:lnTo>
-                    <a:pt x="1946607" y="1724"/>
-                  </a:lnTo>
-                  <a:lnTo>
-                    <a:pt x="1899129" y="3072"/>
-                  </a:lnTo>
-                  <a:lnTo>
-                    <a:pt x="1851651" y="4838"/>
-                  </a:lnTo>
-                  <a:lnTo>
-                    <a:pt x="1804173" y="7041"/>
-                  </a:lnTo>
-                  <a:lnTo>
-                    <a:pt x="1756694" y="9694"/>
-                  </a:lnTo>
-                  <a:lnTo>
-                    <a:pt x="1709216" y="12809"/>
-                  </a:lnTo>
-                  <a:lnTo>
-                    <a:pt x="1661738" y="16395"/>
-                  </a:lnTo>
-                  <a:lnTo>
-                    <a:pt x="1614260" y="20455"/>
-                  </a:lnTo>
-                  <a:lnTo>
-                    <a:pt x="1566781" y="24990"/>
-                  </a:lnTo>
-                  <a:lnTo>
-                    <a:pt x="1519303" y="29996"/>
-                  </a:lnTo>
-                  <a:lnTo>
-                    <a:pt x="1471825" y="35464"/>
-                  </a:lnTo>
-                  <a:lnTo>
-                    <a:pt x="1424347" y="41380"/>
-                  </a:lnTo>
-                  <a:lnTo>
-                    <a:pt x="1376868" y="47727"/>
-                  </a:lnTo>
-                  <a:lnTo>
-                    <a:pt x="1329390" y="54485"/>
-                  </a:lnTo>
-                  <a:lnTo>
-                    <a:pt x="1281912" y="61631"/>
-                  </a:lnTo>
-                  <a:lnTo>
-                    <a:pt x="1234434" y="69137"/>
-                  </a:lnTo>
-                  <a:lnTo>
-                    <a:pt x="1186955" y="76977"/>
-                  </a:lnTo>
-                  <a:lnTo>
-                    <a:pt x="1139477" y="85120"/>
-                  </a:lnTo>
-                  <a:lnTo>
-                    <a:pt x="1091999" y="93538"/>
-                  </a:lnTo>
-                  <a:lnTo>
-                    <a:pt x="1044521" y="102201"/>
-                  </a:lnTo>
-                  <a:lnTo>
-                    <a:pt x="997042" y="111080"/>
-                  </a:lnTo>
-                  <a:lnTo>
-                    <a:pt x="949564" y="120146"/>
-                  </a:lnTo>
-                  <a:lnTo>
-                    <a:pt x="902086" y="129373"/>
-                  </a:lnTo>
-                  <a:lnTo>
-                    <a:pt x="854608" y="138734"/>
-                  </a:lnTo>
-                  <a:lnTo>
-                    <a:pt x="807130" y="148205"/>
-                  </a:lnTo>
-                  <a:lnTo>
-                    <a:pt x="759651" y="157764"/>
-                  </a:lnTo>
-                  <a:lnTo>
-                    <a:pt x="712173" y="167389"/>
-                  </a:lnTo>
-                  <a:lnTo>
-                    <a:pt x="664695" y="177061"/>
-                  </a:lnTo>
-                  <a:lnTo>
-                    <a:pt x="617217" y="186762"/>
-                  </a:lnTo>
-                  <a:lnTo>
-                    <a:pt x="569738" y="196477"/>
-                  </a:lnTo>
-                  <a:lnTo>
-                    <a:pt x="522260" y="206189"/>
-                  </a:lnTo>
-                  <a:lnTo>
-                    <a:pt x="474782" y="215886"/>
-                  </a:lnTo>
-                  <a:lnTo>
-                    <a:pt x="427304" y="225556"/>
-                  </a:lnTo>
-                  <a:lnTo>
-                    <a:pt x="379825" y="235189"/>
-                  </a:lnTo>
-                  <a:lnTo>
-                    <a:pt x="332347" y="244773"/>
-                  </a:lnTo>
-                  <a:lnTo>
-                    <a:pt x="284869" y="254301"/>
-                  </a:lnTo>
-                  <a:lnTo>
-                    <a:pt x="237391" y="263764"/>
-                  </a:lnTo>
-                  <a:lnTo>
-                    <a:pt x="189912" y="273157"/>
-                  </a:lnTo>
-                  <a:lnTo>
-                    <a:pt x="142434" y="282473"/>
-                  </a:lnTo>
-                  <a:lnTo>
-                    <a:pt x="94956" y="291706"/>
-                  </a:lnTo>
-                  <a:lnTo>
-                    <a:pt x="47478" y="300853"/>
-                  </a:lnTo>
-                  <a:lnTo>
-                    <a:pt x="0" y="309908"/>
+                    <a:pt x="2753737" y="42821"/>
+                  </a:lnTo>
+                  <a:lnTo>
+                    <a:pt x="2706259" y="38825"/>
+                  </a:lnTo>
+                  <a:lnTo>
+                    <a:pt x="2658781" y="34939"/>
+                  </a:lnTo>
+                  <a:lnTo>
+                    <a:pt x="2611303" y="31173"/>
+                  </a:lnTo>
+                  <a:lnTo>
+                    <a:pt x="2563824" y="27541"/>
+                  </a:lnTo>
+                  <a:lnTo>
+                    <a:pt x="2516346" y="24055"/>
+                  </a:lnTo>
+                  <a:lnTo>
+                    <a:pt x="2468868" y="20730"/>
+                  </a:lnTo>
+                  <a:lnTo>
+                    <a:pt x="2421390" y="17582"/>
+                  </a:lnTo>
+                  <a:lnTo>
+                    <a:pt x="2373911" y="14627"/>
+                  </a:lnTo>
+                  <a:lnTo>
+                    <a:pt x="2326433" y="11883"/>
+                  </a:lnTo>
+                  <a:lnTo>
+                    <a:pt x="2278955" y="9369"/>
+                  </a:lnTo>
+                  <a:lnTo>
+                    <a:pt x="2231477" y="7105"/>
+                  </a:lnTo>
+                  <a:lnTo>
+                    <a:pt x="2183998" y="5112"/>
+                  </a:lnTo>
+                  <a:lnTo>
+                    <a:pt x="2136520" y="3412"/>
+                  </a:lnTo>
+                  <a:lnTo>
+                    <a:pt x="2089042" y="2027"/>
+                  </a:lnTo>
+                  <a:lnTo>
+                    <a:pt x="2041564" y="982"/>
+                  </a:lnTo>
+                  <a:lnTo>
+                    <a:pt x="1994085" y="298"/>
+                  </a:lnTo>
+                  <a:lnTo>
+                    <a:pt x="1946607" y="0"/>
+                  </a:lnTo>
+                  <a:lnTo>
+                    <a:pt x="1899129" y="109"/>
+                  </a:lnTo>
+                  <a:lnTo>
+                    <a:pt x="1851651" y="647"/>
+                  </a:lnTo>
+                  <a:lnTo>
+                    <a:pt x="1804173" y="1633"/>
+                  </a:lnTo>
+                  <a:lnTo>
+                    <a:pt x="1756694" y="3086"/>
+                  </a:lnTo>
+                  <a:lnTo>
+                    <a:pt x="1709216" y="5019"/>
+                  </a:lnTo>
+                  <a:lnTo>
+                    <a:pt x="1661738" y="7443"/>
+                  </a:lnTo>
+                  <a:lnTo>
+                    <a:pt x="1614260" y="10365"/>
+                  </a:lnTo>
+                  <a:lnTo>
+                    <a:pt x="1566781" y="13789"/>
+                  </a:lnTo>
+                  <a:lnTo>
+                    <a:pt x="1519303" y="17711"/>
+                  </a:lnTo>
+                  <a:lnTo>
+                    <a:pt x="1471825" y="22126"/>
+                  </a:lnTo>
+                  <a:lnTo>
+                    <a:pt x="1424347" y="27023"/>
+                  </a:lnTo>
+                  <a:lnTo>
+                    <a:pt x="1376868" y="32386"/>
+                  </a:lnTo>
+                  <a:lnTo>
+                    <a:pt x="1329390" y="38196"/>
+                  </a:lnTo>
+                  <a:lnTo>
+                    <a:pt x="1281912" y="44430"/>
+                  </a:lnTo>
+                  <a:lnTo>
+                    <a:pt x="1234434" y="51063"/>
+                  </a:lnTo>
+                  <a:lnTo>
+                    <a:pt x="1186955" y="58068"/>
+                  </a:lnTo>
+                  <a:lnTo>
+                    <a:pt x="1139477" y="65415"/>
+                  </a:lnTo>
+                  <a:lnTo>
+                    <a:pt x="1091999" y="73074"/>
+                  </a:lnTo>
+                  <a:lnTo>
+                    <a:pt x="1044521" y="81017"/>
+                  </a:lnTo>
+                  <a:lnTo>
+                    <a:pt x="997042" y="89213"/>
+                  </a:lnTo>
+                  <a:lnTo>
+                    <a:pt x="949564" y="97632"/>
+                  </a:lnTo>
+                  <a:lnTo>
+                    <a:pt x="902086" y="106248"/>
+                  </a:lnTo>
+                  <a:lnTo>
+                    <a:pt x="854608" y="115033"/>
+                  </a:lnTo>
+                  <a:lnTo>
+                    <a:pt x="807130" y="123961"/>
+                  </a:lnTo>
+                  <a:lnTo>
+                    <a:pt x="759651" y="133010"/>
+                  </a:lnTo>
+                  <a:lnTo>
+                    <a:pt x="712173" y="142157"/>
+                  </a:lnTo>
+                  <a:lnTo>
+                    <a:pt x="664695" y="151381"/>
+                  </a:lnTo>
+                  <a:lnTo>
+                    <a:pt x="617217" y="160664"/>
+                  </a:lnTo>
+                  <a:lnTo>
+                    <a:pt x="569738" y="169988"/>
+                  </a:lnTo>
+                  <a:lnTo>
+                    <a:pt x="522260" y="179337"/>
+                  </a:lnTo>
+                  <a:lnTo>
+                    <a:pt x="474782" y="188698"/>
+                  </a:lnTo>
+                  <a:lnTo>
+                    <a:pt x="427304" y="198056"/>
+                  </a:lnTo>
+                  <a:lnTo>
+                    <a:pt x="379825" y="207401"/>
+                  </a:lnTo>
+                  <a:lnTo>
+                    <a:pt x="332347" y="216721"/>
+                  </a:lnTo>
+                  <a:lnTo>
+                    <a:pt x="284869" y="226007"/>
+                  </a:lnTo>
+                  <a:lnTo>
+                    <a:pt x="237391" y="235250"/>
+                  </a:lnTo>
+                  <a:lnTo>
+                    <a:pt x="189912" y="244443"/>
+                  </a:lnTo>
+                  <a:lnTo>
+                    <a:pt x="142434" y="253579"/>
+                  </a:lnTo>
+                  <a:lnTo>
+                    <a:pt x="94956" y="262651"/>
+                  </a:lnTo>
+                  <a:lnTo>
+                    <a:pt x="47478" y="271655"/>
+                  </a:lnTo>
+                  <a:lnTo>
+                    <a:pt x="0" y="280586"/>
                   </a:lnTo>
                 </a:path>
               </a:pathLst>
@@ -7744,189 +7744,189 @@
           </p:nvSpPr>
           <p:spPr>
             <a:xfrm>
-              <a:off x="5300393" y="1434922"/>
-              <a:ext cx="2801215" cy="1053890"/>
+              <a:off x="5300393" y="1420536"/>
+              <a:ext cx="2801215" cy="1071788"/>
             </a:xfrm>
             <a:custGeom>
               <a:avLst/>
               <a:pathLst>
-                <a:path w="2801215" h="1053890">
+                <a:path w="2801215" h="1071788">
                   <a:moveTo>
-                    <a:pt x="0" y="1053890"/>
+                    <a:pt x="0" y="1071788"/>
                   </a:moveTo>
                   <a:lnTo>
-                    <a:pt x="47478" y="1048638"/>
-                  </a:lnTo>
-                  <a:lnTo>
-                    <a:pt x="94956" y="1043194"/>
-                  </a:lnTo>
-                  <a:lnTo>
-                    <a:pt x="142434" y="1037550"/>
-                  </a:lnTo>
-                  <a:lnTo>
-                    <a:pt x="189912" y="1031699"/>
-                  </a:lnTo>
-                  <a:lnTo>
-                    <a:pt x="237391" y="1025634"/>
-                  </a:lnTo>
-                  <a:lnTo>
-                    <a:pt x="284869" y="1019346"/>
-                  </a:lnTo>
-                  <a:lnTo>
-                    <a:pt x="332347" y="1012829"/>
-                  </a:lnTo>
-                  <a:lnTo>
-                    <a:pt x="379825" y="1006072"/>
-                  </a:lnTo>
-                  <a:lnTo>
-                    <a:pt x="427304" y="999067"/>
-                  </a:lnTo>
-                  <a:lnTo>
-                    <a:pt x="474782" y="991806"/>
-                  </a:lnTo>
-                  <a:lnTo>
-                    <a:pt x="522260" y="984279"/>
-                  </a:lnTo>
-                  <a:lnTo>
-                    <a:pt x="569738" y="976476"/>
-                  </a:lnTo>
-                  <a:lnTo>
-                    <a:pt x="617217" y="968387"/>
-                  </a:lnTo>
-                  <a:lnTo>
-                    <a:pt x="664695" y="960002"/>
-                  </a:lnTo>
-                  <a:lnTo>
-                    <a:pt x="712173" y="951309"/>
-                  </a:lnTo>
-                  <a:lnTo>
-                    <a:pt x="759651" y="942298"/>
-                  </a:lnTo>
-                  <a:lnTo>
-                    <a:pt x="807130" y="932956"/>
-                  </a:lnTo>
-                  <a:lnTo>
-                    <a:pt x="854608" y="923273"/>
-                  </a:lnTo>
-                  <a:lnTo>
-                    <a:pt x="902086" y="913234"/>
-                  </a:lnTo>
-                  <a:lnTo>
-                    <a:pt x="949564" y="902828"/>
-                  </a:lnTo>
-                  <a:lnTo>
-                    <a:pt x="997042" y="892040"/>
-                  </a:lnTo>
-                  <a:lnTo>
-                    <a:pt x="1044521" y="880858"/>
-                  </a:lnTo>
-                  <a:lnTo>
-                    <a:pt x="1091999" y="869266"/>
-                  </a:lnTo>
-                  <a:lnTo>
-                    <a:pt x="1139477" y="857249"/>
-                  </a:lnTo>
-                  <a:lnTo>
-                    <a:pt x="1186955" y="844791"/>
-                  </a:lnTo>
-                  <a:lnTo>
-                    <a:pt x="1234434" y="831878"/>
-                  </a:lnTo>
-                  <a:lnTo>
-                    <a:pt x="1281912" y="818492"/>
-                  </a:lnTo>
-                  <a:lnTo>
-                    <a:pt x="1329390" y="804615"/>
-                  </a:lnTo>
-                  <a:lnTo>
-                    <a:pt x="1376868" y="790230"/>
-                  </a:lnTo>
-                  <a:lnTo>
-                    <a:pt x="1424347" y="775319"/>
-                  </a:lnTo>
-                  <a:lnTo>
-                    <a:pt x="1471825" y="759861"/>
-                  </a:lnTo>
-                  <a:lnTo>
-                    <a:pt x="1519303" y="743838"/>
-                  </a:lnTo>
-                  <a:lnTo>
-                    <a:pt x="1566781" y="727227"/>
-                  </a:lnTo>
-                  <a:lnTo>
-                    <a:pt x="1614260" y="710009"/>
-                  </a:lnTo>
-                  <a:lnTo>
-                    <a:pt x="1661738" y="692160"/>
-                  </a:lnTo>
-                  <a:lnTo>
-                    <a:pt x="1709216" y="673658"/>
-                  </a:lnTo>
-                  <a:lnTo>
-                    <a:pt x="1756694" y="654479"/>
-                  </a:lnTo>
-                  <a:lnTo>
-                    <a:pt x="1804173" y="634597"/>
-                  </a:lnTo>
-                  <a:lnTo>
-                    <a:pt x="1851651" y="613988"/>
-                  </a:lnTo>
-                  <a:lnTo>
-                    <a:pt x="1899129" y="592625"/>
-                  </a:lnTo>
-                  <a:lnTo>
-                    <a:pt x="1946607" y="570480"/>
-                  </a:lnTo>
-                  <a:lnTo>
-                    <a:pt x="1994085" y="547525"/>
-                  </a:lnTo>
-                  <a:lnTo>
-                    <a:pt x="2041564" y="523730"/>
-                  </a:lnTo>
-                  <a:lnTo>
-                    <a:pt x="2089042" y="499064"/>
-                  </a:lnTo>
-                  <a:lnTo>
-                    <a:pt x="2136520" y="473496"/>
-                  </a:lnTo>
-                  <a:lnTo>
-                    <a:pt x="2183998" y="446993"/>
-                  </a:lnTo>
-                  <a:lnTo>
-                    <a:pt x="2231477" y="419521"/>
-                  </a:lnTo>
-                  <a:lnTo>
-                    <a:pt x="2278955" y="391043"/>
-                  </a:lnTo>
-                  <a:lnTo>
-                    <a:pt x="2326433" y="361525"/>
-                  </a:lnTo>
-                  <a:lnTo>
-                    <a:pt x="2373911" y="330928"/>
-                  </a:lnTo>
-                  <a:lnTo>
-                    <a:pt x="2421390" y="299211"/>
-                  </a:lnTo>
-                  <a:lnTo>
-                    <a:pt x="2468868" y="266336"/>
-                  </a:lnTo>
-                  <a:lnTo>
-                    <a:pt x="2516346" y="232259"/>
-                  </a:lnTo>
-                  <a:lnTo>
-                    <a:pt x="2563824" y="196936"/>
-                  </a:lnTo>
-                  <a:lnTo>
-                    <a:pt x="2611303" y="160323"/>
-                  </a:lnTo>
-                  <a:lnTo>
-                    <a:pt x="2658781" y="122373"/>
-                  </a:lnTo>
-                  <a:lnTo>
-                    <a:pt x="2706259" y="83036"/>
-                  </a:lnTo>
-                  <a:lnTo>
-                    <a:pt x="2753737" y="42262"/>
+                    <a:pt x="47478" y="1066689"/>
+                  </a:lnTo>
+                  <a:lnTo>
+                    <a:pt x="94956" y="1061396"/>
+                  </a:lnTo>
+                  <a:lnTo>
+                    <a:pt x="142434" y="1055903"/>
+                  </a:lnTo>
+                  <a:lnTo>
+                    <a:pt x="189912" y="1050201"/>
+                  </a:lnTo>
+                  <a:lnTo>
+                    <a:pt x="237391" y="1044284"/>
+                  </a:lnTo>
+                  <a:lnTo>
+                    <a:pt x="284869" y="1038142"/>
+                  </a:lnTo>
+                  <a:lnTo>
+                    <a:pt x="332347" y="1031767"/>
+                  </a:lnTo>
+                  <a:lnTo>
+                    <a:pt x="379825" y="1025152"/>
+                  </a:lnTo>
+                  <a:lnTo>
+                    <a:pt x="427304" y="1018285"/>
+                  </a:lnTo>
+                  <a:lnTo>
+                    <a:pt x="474782" y="1011158"/>
+                  </a:lnTo>
+                  <a:lnTo>
+                    <a:pt x="522260" y="1003762"/>
+                  </a:lnTo>
+                  <a:lnTo>
+                    <a:pt x="569738" y="996085"/>
+                  </a:lnTo>
+                  <a:lnTo>
+                    <a:pt x="617217" y="988117"/>
+                  </a:lnTo>
+                  <a:lnTo>
+                    <a:pt x="664695" y="979848"/>
+                  </a:lnTo>
+                  <a:lnTo>
+                    <a:pt x="712173" y="971265"/>
+                  </a:lnTo>
+                  <a:lnTo>
+                    <a:pt x="759651" y="962357"/>
+                  </a:lnTo>
+                  <a:lnTo>
+                    <a:pt x="807130" y="953112"/>
+                  </a:lnTo>
+                  <a:lnTo>
+                    <a:pt x="854608" y="943517"/>
+                  </a:lnTo>
+                  <a:lnTo>
+                    <a:pt x="902086" y="933558"/>
+                  </a:lnTo>
+                  <a:lnTo>
+                    <a:pt x="949564" y="923222"/>
+                  </a:lnTo>
+                  <a:lnTo>
+                    <a:pt x="997042" y="912495"/>
+                  </a:lnTo>
+                  <a:lnTo>
+                    <a:pt x="1044521" y="901361"/>
+                  </a:lnTo>
+                  <a:lnTo>
+                    <a:pt x="1091999" y="889806"/>
+                  </a:lnTo>
+                  <a:lnTo>
+                    <a:pt x="1139477" y="877813"/>
+                  </a:lnTo>
+                  <a:lnTo>
+                    <a:pt x="1186955" y="865366"/>
+                  </a:lnTo>
+                  <a:lnTo>
+                    <a:pt x="1234434" y="852448"/>
+                  </a:lnTo>
+                  <a:lnTo>
+                    <a:pt x="1281912" y="839041"/>
+                  </a:lnTo>
+                  <a:lnTo>
+                    <a:pt x="1329390" y="825126"/>
+                  </a:lnTo>
+                  <a:lnTo>
+                    <a:pt x="1376868" y="810684"/>
+                  </a:lnTo>
+                  <a:lnTo>
+                    <a:pt x="1424347" y="795696"/>
+                  </a:lnTo>
+                  <a:lnTo>
+                    <a:pt x="1471825" y="780141"/>
+                  </a:lnTo>
+                  <a:lnTo>
+                    <a:pt x="1519303" y="763996"/>
+                  </a:lnTo>
+                  <a:lnTo>
+                    <a:pt x="1566781" y="747241"/>
+                  </a:lnTo>
+                  <a:lnTo>
+                    <a:pt x="1614260" y="729851"/>
+                  </a:lnTo>
+                  <a:lnTo>
+                    <a:pt x="1661738" y="711804"/>
+                  </a:lnTo>
+                  <a:lnTo>
+                    <a:pt x="1709216" y="693073"/>
+                  </a:lnTo>
+                  <a:lnTo>
+                    <a:pt x="1756694" y="673634"/>
+                  </a:lnTo>
+                  <a:lnTo>
+                    <a:pt x="1804173" y="653459"/>
+                  </a:lnTo>
+                  <a:lnTo>
+                    <a:pt x="1851651" y="632521"/>
+                  </a:lnTo>
+                  <a:lnTo>
+                    <a:pt x="1899129" y="610791"/>
+                  </a:lnTo>
+                  <a:lnTo>
+                    <a:pt x="1946607" y="588239"/>
+                  </a:lnTo>
+                  <a:lnTo>
+                    <a:pt x="1994085" y="564834"/>
+                  </a:lnTo>
+                  <a:lnTo>
+                    <a:pt x="2041564" y="540544"/>
+                  </a:lnTo>
+                  <a:lnTo>
+                    <a:pt x="2089042" y="515335"/>
+                  </a:lnTo>
+                  <a:lnTo>
+                    <a:pt x="2136520" y="489173"/>
+                  </a:lnTo>
+                  <a:lnTo>
+                    <a:pt x="2183998" y="462022"/>
+                  </a:lnTo>
+                  <a:lnTo>
+                    <a:pt x="2231477" y="433844"/>
+                  </a:lnTo>
+                  <a:lnTo>
+                    <a:pt x="2278955" y="404601"/>
+                  </a:lnTo>
+                  <a:lnTo>
+                    <a:pt x="2326433" y="374253"/>
+                  </a:lnTo>
+                  <a:lnTo>
+                    <a:pt x="2373911" y="342758"/>
+                  </a:lnTo>
+                  <a:lnTo>
+                    <a:pt x="2421390" y="310073"/>
+                  </a:lnTo>
+                  <a:lnTo>
+                    <a:pt x="2468868" y="276153"/>
+                  </a:lnTo>
+                  <a:lnTo>
+                    <a:pt x="2516346" y="240951"/>
+                  </a:lnTo>
+                  <a:lnTo>
+                    <a:pt x="2563824" y="204420"/>
+                  </a:lnTo>
+                  <a:lnTo>
+                    <a:pt x="2611303" y="166509"/>
+                  </a:lnTo>
+                  <a:lnTo>
+                    <a:pt x="2658781" y="127166"/>
+                  </a:lnTo>
+                  <a:lnTo>
+                    <a:pt x="2706259" y="86338"/>
+                  </a:lnTo>
+                  <a:lnTo>
+                    <a:pt x="2753737" y="43968"/>
                   </a:lnTo>
                   <a:lnTo>
                     <a:pt x="2801215" y="0"/>
@@ -7958,189 +7958,189 @@
           </p:nvSpPr>
           <p:spPr>
             <a:xfrm>
-              <a:off x="5300393" y="1406229"/>
-              <a:ext cx="2801215" cy="883859"/>
+              <a:off x="5300393" y="1400835"/>
+              <a:ext cx="2801215" cy="889216"/>
             </a:xfrm>
             <a:custGeom>
               <a:avLst/>
               <a:pathLst>
-                <a:path w="2801215" h="883859">
+                <a:path w="2801215" h="889216">
                   <a:moveTo>
-                    <a:pt x="0" y="883859"/>
+                    <a:pt x="0" y="889216"/>
                   </a:moveTo>
                   <a:lnTo>
-                    <a:pt x="47478" y="876374"/>
-                  </a:lnTo>
-                  <a:lnTo>
-                    <a:pt x="94956" y="868725"/>
-                  </a:lnTo>
-                  <a:lnTo>
-                    <a:pt x="142434" y="860909"/>
-                  </a:lnTo>
-                  <a:lnTo>
-                    <a:pt x="189912" y="852922"/>
-                  </a:lnTo>
-                  <a:lnTo>
-                    <a:pt x="237391" y="844761"/>
-                  </a:lnTo>
-                  <a:lnTo>
-                    <a:pt x="284869" y="836421"/>
-                  </a:lnTo>
-                  <a:lnTo>
-                    <a:pt x="332347" y="827898"/>
-                  </a:lnTo>
-                  <a:lnTo>
-                    <a:pt x="379825" y="819189"/>
-                  </a:lnTo>
-                  <a:lnTo>
-                    <a:pt x="427304" y="810290"/>
-                  </a:lnTo>
-                  <a:lnTo>
-                    <a:pt x="474782" y="801196"/>
-                  </a:lnTo>
-                  <a:lnTo>
-                    <a:pt x="522260" y="791903"/>
-                  </a:lnTo>
-                  <a:lnTo>
-                    <a:pt x="569738" y="782407"/>
-                  </a:lnTo>
-                  <a:lnTo>
-                    <a:pt x="617217" y="772704"/>
-                  </a:lnTo>
-                  <a:lnTo>
-                    <a:pt x="664695" y="762788"/>
-                  </a:lnTo>
-                  <a:lnTo>
-                    <a:pt x="712173" y="752655"/>
-                  </a:lnTo>
-                  <a:lnTo>
-                    <a:pt x="759651" y="742301"/>
-                  </a:lnTo>
-                  <a:lnTo>
-                    <a:pt x="807130" y="731720"/>
-                  </a:lnTo>
-                  <a:lnTo>
-                    <a:pt x="854608" y="720908"/>
-                  </a:lnTo>
-                  <a:lnTo>
-                    <a:pt x="902086" y="709860"/>
-                  </a:lnTo>
-                  <a:lnTo>
-                    <a:pt x="949564" y="698570"/>
-                  </a:lnTo>
-                  <a:lnTo>
-                    <a:pt x="997042" y="687034"/>
-                  </a:lnTo>
-                  <a:lnTo>
-                    <a:pt x="1044521" y="675245"/>
-                  </a:lnTo>
-                  <a:lnTo>
-                    <a:pt x="1091999" y="663198"/>
-                  </a:lnTo>
-                  <a:lnTo>
-                    <a:pt x="1139477" y="650889"/>
-                  </a:lnTo>
-                  <a:lnTo>
-                    <a:pt x="1186955" y="638310"/>
-                  </a:lnTo>
-                  <a:lnTo>
-                    <a:pt x="1234434" y="625456"/>
-                  </a:lnTo>
-                  <a:lnTo>
-                    <a:pt x="1281912" y="612322"/>
-                  </a:lnTo>
-                  <a:lnTo>
-                    <a:pt x="1329390" y="598900"/>
-                  </a:lnTo>
-                  <a:lnTo>
-                    <a:pt x="1376868" y="585185"/>
-                  </a:lnTo>
-                  <a:lnTo>
-                    <a:pt x="1424347" y="571171"/>
-                  </a:lnTo>
-                  <a:lnTo>
-                    <a:pt x="1471825" y="556850"/>
-                  </a:lnTo>
-                  <a:lnTo>
-                    <a:pt x="1519303" y="542216"/>
-                  </a:lnTo>
-                  <a:lnTo>
-                    <a:pt x="1566781" y="527263"/>
-                  </a:lnTo>
-                  <a:lnTo>
-                    <a:pt x="1614260" y="511983"/>
-                  </a:lnTo>
-                  <a:lnTo>
-                    <a:pt x="1661738" y="496369"/>
-                  </a:lnTo>
-                  <a:lnTo>
-                    <a:pt x="1709216" y="480414"/>
-                  </a:lnTo>
-                  <a:lnTo>
-                    <a:pt x="1756694" y="464111"/>
-                  </a:lnTo>
-                  <a:lnTo>
-                    <a:pt x="1804173" y="447451"/>
-                  </a:lnTo>
-                  <a:lnTo>
-                    <a:pt x="1851651" y="430428"/>
-                  </a:lnTo>
-                  <a:lnTo>
-                    <a:pt x="1899129" y="413033"/>
-                  </a:lnTo>
-                  <a:lnTo>
-                    <a:pt x="1946607" y="395258"/>
-                  </a:lnTo>
-                  <a:lnTo>
-                    <a:pt x="1994085" y="377095"/>
-                  </a:lnTo>
-                  <a:lnTo>
-                    <a:pt x="2041564" y="358535"/>
-                  </a:lnTo>
-                  <a:lnTo>
-                    <a:pt x="2089042" y="339570"/>
-                  </a:lnTo>
-                  <a:lnTo>
-                    <a:pt x="2136520" y="320192"/>
-                  </a:lnTo>
-                  <a:lnTo>
-                    <a:pt x="2183998" y="300390"/>
-                  </a:lnTo>
-                  <a:lnTo>
-                    <a:pt x="2231477" y="280156"/>
-                  </a:lnTo>
-                  <a:lnTo>
-                    <a:pt x="2278955" y="259480"/>
-                  </a:lnTo>
-                  <a:lnTo>
-                    <a:pt x="2326433" y="238353"/>
-                  </a:lnTo>
-                  <a:lnTo>
-                    <a:pt x="2373911" y="216765"/>
-                  </a:lnTo>
-                  <a:lnTo>
-                    <a:pt x="2421390" y="194706"/>
-                  </a:lnTo>
-                  <a:lnTo>
-                    <a:pt x="2468868" y="172166"/>
-                  </a:lnTo>
-                  <a:lnTo>
-                    <a:pt x="2516346" y="149134"/>
-                  </a:lnTo>
-                  <a:lnTo>
-                    <a:pt x="2563824" y="125599"/>
-                  </a:lnTo>
-                  <a:lnTo>
-                    <a:pt x="2611303" y="101551"/>
-                  </a:lnTo>
-                  <a:lnTo>
-                    <a:pt x="2658781" y="76979"/>
-                  </a:lnTo>
-                  <a:lnTo>
-                    <a:pt x="2706259" y="51871"/>
-                  </a:lnTo>
-                  <a:lnTo>
-                    <a:pt x="2753737" y="26215"/>
+                    <a:pt x="47478" y="881754"/>
+                  </a:lnTo>
+                  <a:lnTo>
+                    <a:pt x="94956" y="874127"/>
+                  </a:lnTo>
+                  <a:lnTo>
+                    <a:pt x="142434" y="866331"/>
+                  </a:lnTo>
+                  <a:lnTo>
+                    <a:pt x="189912" y="858362"/>
+                  </a:lnTo>
+                  <a:lnTo>
+                    <a:pt x="237391" y="850217"/>
+                  </a:lnTo>
+                  <a:lnTo>
+                    <a:pt x="284869" y="841892"/>
+                  </a:lnTo>
+                  <a:lnTo>
+                    <a:pt x="332347" y="833382"/>
+                  </a:lnTo>
+                  <a:lnTo>
+                    <a:pt x="379825" y="824684"/>
+                  </a:lnTo>
+                  <a:lnTo>
+                    <a:pt x="427304" y="815794"/>
+                  </a:lnTo>
+                  <a:lnTo>
+                    <a:pt x="474782" y="806707"/>
+                  </a:lnTo>
+                  <a:lnTo>
+                    <a:pt x="522260" y="797418"/>
+                  </a:lnTo>
+                  <a:lnTo>
+                    <a:pt x="569738" y="787924"/>
+                  </a:lnTo>
+                  <a:lnTo>
+                    <a:pt x="617217" y="778220"/>
+                  </a:lnTo>
+                  <a:lnTo>
+                    <a:pt x="664695" y="768301"/>
+                  </a:lnTo>
+                  <a:lnTo>
+                    <a:pt x="712173" y="758163"/>
+                  </a:lnTo>
+                  <a:lnTo>
+                    <a:pt x="759651" y="747800"/>
+                  </a:lnTo>
+                  <a:lnTo>
+                    <a:pt x="807130" y="737208"/>
+                  </a:lnTo>
+                  <a:lnTo>
+                    <a:pt x="854608" y="726382"/>
+                  </a:lnTo>
+                  <a:lnTo>
+                    <a:pt x="902086" y="715316"/>
+                  </a:lnTo>
+                  <a:lnTo>
+                    <a:pt x="949564" y="704005"/>
+                  </a:lnTo>
+                  <a:lnTo>
+                    <a:pt x="997042" y="692444"/>
+                  </a:lnTo>
+                  <a:lnTo>
+                    <a:pt x="1044521" y="680627"/>
+                  </a:lnTo>
+                  <a:lnTo>
+                    <a:pt x="1091999" y="668549"/>
+                  </a:lnTo>
+                  <a:lnTo>
+                    <a:pt x="1139477" y="656203"/>
+                  </a:lnTo>
+                  <a:lnTo>
+                    <a:pt x="1186955" y="643585"/>
+                  </a:lnTo>
+                  <a:lnTo>
+                    <a:pt x="1234434" y="630687"/>
+                  </a:lnTo>
+                  <a:lnTo>
+                    <a:pt x="1281912" y="617504"/>
+                  </a:lnTo>
+                  <a:lnTo>
+                    <a:pt x="1329390" y="604029"/>
+                  </a:lnTo>
+                  <a:lnTo>
+                    <a:pt x="1376868" y="590257"/>
+                  </a:lnTo>
+                  <a:lnTo>
+                    <a:pt x="1424347" y="576180"/>
+                  </a:lnTo>
+                  <a:lnTo>
+                    <a:pt x="1471825" y="561791"/>
+                  </a:lnTo>
+                  <a:lnTo>
+                    <a:pt x="1519303" y="547085"/>
+                  </a:lnTo>
+                  <a:lnTo>
+                    <a:pt x="1566781" y="532053"/>
+                  </a:lnTo>
+                  <a:lnTo>
+                    <a:pt x="1614260" y="516689"/>
+                  </a:lnTo>
+                  <a:lnTo>
+                    <a:pt x="1661738" y="500985"/>
+                  </a:lnTo>
+                  <a:lnTo>
+                    <a:pt x="1709216" y="484934"/>
+                  </a:lnTo>
+                  <a:lnTo>
+                    <a:pt x="1756694" y="468528"/>
+                  </a:lnTo>
+                  <a:lnTo>
+                    <a:pt x="1804173" y="451759"/>
+                  </a:lnTo>
+                  <a:lnTo>
+                    <a:pt x="1851651" y="434620"/>
+                  </a:lnTo>
+                  <a:lnTo>
+                    <a:pt x="1899129" y="417102"/>
+                  </a:lnTo>
+                  <a:lnTo>
+                    <a:pt x="1946607" y="399196"/>
+                  </a:lnTo>
+                  <a:lnTo>
+                    <a:pt x="1994085" y="380896"/>
+                  </a:lnTo>
+                  <a:lnTo>
+                    <a:pt x="2041564" y="362190"/>
+                  </a:lnTo>
+                  <a:lnTo>
+                    <a:pt x="2089042" y="343071"/>
+                  </a:lnTo>
+                  <a:lnTo>
+                    <a:pt x="2136520" y="323530"/>
+                  </a:lnTo>
+                  <a:lnTo>
+                    <a:pt x="2183998" y="303557"/>
+                  </a:lnTo>
+                  <a:lnTo>
+                    <a:pt x="2231477" y="283143"/>
+                  </a:lnTo>
+                  <a:lnTo>
+                    <a:pt x="2278955" y="262278"/>
+                  </a:lnTo>
+                  <a:lnTo>
+                    <a:pt x="2326433" y="240952"/>
+                  </a:lnTo>
+                  <a:lnTo>
+                    <a:pt x="2373911" y="219155"/>
+                  </a:lnTo>
+                  <a:lnTo>
+                    <a:pt x="2421390" y="196877"/>
+                  </a:lnTo>
+                  <a:lnTo>
+                    <a:pt x="2468868" y="174107"/>
+                  </a:lnTo>
+                  <a:lnTo>
+                    <a:pt x="2516346" y="150834"/>
+                  </a:lnTo>
+                  <a:lnTo>
+                    <a:pt x="2563824" y="127047"/>
+                  </a:lnTo>
+                  <a:lnTo>
+                    <a:pt x="2611303" y="102734"/>
+                  </a:lnTo>
+                  <a:lnTo>
+                    <a:pt x="2658781" y="77886"/>
+                  </a:lnTo>
+                  <a:lnTo>
+                    <a:pt x="2706259" y="52488"/>
+                  </a:lnTo>
+                  <a:lnTo>
+                    <a:pt x="2753737" y="26530"/>
                   </a:lnTo>
                   <a:lnTo>
                     <a:pt x="2801215" y="0"/>
@@ -8172,189 +8172,189 @@
           </p:nvSpPr>
           <p:spPr>
             <a:xfrm>
-              <a:off x="5300393" y="1373864"/>
-              <a:ext cx="2801215" cy="367839"/>
+              <a:off x="5300393" y="1378071"/>
+              <a:ext cx="2801215" cy="294437"/>
             </a:xfrm>
             <a:custGeom>
               <a:avLst/>
               <a:pathLst>
-                <a:path w="2801215" h="367839">
+                <a:path w="2801215" h="294437">
                   <a:moveTo>
-                    <a:pt x="0" y="367839"/>
+                    <a:pt x="0" y="294437"/>
                   </a:moveTo>
                   <a:lnTo>
-                    <a:pt x="47478" y="362604"/>
-                  </a:lnTo>
-                  <a:lnTo>
-                    <a:pt x="94956" y="357337"/>
-                  </a:lnTo>
-                  <a:lnTo>
-                    <a:pt x="142434" y="352040"/>
-                  </a:lnTo>
-                  <a:lnTo>
-                    <a:pt x="189912" y="346712"/>
-                  </a:lnTo>
-                  <a:lnTo>
-                    <a:pt x="237391" y="341352"/>
-                  </a:lnTo>
-                  <a:lnTo>
-                    <a:pt x="284869" y="335961"/>
-                  </a:lnTo>
-                  <a:lnTo>
-                    <a:pt x="332347" y="330539"/>
-                  </a:lnTo>
-                  <a:lnTo>
-                    <a:pt x="379825" y="325084"/>
-                  </a:lnTo>
-                  <a:lnTo>
-                    <a:pt x="427304" y="319598"/>
-                  </a:lnTo>
-                  <a:lnTo>
-                    <a:pt x="474782" y="314079"/>
-                  </a:lnTo>
-                  <a:lnTo>
-                    <a:pt x="522260" y="308528"/>
-                  </a:lnTo>
-                  <a:lnTo>
-                    <a:pt x="569738" y="302944"/>
-                  </a:lnTo>
-                  <a:lnTo>
-                    <a:pt x="617217" y="297328"/>
-                  </a:lnTo>
-                  <a:lnTo>
-                    <a:pt x="664695" y="291678"/>
-                  </a:lnTo>
-                  <a:lnTo>
-                    <a:pt x="712173" y="285996"/>
-                  </a:lnTo>
-                  <a:lnTo>
-                    <a:pt x="759651" y="280280"/>
-                  </a:lnTo>
-                  <a:lnTo>
-                    <a:pt x="807130" y="274530"/>
-                  </a:lnTo>
-                  <a:lnTo>
-                    <a:pt x="854608" y="268747"/>
-                  </a:lnTo>
-                  <a:lnTo>
-                    <a:pt x="902086" y="262930"/>
-                  </a:lnTo>
-                  <a:lnTo>
-                    <a:pt x="949564" y="257079"/>
-                  </a:lnTo>
-                  <a:lnTo>
-                    <a:pt x="997042" y="251193"/>
-                  </a:lnTo>
-                  <a:lnTo>
-                    <a:pt x="1044521" y="245273"/>
-                  </a:lnTo>
-                  <a:lnTo>
-                    <a:pt x="1091999" y="239318"/>
-                  </a:lnTo>
-                  <a:lnTo>
-                    <a:pt x="1139477" y="233328"/>
-                  </a:lnTo>
-                  <a:lnTo>
-                    <a:pt x="1186955" y="227303"/>
-                  </a:lnTo>
-                  <a:lnTo>
-                    <a:pt x="1234434" y="221243"/>
-                  </a:lnTo>
-                  <a:lnTo>
-                    <a:pt x="1281912" y="215147"/>
-                  </a:lnTo>
-                  <a:lnTo>
-                    <a:pt x="1329390" y="209015"/>
-                  </a:lnTo>
-                  <a:lnTo>
-                    <a:pt x="1376868" y="202847"/>
-                  </a:lnTo>
-                  <a:lnTo>
-                    <a:pt x="1424347" y="196643"/>
-                  </a:lnTo>
-                  <a:lnTo>
-                    <a:pt x="1471825" y="190403"/>
-                  </a:lnTo>
-                  <a:lnTo>
-                    <a:pt x="1519303" y="184126"/>
-                  </a:lnTo>
-                  <a:lnTo>
-                    <a:pt x="1566781" y="177813"/>
-                  </a:lnTo>
-                  <a:lnTo>
-                    <a:pt x="1614260" y="171462"/>
-                  </a:lnTo>
-                  <a:lnTo>
-                    <a:pt x="1661738" y="165074"/>
-                  </a:lnTo>
-                  <a:lnTo>
-                    <a:pt x="1709216" y="158648"/>
-                  </a:lnTo>
-                  <a:lnTo>
-                    <a:pt x="1756694" y="152185"/>
-                  </a:lnTo>
-                  <a:lnTo>
-                    <a:pt x="1804173" y="145684"/>
-                  </a:lnTo>
-                  <a:lnTo>
-                    <a:pt x="1851651" y="139145"/>
-                  </a:lnTo>
-                  <a:lnTo>
-                    <a:pt x="1899129" y="132567"/>
-                  </a:lnTo>
-                  <a:lnTo>
-                    <a:pt x="1946607" y="125951"/>
-                  </a:lnTo>
-                  <a:lnTo>
-                    <a:pt x="1994085" y="119296"/>
-                  </a:lnTo>
-                  <a:lnTo>
-                    <a:pt x="2041564" y="112602"/>
-                  </a:lnTo>
-                  <a:lnTo>
-                    <a:pt x="2089042" y="105869"/>
-                  </a:lnTo>
-                  <a:lnTo>
-                    <a:pt x="2136520" y="99096"/>
-                  </a:lnTo>
-                  <a:lnTo>
-                    <a:pt x="2183998" y="92284"/>
-                  </a:lnTo>
-                  <a:lnTo>
-                    <a:pt x="2231477" y="85431"/>
-                  </a:lnTo>
-                  <a:lnTo>
-                    <a:pt x="2278955" y="78539"/>
-                  </a:lnTo>
-                  <a:lnTo>
-                    <a:pt x="2326433" y="71606"/>
-                  </a:lnTo>
-                  <a:lnTo>
-                    <a:pt x="2373911" y="64632"/>
-                  </a:lnTo>
-                  <a:lnTo>
-                    <a:pt x="2421390" y="57617"/>
-                  </a:lnTo>
-                  <a:lnTo>
-                    <a:pt x="2468868" y="50562"/>
-                  </a:lnTo>
-                  <a:lnTo>
-                    <a:pt x="2516346" y="43465"/>
-                  </a:lnTo>
-                  <a:lnTo>
-                    <a:pt x="2563824" y="36326"/>
-                  </a:lnTo>
-                  <a:lnTo>
-                    <a:pt x="2611303" y="29145"/>
-                  </a:lnTo>
-                  <a:lnTo>
-                    <a:pt x="2658781" y="21923"/>
-                  </a:lnTo>
-                  <a:lnTo>
-                    <a:pt x="2706259" y="14658"/>
-                  </a:lnTo>
-                  <a:lnTo>
-                    <a:pt x="2753737" y="7350"/>
+                    <a:pt x="47478" y="290077"/>
+                  </a:lnTo>
+                  <a:lnTo>
+                    <a:pt x="94956" y="285696"/>
+                  </a:lnTo>
+                  <a:lnTo>
+                    <a:pt x="142434" y="281296"/>
+                  </a:lnTo>
+                  <a:lnTo>
+                    <a:pt x="189912" y="276875"/>
+                  </a:lnTo>
+                  <a:lnTo>
+                    <a:pt x="237391" y="272435"/>
+                  </a:lnTo>
+                  <a:lnTo>
+                    <a:pt x="284869" y="267974"/>
+                  </a:lnTo>
+                  <a:lnTo>
+                    <a:pt x="332347" y="263492"/>
+                  </a:lnTo>
+                  <a:lnTo>
+                    <a:pt x="379825" y="258991"/>
+                  </a:lnTo>
+                  <a:lnTo>
+                    <a:pt x="427304" y="254468"/>
+                  </a:lnTo>
+                  <a:lnTo>
+                    <a:pt x="474782" y="249926"/>
+                  </a:lnTo>
+                  <a:lnTo>
+                    <a:pt x="522260" y="245362"/>
+                  </a:lnTo>
+                  <a:lnTo>
+                    <a:pt x="569738" y="240778"/>
+                  </a:lnTo>
+                  <a:lnTo>
+                    <a:pt x="617217" y="236172"/>
+                  </a:lnTo>
+                  <a:lnTo>
+                    <a:pt x="664695" y="231546"/>
+                  </a:lnTo>
+                  <a:lnTo>
+                    <a:pt x="712173" y="226899"/>
+                  </a:lnTo>
+                  <a:lnTo>
+                    <a:pt x="759651" y="222230"/>
+                  </a:lnTo>
+                  <a:lnTo>
+                    <a:pt x="807130" y="217540"/>
+                  </a:lnTo>
+                  <a:lnTo>
+                    <a:pt x="854608" y="212829"/>
+                  </a:lnTo>
+                  <a:lnTo>
+                    <a:pt x="902086" y="208096"/>
+                  </a:lnTo>
+                  <a:lnTo>
+                    <a:pt x="949564" y="203342"/>
+                  </a:lnTo>
+                  <a:lnTo>
+                    <a:pt x="997042" y="198566"/>
+                  </a:lnTo>
+                  <a:lnTo>
+                    <a:pt x="1044521" y="193768"/>
+                  </a:lnTo>
+                  <a:lnTo>
+                    <a:pt x="1091999" y="188948"/>
+                  </a:lnTo>
+                  <a:lnTo>
+                    <a:pt x="1139477" y="184107"/>
+                  </a:lnTo>
+                  <a:lnTo>
+                    <a:pt x="1186955" y="179243"/>
+                  </a:lnTo>
+                  <a:lnTo>
+                    <a:pt x="1234434" y="174357"/>
+                  </a:lnTo>
+                  <a:lnTo>
+                    <a:pt x="1281912" y="169449"/>
+                  </a:lnTo>
+                  <a:lnTo>
+                    <a:pt x="1329390" y="164518"/>
+                  </a:lnTo>
+                  <a:lnTo>
+                    <a:pt x="1376868" y="159565"/>
+                  </a:lnTo>
+                  <a:lnTo>
+                    <a:pt x="1424347" y="154590"/>
+                  </a:lnTo>
+                  <a:lnTo>
+                    <a:pt x="1471825" y="149591"/>
+                  </a:lnTo>
+                  <a:lnTo>
+                    <a:pt x="1519303" y="144570"/>
+                  </a:lnTo>
+                  <a:lnTo>
+                    <a:pt x="1566781" y="139526"/>
+                  </a:lnTo>
+                  <a:lnTo>
+                    <a:pt x="1614260" y="134459"/>
+                  </a:lnTo>
+                  <a:lnTo>
+                    <a:pt x="1661738" y="129369"/>
+                  </a:lnTo>
+                  <a:lnTo>
+                    <a:pt x="1709216" y="124256"/>
+                  </a:lnTo>
+                  <a:lnTo>
+                    <a:pt x="1756694" y="119120"/>
+                  </a:lnTo>
+                  <a:lnTo>
+                    <a:pt x="1804173" y="113960"/>
+                  </a:lnTo>
+                  <a:lnTo>
+                    <a:pt x="1851651" y="108776"/>
+                  </a:lnTo>
+                  <a:lnTo>
+                    <a:pt x="1899129" y="103569"/>
+                  </a:lnTo>
+                  <a:lnTo>
+                    <a:pt x="1946607" y="98338"/>
+                  </a:lnTo>
+                  <a:lnTo>
+                    <a:pt x="1994085" y="93084"/>
+                  </a:lnTo>
+                  <a:lnTo>
+                    <a:pt x="2041564" y="87805"/>
+                  </a:lnTo>
+                  <a:lnTo>
+                    <a:pt x="2089042" y="82502"/>
+                  </a:lnTo>
+                  <a:lnTo>
+                    <a:pt x="2136520" y="77175"/>
+                  </a:lnTo>
+                  <a:lnTo>
+                    <a:pt x="2183998" y="71824"/>
+                  </a:lnTo>
+                  <a:lnTo>
+                    <a:pt x="2231477" y="66449"/>
+                  </a:lnTo>
+                  <a:lnTo>
+                    <a:pt x="2278955" y="61049"/>
+                  </a:lnTo>
+                  <a:lnTo>
+                    <a:pt x="2326433" y="55624"/>
+                  </a:lnTo>
+                  <a:lnTo>
+                    <a:pt x="2373911" y="50175"/>
+                  </a:lnTo>
+                  <a:lnTo>
+                    <a:pt x="2421390" y="44701"/>
+                  </a:lnTo>
+                  <a:lnTo>
+                    <a:pt x="2468868" y="39201"/>
+                  </a:lnTo>
+                  <a:lnTo>
+                    <a:pt x="2516346" y="33677"/>
+                  </a:lnTo>
+                  <a:lnTo>
+                    <a:pt x="2563824" y="28128"/>
+                  </a:lnTo>
+                  <a:lnTo>
+                    <a:pt x="2611303" y="22553"/>
+                  </a:lnTo>
+                  <a:lnTo>
+                    <a:pt x="2658781" y="16953"/>
+                  </a:lnTo>
+                  <a:lnTo>
+                    <a:pt x="2706259" y="11328"/>
+                  </a:lnTo>
+                  <a:lnTo>
+                    <a:pt x="2753737" y="5676"/>
                   </a:lnTo>
                   <a:lnTo>
                     <a:pt x="2801215" y="0"/>
@@ -8426,7 +8426,7 @@
           </p:nvSpPr>
           <p:spPr>
             <a:xfrm>
-              <a:off x="4962121" y="2595653"/>
+              <a:off x="4962121" y="2590480"/>
               <a:ext cx="141274" cy="72786"/>
             </a:xfrm>
             <a:prstGeom prst="rect">
@@ -8469,7 +8469,7 @@
           </p:nvSpPr>
           <p:spPr>
             <a:xfrm>
-              <a:off x="4962121" y="2046851"/>
+              <a:off x="4962121" y="2044794"/>
               <a:ext cx="141274" cy="72786"/>
             </a:xfrm>
             <a:prstGeom prst="rect">
@@ -8512,7 +8512,7 @@
           </p:nvSpPr>
           <p:spPr>
             <a:xfrm>
-              <a:off x="4962121" y="1498049"/>
+              <a:off x="4962121" y="1499108"/>
               <a:ext cx="141274" cy="72786"/>
             </a:xfrm>
             <a:prstGeom prst="rect">
@@ -8555,7 +8555,7 @@
           </p:nvSpPr>
           <p:spPr>
             <a:xfrm>
-              <a:off x="4962121" y="949247"/>
+              <a:off x="4962121" y="953421"/>
               <a:ext cx="141274" cy="72786"/>
             </a:xfrm>
             <a:prstGeom prst="rect">
@@ -8598,7 +8598,7 @@
           </p:nvSpPr>
           <p:spPr>
             <a:xfrm>
-              <a:off x="5128701" y="2632046"/>
+              <a:off x="5128701" y="2626874"/>
               <a:ext cx="31631" cy="0"/>
             </a:xfrm>
             <a:custGeom>
@@ -8638,7 +8638,7 @@
           </p:nvSpPr>
           <p:spPr>
             <a:xfrm>
-              <a:off x="5128701" y="2083244"/>
+              <a:off x="5128701" y="2081187"/>
               <a:ext cx="31631" cy="0"/>
             </a:xfrm>
             <a:custGeom>
@@ -8678,7 +8678,7 @@
           </p:nvSpPr>
           <p:spPr>
             <a:xfrm>
-              <a:off x="5128701" y="1534442"/>
+              <a:off x="5128701" y="1535501"/>
               <a:ext cx="31631" cy="0"/>
             </a:xfrm>
             <a:custGeom>
@@ -8718,7 +8718,7 @@
           </p:nvSpPr>
           <p:spPr>
             <a:xfrm>
-              <a:off x="5128701" y="985640"/>
+              <a:off x="5128701" y="989814"/>
               <a:ext cx="31631" cy="0"/>
             </a:xfrm>
             <a:custGeom>
@@ -8798,7 +8798,7 @@
           </p:nvSpPr>
           <p:spPr>
             <a:xfrm>
-              <a:off x="5383572" y="2636509"/>
+              <a:off x="5383757" y="2636509"/>
               <a:ext cx="0" cy="31631"/>
             </a:xfrm>
             <a:custGeom>
@@ -8838,7 +8838,7 @@
           </p:nvSpPr>
           <p:spPr>
             <a:xfrm>
-              <a:off x="6069709" y="2636509"/>
+              <a:off x="6070031" y="2636509"/>
               <a:ext cx="0" cy="31631"/>
             </a:xfrm>
             <a:custGeom>
@@ -8878,7 +8878,7 @@
           </p:nvSpPr>
           <p:spPr>
             <a:xfrm>
-              <a:off x="6755846" y="2636509"/>
+              <a:off x="6756306" y="2636509"/>
               <a:ext cx="0" cy="31631"/>
             </a:xfrm>
             <a:custGeom>
@@ -8918,7 +8918,7 @@
           </p:nvSpPr>
           <p:spPr>
             <a:xfrm>
-              <a:off x="7441982" y="2636509"/>
+              <a:off x="7442580" y="2636509"/>
               <a:ext cx="0" cy="31631"/>
             </a:xfrm>
             <a:custGeom>
@@ -8958,7 +8958,7 @@
           </p:nvSpPr>
           <p:spPr>
             <a:xfrm>
-              <a:off x="8128119" y="2636509"/>
+              <a:off x="8128854" y="2636509"/>
               <a:ext cx="0" cy="31631"/>
             </a:xfrm>
             <a:custGeom>
@@ -8998,7 +8998,7 @@
           </p:nvSpPr>
           <p:spPr>
             <a:xfrm>
-              <a:off x="5338401" y="2693445"/>
+              <a:off x="5338586" y="2693445"/>
               <a:ext cx="90342" cy="72786"/>
             </a:xfrm>
             <a:prstGeom prst="rect">
@@ -9041,7 +9041,7 @@
           </p:nvSpPr>
           <p:spPr>
             <a:xfrm>
-              <a:off x="6024538" y="2693445"/>
+              <a:off x="6024860" y="2693445"/>
               <a:ext cx="90342" cy="72786"/>
             </a:xfrm>
             <a:prstGeom prst="rect">
@@ -9084,7 +9084,7 @@
           </p:nvSpPr>
           <p:spPr>
             <a:xfrm>
-              <a:off x="6727591" y="2693445"/>
+              <a:off x="6728051" y="2693445"/>
               <a:ext cx="56509" cy="72786"/>
             </a:xfrm>
             <a:prstGeom prst="rect">
@@ -9127,7 +9127,7 @@
           </p:nvSpPr>
           <p:spPr>
             <a:xfrm>
-              <a:off x="7413728" y="2693445"/>
+              <a:off x="7414325" y="2693445"/>
               <a:ext cx="56509" cy="72786"/>
             </a:xfrm>
             <a:prstGeom prst="rect">
@@ -9170,7 +9170,7 @@
           </p:nvSpPr>
           <p:spPr>
             <a:xfrm>
-              <a:off x="8099864" y="2693445"/>
+              <a:off x="8100599" y="2693445"/>
               <a:ext cx="56509" cy="72786"/>
             </a:xfrm>
             <a:prstGeom prst="rect">
@@ -9877,7 +9877,7 @@
           </p:nvSpPr>
           <p:spPr>
             <a:xfrm>
-              <a:off x="1598560" y="3786247"/>
+              <a:off x="1594178" y="3786247"/>
               <a:ext cx="0" cy="1955742"/>
             </a:xfrm>
             <a:custGeom>
@@ -9920,7 +9920,7 @@
           </p:nvSpPr>
           <p:spPr>
             <a:xfrm>
-              <a:off x="1793805" y="3786247"/>
+              <a:off x="1767625" y="3786247"/>
               <a:ext cx="0" cy="1955742"/>
             </a:xfrm>
             <a:custGeom>
@@ -9963,7 +9963,7 @@
           </p:nvSpPr>
           <p:spPr>
             <a:xfrm>
-              <a:off x="1989049" y="3786247"/>
+              <a:off x="1941071" y="3786247"/>
               <a:ext cx="0" cy="1955742"/>
             </a:xfrm>
             <a:custGeom>
@@ -10006,7 +10006,7 @@
           </p:nvSpPr>
           <p:spPr>
             <a:xfrm>
-              <a:off x="2184293" y="3786247"/>
+              <a:off x="2114518" y="3786247"/>
               <a:ext cx="0" cy="1955742"/>
             </a:xfrm>
             <a:custGeom>
@@ -10049,8 +10049,8 @@
           </p:nvSpPr>
           <p:spPr>
             <a:xfrm>
-              <a:off x="1598560" y="5311261"/>
-              <a:ext cx="560557" cy="302674"/>
+              <a:off x="1594178" y="5311261"/>
+              <a:ext cx="579588" cy="302674"/>
             </a:xfrm>
             <a:prstGeom prst="rect">
               <a:avLst/>
@@ -10075,8 +10075,8 @@
           </p:nvSpPr>
           <p:spPr>
             <a:xfrm>
-              <a:off x="1598560" y="4845608"/>
-              <a:ext cx="575206" cy="302674"/>
+              <a:off x="1594178" y="4845608"/>
+              <a:ext cx="518932" cy="302674"/>
             </a:xfrm>
             <a:prstGeom prst="rect">
               <a:avLst/>
@@ -10101,8 +10101,8 @@
           </p:nvSpPr>
           <p:spPr>
             <a:xfrm>
-              <a:off x="1598560" y="4379955"/>
-              <a:ext cx="126121" cy="302674"/>
+              <a:off x="1594178" y="4379955"/>
+              <a:ext cx="135523" cy="302674"/>
             </a:xfrm>
             <a:prstGeom prst="rect">
               <a:avLst/>
@@ -10128,7 +10128,7 @@
           <p:spPr>
             <a:xfrm>
               <a:off x="1559730" y="3914302"/>
-              <a:ext cx="38830" cy="302674"/>
+              <a:ext cx="34447" cy="302674"/>
             </a:xfrm>
             <a:prstGeom prst="rect">
               <a:avLst/>
@@ -10153,7 +10153,7 @@
           </p:nvSpPr>
           <p:spPr>
             <a:xfrm>
-              <a:off x="1598560" y="3786247"/>
+              <a:off x="1594178" y="3786247"/>
               <a:ext cx="0" cy="1955742"/>
             </a:xfrm>
             <a:custGeom>
@@ -10265,7 +10265,7 @@
           </p:nvSpPr>
           <p:spPr>
             <a:xfrm>
-              <a:off x="2594464" y="3786247"/>
+              <a:off x="2593607" y="3786247"/>
               <a:ext cx="0" cy="1955742"/>
             </a:xfrm>
             <a:custGeom>
@@ -10308,7 +10308,7 @@
           </p:nvSpPr>
           <p:spPr>
             <a:xfrm>
-              <a:off x="2827233" y="3786247"/>
+              <a:off x="2825518" y="3786247"/>
               <a:ext cx="0" cy="1955742"/>
             </a:xfrm>
             <a:custGeom>
@@ -10352,7 +10352,7 @@
           <p:spPr>
             <a:xfrm>
               <a:off x="2361696" y="5311261"/>
-              <a:ext cx="614036" cy="302674"/>
+              <a:ext cx="382140" cy="302674"/>
             </a:xfrm>
             <a:prstGeom prst="rect">
               <a:avLst/>
@@ -10378,7 +10378,7 @@
           <p:spPr>
             <a:xfrm>
               <a:off x="2361696" y="4845608"/>
-              <a:ext cx="375241" cy="302674"/>
+              <a:ext cx="614036" cy="302674"/>
             </a:xfrm>
             <a:prstGeom prst="rect">
               <a:avLst/>
@@ -10404,7 +10404,7 @@
           <p:spPr>
             <a:xfrm>
               <a:off x="2361696" y="4379955"/>
-              <a:ext cx="26044" cy="302674"/>
+              <a:ext cx="25259" cy="302674"/>
             </a:xfrm>
             <a:prstGeom prst="rect">
               <a:avLst/>
@@ -10430,7 +10430,7 @@
           <p:spPr>
             <a:xfrm>
               <a:off x="2361696" y="3914302"/>
-              <a:ext cx="2118" cy="302674"/>
+              <a:ext cx="2456" cy="302674"/>
             </a:xfrm>
             <a:prstGeom prst="rect">
               <a:avLst/>
@@ -10524,7 +10524,7 @@
           </p:nvSpPr>
           <p:spPr>
             <a:xfrm>
-              <a:off x="3203797" y="3786247"/>
+              <a:off x="3178428" y="3786247"/>
               <a:ext cx="0" cy="1955742"/>
             </a:xfrm>
             <a:custGeom>
@@ -10567,7 +10567,7 @@
           </p:nvSpPr>
           <p:spPr>
             <a:xfrm>
-              <a:off x="3494225" y="3786247"/>
+              <a:off x="3439941" y="3786247"/>
               <a:ext cx="0" cy="1955742"/>
             </a:xfrm>
             <a:custGeom>
@@ -10610,7 +10610,7 @@
           </p:nvSpPr>
           <p:spPr>
             <a:xfrm>
-              <a:off x="3784654" y="3786247"/>
+              <a:off x="3701454" y="3786247"/>
               <a:ext cx="0" cy="1955742"/>
             </a:xfrm>
             <a:custGeom>
@@ -10653,8 +10653,8 @@
           </p:nvSpPr>
           <p:spPr>
             <a:xfrm>
-              <a:off x="3203797" y="5311261"/>
-              <a:ext cx="410568" cy="302674"/>
+              <a:off x="3178428" y="5311261"/>
+              <a:ext cx="33535" cy="302674"/>
             </a:xfrm>
             <a:prstGeom prst="rect">
               <a:avLst/>
@@ -10679,8 +10679,8 @@
           </p:nvSpPr>
           <p:spPr>
             <a:xfrm>
-              <a:off x="3163661" y="4845608"/>
-              <a:ext cx="40135" cy="302674"/>
+              <a:off x="3178428" y="4845608"/>
+              <a:ext cx="450256" cy="302674"/>
             </a:xfrm>
             <a:prstGeom prst="rect">
               <a:avLst/>
@@ -10705,8 +10705,8 @@
           </p:nvSpPr>
           <p:spPr>
             <a:xfrm>
-              <a:off x="3203797" y="4379955"/>
-              <a:ext cx="573901" cy="302674"/>
+              <a:off x="3178428" y="4379955"/>
+              <a:ext cx="599269" cy="302674"/>
             </a:xfrm>
             <a:prstGeom prst="rect">
               <a:avLst/>
@@ -10731,8 +10731,8 @@
           </p:nvSpPr>
           <p:spPr>
             <a:xfrm>
-              <a:off x="3189242" y="3914302"/>
-              <a:ext cx="14555" cy="302674"/>
+              <a:off x="3163661" y="3914302"/>
+              <a:ext cx="14766" cy="302674"/>
             </a:xfrm>
             <a:prstGeom prst="rect">
               <a:avLst/>
@@ -10757,7 +10757,7 @@
           </p:nvSpPr>
           <p:spPr>
             <a:xfrm>
-              <a:off x="3203797" y="3786247"/>
+              <a:off x="3178428" y="3786247"/>
               <a:ext cx="0" cy="1955742"/>
             </a:xfrm>
             <a:custGeom>
@@ -10869,7 +10869,7 @@
           </p:nvSpPr>
           <p:spPr>
             <a:xfrm>
-              <a:off x="4146655" y="3786247"/>
+              <a:off x="4137524" y="3786247"/>
               <a:ext cx="0" cy="1955742"/>
             </a:xfrm>
             <a:custGeom>
@@ -10912,7 +10912,7 @@
           </p:nvSpPr>
           <p:spPr>
             <a:xfrm>
-              <a:off x="4327683" y="3786247"/>
+              <a:off x="4309420" y="3786247"/>
               <a:ext cx="0" cy="1955742"/>
             </a:xfrm>
             <a:custGeom>
@@ -10955,7 +10955,7 @@
           </p:nvSpPr>
           <p:spPr>
             <a:xfrm>
-              <a:off x="4508710" y="3786247"/>
+              <a:off x="4481317" y="3786247"/>
               <a:ext cx="0" cy="1955742"/>
             </a:xfrm>
             <a:custGeom>
@@ -10999,7 +10999,7 @@
           <p:spPr>
             <a:xfrm>
               <a:off x="3965627" y="5311261"/>
-              <a:ext cx="558823" cy="302674"/>
+              <a:ext cx="614036" cy="302674"/>
             </a:xfrm>
             <a:prstGeom prst="rect">
               <a:avLst/>
@@ -11025,7 +11025,7 @@
           <p:spPr>
             <a:xfrm>
               <a:off x="3965627" y="4845608"/>
-              <a:ext cx="614036" cy="302674"/>
+              <a:ext cx="534573" cy="302674"/>
             </a:xfrm>
             <a:prstGeom prst="rect">
               <a:avLst/>
@@ -11051,7 +11051,7 @@
           <p:spPr>
             <a:xfrm>
               <a:off x="3965627" y="4379955"/>
-              <a:ext cx="295806" cy="302674"/>
+              <a:ext cx="301917" cy="302674"/>
             </a:xfrm>
             <a:prstGeom prst="rect">
               <a:avLst/>
@@ -11077,7 +11077,7 @@
           <p:spPr>
             <a:xfrm>
               <a:off x="3965627" y="3914302"/>
-              <a:ext cx="8899" cy="302674"/>
+              <a:ext cx="9428" cy="302674"/>
             </a:xfrm>
             <a:prstGeom prst="rect">
               <a:avLst/>
@@ -11357,7 +11357,7 @@
           </p:nvSpPr>
           <p:spPr>
             <a:xfrm>
-              <a:off x="1598560" y="5741990"/>
+              <a:off x="1594178" y="5741990"/>
               <a:ext cx="0" cy="31631"/>
             </a:xfrm>
             <a:custGeom>
@@ -11397,7 +11397,7 @@
           </p:nvSpPr>
           <p:spPr>
             <a:xfrm>
-              <a:off x="1793805" y="5741990"/>
+              <a:off x="1767625" y="5741990"/>
               <a:ext cx="0" cy="31631"/>
             </a:xfrm>
             <a:custGeom>
@@ -11437,7 +11437,7 @@
           </p:nvSpPr>
           <p:spPr>
             <a:xfrm>
-              <a:off x="1989049" y="5741990"/>
+              <a:off x="1941071" y="5741990"/>
               <a:ext cx="0" cy="31631"/>
             </a:xfrm>
             <a:custGeom>
@@ -11477,7 +11477,7 @@
           </p:nvSpPr>
           <p:spPr>
             <a:xfrm>
-              <a:off x="2184293" y="5741990"/>
+              <a:off x="2114518" y="5741990"/>
               <a:ext cx="0" cy="31631"/>
             </a:xfrm>
             <a:custGeom>
@@ -11517,7 +11517,7 @@
           </p:nvSpPr>
           <p:spPr>
             <a:xfrm>
-              <a:off x="1570305" y="5798926"/>
+              <a:off x="1565923" y="5798926"/>
               <a:ext cx="56509" cy="72786"/>
             </a:xfrm>
             <a:prstGeom prst="rect">
@@ -11560,7 +11560,7 @@
           </p:nvSpPr>
           <p:spPr>
             <a:xfrm>
-              <a:off x="1737295" y="5798926"/>
+              <a:off x="1711115" y="5798926"/>
               <a:ext cx="113019" cy="72786"/>
             </a:xfrm>
             <a:prstGeom prst="rect">
@@ -11603,7 +11603,7 @@
           </p:nvSpPr>
           <p:spPr>
             <a:xfrm>
-              <a:off x="1932539" y="5798926"/>
+              <a:off x="1884561" y="5798926"/>
               <a:ext cx="113019" cy="72786"/>
             </a:xfrm>
             <a:prstGeom prst="rect">
@@ -11646,7 +11646,7 @@
           </p:nvSpPr>
           <p:spPr>
             <a:xfrm>
-              <a:off x="2127783" y="5798926"/>
+              <a:off x="2058008" y="5798926"/>
               <a:ext cx="113019" cy="72786"/>
             </a:xfrm>
             <a:prstGeom prst="rect">
@@ -11769,7 +11769,7 @@
           </p:nvSpPr>
           <p:spPr>
             <a:xfrm>
-              <a:off x="2594464" y="5741990"/>
+              <a:off x="2593607" y="5741990"/>
               <a:ext cx="0" cy="31631"/>
             </a:xfrm>
             <a:custGeom>
@@ -11809,7 +11809,7 @@
           </p:nvSpPr>
           <p:spPr>
             <a:xfrm>
-              <a:off x="2827233" y="5741990"/>
+              <a:off x="2825518" y="5741990"/>
               <a:ext cx="0" cy="31631"/>
             </a:xfrm>
             <a:custGeom>
@@ -11892,7 +11892,7 @@
           </p:nvSpPr>
           <p:spPr>
             <a:xfrm>
-              <a:off x="2495572" y="5798926"/>
+              <a:off x="2494715" y="5798926"/>
               <a:ext cx="197784" cy="72786"/>
             </a:xfrm>
             <a:prstGeom prst="rect">
@@ -11935,7 +11935,7 @@
           </p:nvSpPr>
           <p:spPr>
             <a:xfrm>
-              <a:off x="2728340" y="5798926"/>
+              <a:off x="2726626" y="5798926"/>
               <a:ext cx="197784" cy="72786"/>
             </a:xfrm>
             <a:prstGeom prst="rect">
@@ -12018,7 +12018,7 @@
           </p:nvSpPr>
           <p:spPr>
             <a:xfrm>
-              <a:off x="3203797" y="5741990"/>
+              <a:off x="3178428" y="5741990"/>
               <a:ext cx="0" cy="31631"/>
             </a:xfrm>
             <a:custGeom>
@@ -12058,7 +12058,7 @@
           </p:nvSpPr>
           <p:spPr>
             <a:xfrm>
-              <a:off x="3494225" y="5741990"/>
+              <a:off x="3439941" y="5741990"/>
               <a:ext cx="0" cy="31631"/>
             </a:xfrm>
             <a:custGeom>
@@ -12098,7 +12098,7 @@
           </p:nvSpPr>
           <p:spPr>
             <a:xfrm>
-              <a:off x="3784654" y="5741990"/>
+              <a:off x="3701454" y="5741990"/>
               <a:ext cx="0" cy="31631"/>
             </a:xfrm>
             <a:custGeom>
@@ -12138,7 +12138,7 @@
           </p:nvSpPr>
           <p:spPr>
             <a:xfrm>
-              <a:off x="3175542" y="5798926"/>
+              <a:off x="3150173" y="5798926"/>
               <a:ext cx="56509" cy="72786"/>
             </a:xfrm>
             <a:prstGeom prst="rect">
@@ -12181,7 +12181,7 @@
           </p:nvSpPr>
           <p:spPr>
             <a:xfrm>
-              <a:off x="3367078" y="5798926"/>
+              <a:off x="3312794" y="5798926"/>
               <a:ext cx="254294" cy="72786"/>
             </a:xfrm>
             <a:prstGeom prst="rect">
@@ -12224,7 +12224,7 @@
           </p:nvSpPr>
           <p:spPr>
             <a:xfrm>
-              <a:off x="3685762" y="5798926"/>
+              <a:off x="3602562" y="5798926"/>
               <a:ext cx="197784" cy="72786"/>
             </a:xfrm>
             <a:prstGeom prst="rect">
@@ -12347,7 +12347,7 @@
           </p:nvSpPr>
           <p:spPr>
             <a:xfrm>
-              <a:off x="4146655" y="5741990"/>
+              <a:off x="4137524" y="5741990"/>
               <a:ext cx="0" cy="31631"/>
             </a:xfrm>
             <a:custGeom>
@@ -12387,7 +12387,7 @@
           </p:nvSpPr>
           <p:spPr>
             <a:xfrm>
-              <a:off x="4327683" y="5741990"/>
+              <a:off x="4309420" y="5741990"/>
               <a:ext cx="0" cy="31631"/>
             </a:xfrm>
             <a:custGeom>
@@ -12427,7 +12427,7 @@
           </p:nvSpPr>
           <p:spPr>
             <a:xfrm>
-              <a:off x="4508710" y="5741990"/>
+              <a:off x="4481317" y="5741990"/>
               <a:ext cx="0" cy="31631"/>
             </a:xfrm>
             <a:custGeom>
@@ -12510,7 +12510,7 @@
           </p:nvSpPr>
           <p:spPr>
             <a:xfrm>
-              <a:off x="4076017" y="5798926"/>
+              <a:off x="4066886" y="5798926"/>
               <a:ext cx="141274" cy="72786"/>
             </a:xfrm>
             <a:prstGeom prst="rect">
@@ -12553,7 +12553,7 @@
           </p:nvSpPr>
           <p:spPr>
             <a:xfrm>
-              <a:off x="4257045" y="5798926"/>
+              <a:off x="4238783" y="5798926"/>
               <a:ext cx="141274" cy="72786"/>
             </a:xfrm>
             <a:prstGeom prst="rect">
@@ -12596,7 +12596,7 @@
           </p:nvSpPr>
           <p:spPr>
             <a:xfrm>
-              <a:off x="4438073" y="5798926"/>
+              <a:off x="4410679" y="5798926"/>
               <a:ext cx="141274" cy="72786"/>
             </a:xfrm>
             <a:prstGeom prst="rect">
@@ -12679,7 +12679,50 @@
           </p:nvSpPr>
           <p:spPr>
             <a:xfrm>
-              <a:off x="483808" y="5426205"/>
+              <a:off x="914673" y="5426205"/>
+              <a:ext cx="557418" cy="72786"/>
+            </a:xfrm>
+            <a:prstGeom prst="rect">
+              <a:avLst/>
+            </a:prstGeom>
+            <a:noFill/>
+          </p:spPr>
+          <p:txBody>
+            <a:bodyPr lIns="0" rIns="0" tIns="0" bIns="0" anchorCtr="1" anchor="ctr" wrap="none"/>
+            <a:lstStyle/>
+            <a:p>
+              <a:pPr algn="l" marL="0" marR="0" indent="0">
+                <a:spcBef>
+                  <a:spcPts val="0"/>
+                </a:spcBef>
+                <a:spcAft>
+                  <a:spcPts val="0"/>
+                </a:spcAft>
+              </a:pPr>
+              <a:r>
+                <a:rPr sz="800" i="0" b="0">
+                  <a:solidFill>
+                    <a:srgbClr val="262626">
+                      <a:alpha val="100000"/>
+                    </a:srgbClr>
+                  </a:solidFill>
+                  <a:latin typeface="Arial"/>
+                  <a:cs typeface="Arial"/>
+                </a:rPr>
+                <a:t>survey effort</a:t>
+              </a:r>
+            </a:p>
+          </p:txBody>
+        </p:sp>
+        <p:sp>
+          <p:nvSpPr>
+            <p:cNvPr id="208" name="tx208"/>
+            <p:cNvSpPr/>
+            <p:nvPr/>
+          </p:nvSpPr>
+          <p:spPr>
+            <a:xfrm>
+              <a:off x="483808" y="4960552"/>
               <a:ext cx="988283" cy="72786"/>
             </a:xfrm>
             <a:prstGeom prst="rect">
@@ -12716,49 +12759,6 @@
         </p:sp>
         <p:sp>
           <p:nvSpPr>
-            <p:cNvPr id="208" name="tx208"/>
-            <p:cNvSpPr/>
-            <p:nvPr/>
-          </p:nvSpPr>
-          <p:spPr>
-            <a:xfrm>
-              <a:off x="914673" y="4960552"/>
-              <a:ext cx="557418" cy="72786"/>
-            </a:xfrm>
-            <a:prstGeom prst="rect">
-              <a:avLst/>
-            </a:prstGeom>
-            <a:noFill/>
-          </p:spPr>
-          <p:txBody>
-            <a:bodyPr lIns="0" rIns="0" tIns="0" bIns="0" anchorCtr="1" anchor="ctr" wrap="none"/>
-            <a:lstStyle/>
-            <a:p>
-              <a:pPr algn="l" marL="0" marR="0" indent="0">
-                <a:spcBef>
-                  <a:spcPts val="0"/>
-                </a:spcBef>
-                <a:spcAft>
-                  <a:spcPts val="0"/>
-                </a:spcAft>
-              </a:pPr>
-              <a:r>
-                <a:rPr sz="800" i="0" b="0">
-                  <a:solidFill>
-                    <a:srgbClr val="262626">
-                      <a:alpha val="100000"/>
-                    </a:srgbClr>
-                  </a:solidFill>
-                  <a:latin typeface="Arial"/>
-                  <a:cs typeface="Arial"/>
-                </a:rPr>
-                <a:t>survey effort</a:t>
-              </a:r>
-            </a:p>
-          </p:txBody>
-        </p:sp>
-        <p:sp>
-          <p:nvSpPr>
             <p:cNvPr id="209" name="tx209"/>
             <p:cNvSpPr/>
             <p:nvPr/>
@@ -13424,27 +13424,27 @@
           </p:nvSpPr>
           <p:spPr>
             <a:xfrm>
-              <a:off x="5458526" y="4280054"/>
-              <a:ext cx="2484949" cy="1188443"/>
+              <a:off x="5458526" y="4279469"/>
+              <a:ext cx="2484949" cy="1194137"/>
             </a:xfrm>
             <a:custGeom>
               <a:avLst/>
               <a:pathLst>
-                <a:path w="2484949" h="1188443">
+                <a:path w="2484949" h="1194137">
                   <a:moveTo>
-                    <a:pt x="0" y="1188443"/>
+                    <a:pt x="0" y="1194137"/>
                   </a:moveTo>
                   <a:lnTo>
-                    <a:pt x="496989" y="312995"/>
-                  </a:lnTo>
-                  <a:lnTo>
-                    <a:pt x="993979" y="186637"/>
-                  </a:lnTo>
-                  <a:lnTo>
-                    <a:pt x="1490969" y="12030"/>
-                  </a:lnTo>
-                  <a:lnTo>
-                    <a:pt x="1987959" y="13262"/>
+                    <a:pt x="496989" y="314364"/>
+                  </a:lnTo>
+                  <a:lnTo>
+                    <a:pt x="993979" y="190852"/>
+                  </a:lnTo>
+                  <a:lnTo>
+                    <a:pt x="1490969" y="11628"/>
+                  </a:lnTo>
+                  <a:lnTo>
+                    <a:pt x="1987959" y="12910"/>
                   </a:lnTo>
                   <a:lnTo>
                     <a:pt x="2484949" y="0"/>
@@ -13476,7 +13476,7 @@
           </p:nvSpPr>
           <p:spPr>
             <a:xfrm>
-              <a:off x="5421914" y="5431885"/>
+              <a:off x="5421914" y="5436994"/>
               <a:ext cx="73224" cy="73224"/>
             </a:xfrm>
             <a:prstGeom prst="ellipse">
@@ -13511,7 +13511,7 @@
           </p:nvSpPr>
           <p:spPr>
             <a:xfrm>
-              <a:off x="5918904" y="4556437"/>
+              <a:off x="5918904" y="4557221"/>
               <a:ext cx="73224" cy="73224"/>
             </a:xfrm>
             <a:prstGeom prst="ellipse">
@@ -13546,7 +13546,7 @@
           </p:nvSpPr>
           <p:spPr>
             <a:xfrm>
-              <a:off x="6415894" y="4430079"/>
+              <a:off x="6415894" y="4433708"/>
               <a:ext cx="73224" cy="73224"/>
             </a:xfrm>
             <a:prstGeom prst="ellipse">
@@ -13581,7 +13581,7 @@
           </p:nvSpPr>
           <p:spPr>
             <a:xfrm>
-              <a:off x="6912884" y="4255472"/>
+              <a:off x="6912884" y="4254485"/>
               <a:ext cx="73224" cy="73224"/>
             </a:xfrm>
             <a:prstGeom prst="ellipse">
@@ -13616,7 +13616,7 @@
           </p:nvSpPr>
           <p:spPr>
             <a:xfrm>
-              <a:off x="7409874" y="4256704"/>
+              <a:off x="7409874" y="4255766"/>
               <a:ext cx="73224" cy="73224"/>
             </a:xfrm>
             <a:prstGeom prst="ellipse">
@@ -13651,7 +13651,7 @@
           </p:nvSpPr>
           <p:spPr>
             <a:xfrm>
-              <a:off x="7906864" y="4243441"/>
+              <a:off x="7906864" y="4242856"/>
               <a:ext cx="73224" cy="73224"/>
             </a:xfrm>
             <a:prstGeom prst="ellipse">
@@ -13686,8 +13686,8 @@
           </p:nvSpPr>
           <p:spPr>
             <a:xfrm>
-              <a:off x="5333757" y="5313918"/>
-              <a:ext cx="249539" cy="73609"/>
+              <a:off x="5329962" y="5319027"/>
+              <a:ext cx="257129" cy="73609"/>
             </a:xfrm>
             <a:prstGeom prst="rect">
               <a:avLst/>
@@ -13716,7 +13716,7 @@
                   <a:latin typeface="Arial"/>
                   <a:cs typeface="Arial"/>
                 </a:rPr>
-                <a:t>0.411</a:t>
+                <a:t>0.410</a:t>
               </a:r>
             </a:p>
           </p:txBody>
@@ -13729,7 +13729,7 @@
           </p:nvSpPr>
           <p:spPr>
             <a:xfrm>
-              <a:off x="5826952" y="4438470"/>
+              <a:off x="5826952" y="4439254"/>
               <a:ext cx="257129" cy="73609"/>
             </a:xfrm>
             <a:prstGeom prst="rect">
@@ -13772,7 +13772,7 @@
           </p:nvSpPr>
           <p:spPr>
             <a:xfrm>
-              <a:off x="6323942" y="4312112"/>
+              <a:off x="6323942" y="4315742"/>
               <a:ext cx="257129" cy="73609"/>
             </a:xfrm>
             <a:prstGeom prst="rect">
@@ -13815,7 +13815,7 @@
           </p:nvSpPr>
           <p:spPr>
             <a:xfrm>
-              <a:off x="6820932" y="4137505"/>
+              <a:off x="6820932" y="4136518"/>
               <a:ext cx="257129" cy="73609"/>
             </a:xfrm>
             <a:prstGeom prst="rect">
@@ -13858,7 +13858,7 @@
           </p:nvSpPr>
           <p:spPr>
             <a:xfrm>
-              <a:off x="7317922" y="4138737"/>
+              <a:off x="7317922" y="4137800"/>
               <a:ext cx="257129" cy="73609"/>
             </a:xfrm>
             <a:prstGeom prst="rect">
@@ -13888,7 +13888,7 @@
                   <a:latin typeface="Arial"/>
                   <a:cs typeface="Arial"/>
                 </a:rPr>
-                <a:t>0.609</a:t>
+                <a:t>0.610</a:t>
               </a:r>
             </a:p>
           </p:txBody>
@@ -13901,7 +13901,7 @@
           </p:nvSpPr>
           <p:spPr>
             <a:xfrm>
-              <a:off x="7814911" y="4125475"/>
+              <a:off x="7814911" y="4124889"/>
               <a:ext cx="257129" cy="73609"/>
             </a:xfrm>
             <a:prstGeom prst="rect">
